--- a/lecons/F2/17_F2_M2_FS06_Urban_Problems_in_Cameroon.pptx
+++ b/lecons/F2/17_F2_M2_FS06_Urban_Problems_in_Cameroon.pptx
@@ -57,9 +57,18 @@
     <p:sldId id="305" r:id="rId51"/>
     <p:sldId id="306" r:id="rId52"/>
     <p:sldId id="307" r:id="rId53"/>
+    <p:sldId id="308" r:id="rId54"/>
+    <p:sldId id="309" r:id="rId55"/>
+    <p:sldId id="310" r:id="rId56"/>
+    <p:sldId id="311" r:id="rId57"/>
+    <p:sldId id="312" r:id="rId58"/>
+    <p:sldId id="313" r:id="rId59"/>
+    <p:sldId id="314" r:id="rId60"/>
+    <p:sldId id="315" r:id="rId61"/>
+    <p:sldId id="316" r:id="rId62"/>
   </p:sldIdLst>
   <p:notesMasterIdLst>
-    <p:notesMasterId r:id="rId54"/>
+    <p:notesMasterId r:id="rId63"/>
   </p:notesMasterIdLst>
   <p:sldSz cx="12192000" cy="6858000"/>
   <p:notesSz cx="6858000" cy="12192000"/>
@@ -641,7 +650,7 @@
           <a:p>
             <a:r>
               <a:rPr lang="en-US" dirty="0"/>
-              <a:t>Listen carefully to this situation from real life. After a heavy rain in Douala, gutters blocked with rubbish overflow and flood a quarter. Houses built on the riverbank are destroyed, and there is no road for rescue vehicles. Think about it, because I am going to ask you some questions.</a:t>
+              <a:t>Listen carefully to this situation from real life. After a heavy rain in Douala, gutters blocked with rubbish overflow and flood a quarter. Houses built on the riverbank are destroyed, and rescue vehicles cannot enter the narrow streets. A victim asks: "Why does this happen every year, and what can be done to stop it?" Think about it, because I am going to ask you some questions.</a:t>
             </a:r>
             <a:endParaRPr lang="en-US" dirty="0"/>
           </a:p>
@@ -817,7 +826,7 @@
           <a:p>
             <a:r>
               <a:rPr lang="en-US" dirty="0"/>
-              <a:t>Good. Floods and poor planning damage a quarter of Douala.</a:t>
+              <a:t>Good. A quarter of Douala is flooded every year, and people do not know the causes or the solutions.</a:t>
             </a:r>
             <a:endParaRPr lang="en-US" dirty="0"/>
           </a:p>
@@ -1169,7 +1178,7 @@
           <a:p>
             <a:r>
               <a:rPr lang="en-US" dirty="0"/>
-              <a:t>Good. They were built on the riverbank.</a:t>
+              <a:t>Good. They were built on the riverbank, a risky zone.</a:t>
             </a:r>
             <a:endParaRPr lang="en-US" dirty="0"/>
           </a:p>
@@ -1609,7 +1618,7 @@
           <a:p>
             <a:r>
               <a:rPr lang="en-US" dirty="0"/>
-              <a:t>Here is the question for Activity 1: Name three types of urban problems in Cameroon. Take one minute to think and write your answer in your rough notebook.</a:t>
+              <a:t>Here is the question for Activity 1: Which urban problem does this picture show? Take one minute to think and write your answer in your rough notebook.</a:t>
             </a:r>
             <a:endParaRPr lang="en-US" dirty="0"/>
           </a:p>
@@ -1697,7 +1706,7 @@
           <a:p>
             <a:r>
               <a:rPr lang="en-US" dirty="0"/>
-              <a:t>Let us check the answer together. Poor housing (slums), unemployment and waste (also floods, traffic, insecurity).</a:t>
+              <a:t>Let us check the answer together. Poor housing: a slum.</a:t>
             </a:r>
             <a:endParaRPr lang="en-US" dirty="0"/>
           </a:p>
@@ -1873,7 +1882,7 @@
           <a:p>
             <a:r>
               <a:rPr lang="en-US" dirty="0"/>
-              <a:t>Here is the question for Activity 2: Give two causes of urban problems. Take one minute to think and write your answer in your rough notebook.</a:t>
+              <a:t>Here is the question for Activity 2: Why do towns in Cameroon grow faster than their roads, houses and services? Take one minute to think and write your answer in your rough notebook.</a:t>
             </a:r>
             <a:endParaRPr lang="en-US" dirty="0"/>
           </a:p>
@@ -1961,7 +1970,7 @@
           <a:p>
             <a:r>
               <a:rPr lang="en-US" dirty="0"/>
-              <a:t>Let us check the answer together. Rapid population growth through rural exodus and poor town planning.</a:t>
+              <a:t>Let us check the answer together. Many people arrive from the villages (rural exodus), and planning is poor.</a:t>
             </a:r>
             <a:endParaRPr lang="en-US" dirty="0"/>
           </a:p>
@@ -2137,7 +2146,7 @@
           <a:p>
             <a:r>
               <a:rPr lang="en-US" dirty="0"/>
-              <a:t>Here is the question for Activity 3: Give two consequences of poor waste management. Take one minute to think and write your answer in your rough notebook.</a:t>
+              <a:t>Here is the question for Activity 3: Which diseases spread when rubbish and flood water stay in a quarter? Take one minute to think and write your answer in your rough notebook.</a:t>
             </a:r>
             <a:endParaRPr lang="en-US" dirty="0"/>
           </a:p>
@@ -2225,7 +2234,7 @@
           <a:p>
             <a:r>
               <a:rPr lang="en-US" dirty="0"/>
-              <a:t>Let us check the answer together. Floods and diseases such as cholera and malaria.</a:t>
+              <a:t>Let us check the answer together. Cholera, typhoid and malaria.</a:t>
             </a:r>
             <a:endParaRPr lang="en-US" dirty="0"/>
           </a:p>
@@ -2401,7 +2410,7 @@
           <a:p>
             <a:r>
               <a:rPr lang="en-US" dirty="0"/>
-              <a:t>Here is the question for Activity 4: What are the consequences of traffic jams? Take one minute to think and write your answer in your rough notebook.</a:t>
+              <a:t>Here is the question for Activity 4: What do traffic jams cost town dwellers? Take one minute to think and write your answer in your rough notebook.</a:t>
             </a:r>
             <a:endParaRPr lang="en-US" dirty="0"/>
           </a:p>
@@ -2577,7 +2586,7 @@
           <a:p>
             <a:r>
               <a:rPr lang="en-US" dirty="0"/>
-              <a:t>Let us check the answer together. Loss of time, accidents and air pollution.</a:t>
+              <a:t>Let us check the answer together. Lost time, lost money, accidents and air pollution.</a:t>
             </a:r>
             <a:endParaRPr lang="en-US" dirty="0"/>
           </a:p>
@@ -2665,7 +2674,7 @@
           <a:p>
             <a:r>
               <a:rPr lang="en-US" dirty="0"/>
-              <a:t>Activity 5. Look carefully at this picture: a planned new housing area. Observe every detail before I ask the question.</a:t>
+              <a:t>Activity 5. Look carefully at this picture: a planned housing area. Observe every detail before I ask the question.</a:t>
             </a:r>
             <a:endParaRPr lang="en-US" dirty="0"/>
           </a:p>
@@ -2753,7 +2762,7 @@
           <a:p>
             <a:r>
               <a:rPr lang="en-US" dirty="0"/>
-              <a:t>Here is the question for Activity 5: Give three solutions to urban problems. Take one minute to think and write your answer in your rough notebook.</a:t>
+              <a:t>Here is the question for Activity 5: What document must you get from the council before building a house in town? Take one minute to think and write your answer in your rough notebook.</a:t>
             </a:r>
             <a:endParaRPr lang="en-US" dirty="0"/>
           </a:p>
@@ -2841,7 +2850,7 @@
           <a:p>
             <a:r>
               <a:rPr lang="en-US" dirty="0"/>
-              <a:t>Let us check the answer together. Town planning and building permits, waste collection and job creation (also roads and drains).</a:t>
+              <a:t>Let us check the answer together. A building permit.</a:t>
             </a:r>
             <a:endParaRPr lang="en-US" dirty="0"/>
           </a:p>
@@ -3017,7 +3026,7 @@
           <a:p>
             <a:r>
               <a:rPr lang="en-US" dirty="0"/>
-              <a:t>Let us copy the definitions. The key terms of this lesson are defined as follows. On this slide we have Urban problem. Write each point on a new line, with the key term first, and explain it in your own words when we revise.</a:t>
+              <a:t>Let us copy the definitions. The key terms of this lesson are defined as follows. On this slide we have Urban problem and Town planning. Write each point on a new line, with the key term first, and explain it in your own words when we revise.</a:t>
             </a:r>
             <a:endParaRPr lang="en-US" dirty="0"/>
           </a:p>
@@ -3105,7 +3114,7 @@
           <a:p>
             <a:r>
               <a:rPr lang="en-US" dirty="0"/>
-              <a:t>Let us copy Types and Causes. Cameroonian towns face the following problems and causes. On this slide we have Types and Causes. Write each point on a new line, with the key term first, and explain it in your own words when we revise.</a:t>
+              <a:t>Let us copy Types of Urban Problems. Cameroonian towns face the following problems. Copy the point on Poor housing (slums) on the left, then draw the diagram on the right: a slum. Give it a title and label it clearly.</a:t>
             </a:r>
             <a:endParaRPr lang="en-US" dirty="0"/>
           </a:p>
@@ -3193,7 +3202,7 @@
           <a:p>
             <a:r>
               <a:rPr lang="en-US" dirty="0"/>
-              <a:t>Now draw this illustration in your notebook: urban problems. Give it a title and label it clearly.</a:t>
+              <a:t>We continue with Types of Urban Problems. On this slide we have Unemployment. Write each point on a new line, with the key term first, and explain it in your own words when we revise.</a:t>
             </a:r>
             <a:endParaRPr lang="en-US" dirty="0"/>
           </a:p>
@@ -3281,7 +3290,7 @@
           <a:p>
             <a:r>
               <a:rPr lang="en-US" dirty="0"/>
-              <a:t>Let us copy Consequences. Urban problems have the following consequences. On this slide we have Health and Social life. Write each point on a new line, with the key term first, and explain it in your own words when we revise.</a:t>
+              <a:t>Copy the point on Waste management on the left, then draw the diagram on the right: poor waste management. Give it a title and label it clearly.</a:t>
             </a:r>
             <a:endParaRPr lang="en-US" dirty="0"/>
           </a:p>
@@ -3369,7 +3378,7 @@
           <a:p>
             <a:r>
               <a:rPr lang="en-US" dirty="0"/>
-              <a:t>Let us copy Solutions and Regulations. Urban problems can be solved by the following measures. On this slide we have Town planning. Write each point on a new line, with the key term first, and explain it in your own words when we revise. When you finish, we go to the next slide.</a:t>
+              <a:t>Copy the point on Floods on the left, then draw the diagram on the right: a flooded street. Give it a title and label it clearly.</a:t>
             </a:r>
             <a:endParaRPr lang="en-US" dirty="0"/>
           </a:p>
@@ -3545,7 +3554,7 @@
           <a:p>
             <a:r>
               <a:rPr lang="en-US" dirty="0"/>
-              <a:t>We continue with Solutions and Regulations. On this slide we have Waste management and Jobs. Write each point on a new line, with the key term first, and explain it in your own words when we revise.</a:t>
+              <a:t>Copy the point on Traffic jams and bad roads on the left, then draw the diagram on the right: a traffic jam. Give it a title and label it clearly.</a:t>
             </a:r>
             <a:endParaRPr lang="en-US" dirty="0"/>
           </a:p>
@@ -3633,7 +3642,7 @@
           <a:p>
             <a:r>
               <a:rPr lang="en-US" dirty="0"/>
-              <a:t>Now let us check what you have understood. Question 1: Give three urban problems in Cameroon. Answer in your exercise book.</a:t>
+              <a:t>We continue with Types of Urban Problems. On this slide we have Insecurity. Write each point on a new line, with the key term first, and explain it in your own words when we revise.</a:t>
             </a:r>
             <a:endParaRPr lang="en-US" dirty="0"/>
           </a:p>
@@ -3721,7 +3730,7 @@
           <a:p>
             <a:r>
               <a:rPr lang="en-US" dirty="0"/>
-              <a:t>The expected answer is: slums, floods and unemployment. If you got it right, well done.</a:t>
+              <a:t>Let us copy Causes of Urban Problems. Urban problems have the following causes. Copy the point on Rapid population growth on the left, then draw the diagram on the right: a crowded town. Give it a title and label it clearly.</a:t>
             </a:r>
             <a:endParaRPr lang="en-US" dirty="0"/>
           </a:p>
@@ -3809,7 +3818,7 @@
           <a:p>
             <a:r>
               <a:rPr lang="en-US" dirty="0"/>
-              <a:t>Now let us check what you have understood. Question 2: Give two solutions. Answer in your exercise book.</a:t>
+              <a:t>We continue with Causes of Urban Problems. On this slide we have Poor town planning, Poverty and Lack of means. Write each point on a new line, with the key term first, and explain it in your own words when we revise. When you finish, we go to the next slide.</a:t>
             </a:r>
             <a:endParaRPr lang="en-US" dirty="0"/>
           </a:p>
@@ -3897,7 +3906,7 @@
           <a:p>
             <a:r>
               <a:rPr lang="en-US" dirty="0"/>
-              <a:t>The expected answer is: town planning and waste collection. If you got it right, well done.</a:t>
+              <a:t>We continue with Causes of Urban Problems. On this slide we have Bad behaviour. Write each point on a new line, with the key term first, and explain it in your own words when we revise.</a:t>
             </a:r>
             <a:endParaRPr lang="en-US" dirty="0"/>
           </a:p>
@@ -3985,7 +3994,7 @@
           <a:p>
             <a:r>
               <a:rPr lang="en-US" dirty="0"/>
-              <a:t>For those who need more practice, fill in the blanks in your exercise book. The answers are: number 1, slum; number 2, permit; number 3, floods.</a:t>
+              <a:t>Let us copy Consequences of Urban Problems. Urban problems have the following consequences. On this slide we have Diseases and Loss of life and property. Write each point on a new line, with the key term first, and explain it in your own words when we revise. When you finish, we go to the next slide.</a:t>
             </a:r>
             <a:endParaRPr lang="en-US" dirty="0"/>
           </a:p>
@@ -4073,7 +4082,7 @@
           <a:p>
             <a:r>
               <a:rPr lang="en-US" dirty="0"/>
-              <a:t>For your homework: Identify one urban problem in your quarter and propose two solutions. We shall correct it at the beginning of our next lesson.</a:t>
+              <a:t>We continue with Consequences of Urban Problems. On this slide we have Crime and insecurity and Loss of time and pollution. Write each point on a new line, with the key term first, and explain it in your own words when we revise.</a:t>
             </a:r>
             <a:endParaRPr lang="en-US" dirty="0"/>
           </a:p>
@@ -4161,7 +4170,7 @@
           <a:p>
             <a:r>
               <a:rPr lang="en-US" dirty="0"/>
-              <a:t>Our next lesson will be on Lesson 8: Relationships between Towns and Country Sides. Thank you for your attention, and see you next time.</a:t>
+              <a:t>Let us copy Solutions and Regulations in Force. Urban problems can be reduced by the following measures. Copy the point on Town planning on the left, then draw the diagram on the right: a planned housing area. Give it a title and label it clearly.</a:t>
             </a:r>
             <a:endParaRPr lang="en-US" dirty="0"/>
           </a:p>
@@ -4249,7 +4258,7 @@
           <a:p>
             <a:r>
               <a:rPr lang="en-US" dirty="0"/>
-              <a:t>Let us play the bilingual game. I say a word in English, and you give me the French word. Then we do the reverse.</a:t>
+              <a:t>We continue with Solutions and Regulations in Force. On this slide we have Risky zones and Waste collection. Write each point on a new line, with the key term first, and explain it in your own words when we revise. When you finish, we go to the next slide.</a:t>
             </a:r>
             <a:endParaRPr lang="en-US" dirty="0"/>
           </a:p>
@@ -4337,7 +4346,7 @@
           <a:p>
             <a:r>
               <a:rPr lang="en-US" dirty="0"/>
-              <a:t>I record this information in the official logbook of the class after the lesson.</a:t>
+              <a:t>We continue with Solutions and Regulations in Force. On this slide we have Roads and drains and Jobs and housing. Write each point on a new line, with the key term first, and explain it in your own words when we revise.</a:t>
             </a:r>
             <a:endParaRPr lang="en-US" dirty="0"/>
           </a:p>
@@ -4425,7 +4434,7 @@
           <a:p>
             <a:r>
               <a:rPr lang="en-US" dirty="0"/>
-              <a:t>Here is a good answer. The map shows Maroua, Garoua, Ngaoundéré, Bertoua, Yaoundé, Ebolowa, Douala, Buea, Bafoussam and Bamenda, with a title, a key and a north arrow. Compare it with your own answer and correct your work in red.</a:t>
+              <a:t>Here is a good answer. The map shows Maroua, Garoua, Ngaoundéré, Bertoua, Yaoundé, Ebolowa, Douala, Buea, Bafoussam and Bamenda, each in its region, with a title and a key. Compare it with your own answer and correct your work in red.</a:t>
             </a:r>
             <a:endParaRPr lang="en-US" dirty="0"/>
           </a:p>
@@ -4513,7 +4522,7 @@
           <a:p>
             <a:r>
               <a:rPr lang="en-US" dirty="0"/>
-              <a:t>I complete the second page of the logbook: the matter taught, the evaluation, the homework and the attendance.</a:t>
+              <a:t>Now let us check what you have understood. Question 1: Give three urban problems in Cameroon. Answer in your exercise book.</a:t>
             </a:r>
             <a:endParaRPr lang="en-US" dirty="0"/>
           </a:p>
@@ -4601,7 +4610,7 @@
           <a:p>
             <a:r>
               <a:rPr lang="en-US" dirty="0"/>
-              <a:t>This slide is for me, the teacher: it gives the timing of the lesson and what to do if the projector is not available.</a:t>
+              <a:t>The expected answer is: slums, floods and unemployment. If you got it right, well done.</a:t>
             </a:r>
             <a:endParaRPr lang="en-US" dirty="0"/>
           </a:p>
@@ -4689,7 +4698,7 @@
           <a:p>
             <a:r>
               <a:rPr lang="en-US" dirty="0"/>
-              <a:t>These are the references and picture credits used to prepare this lesson.</a:t>
+              <a:t>Now let us check what you have understood. Question 2: Give two solutions. Answer in your exercise book.</a:t>
             </a:r>
             <a:endParaRPr lang="en-US" dirty="0"/>
           </a:p>
@@ -4713,6 +4722,622 @@
             <a:fld id="{F7021451-1387-4CA6-816F-3879F97B5CBC}" type="slidenum">
               <a:rPr lang="en-US"/>
               <a:t>52</a:t>
+            </a:fld>
+            <a:endParaRPr lang="en-US"/>
+          </a:p>
+        </p:txBody>
+      </p:sp>
+    </p:spTree>
+    <p:extLst>
+      <p:ext uri="{BB962C8B-B14F-4D97-AF65-F5344CB8AC3E}">
+        <p14:creationId xmlns:p14="http://schemas.microsoft.com/office/powerpoint/2010/main" val="1024086991"/>
+      </p:ext>
+    </p:extLst>
+  </p:cSld>
+  <p:clrMapOvr>
+    <a:masterClrMapping/>
+  </p:clrMapOvr>
+</p:notes>
+</file>
+
+<file path=ppt/notesSlides/notesSlide53.xml><?xml version="1.0" encoding="utf-8"?>
+<p:notes xmlns:a="http://schemas.openxmlformats.org/drawingml/2006/main" xmlns:r="http://schemas.openxmlformats.org/officeDocument/2006/relationships" xmlns:p="http://schemas.openxmlformats.org/presentationml/2006/main">
+  <p:cSld>
+    <p:spTree>
+      <p:nvGrpSpPr>
+        <p:cNvPr id="1" name=""/>
+        <p:cNvGrpSpPr/>
+        <p:nvPr/>
+      </p:nvGrpSpPr>
+      <p:grpSpPr>
+        <a:xfrm>
+          <a:off x="0" y="0"/>
+          <a:ext cx="0" cy="0"/>
+          <a:chOff x="0" y="0"/>
+          <a:chExt cx="0" cy="0"/>
+        </a:xfrm>
+      </p:grpSpPr>
+      <p:sp>
+        <p:nvSpPr>
+          <p:cNvPr id="2" name="Slide Image Placeholder 1"/>
+          <p:cNvSpPr>
+            <a:spLocks noGrp="1" noRot="1" noChangeAspect="1"/>
+          </p:cNvSpPr>
+          <p:nvPr>
+            <p:ph type="sldImg"/>
+          </p:nvPr>
+        </p:nvSpPr>
+        <p:spPr/>
+      </p:sp>
+      <p:sp>
+        <p:nvSpPr>
+          <p:cNvPr id="3" name="Notes Placeholder 2"/>
+          <p:cNvSpPr>
+            <a:spLocks noGrp="1"/>
+          </p:cNvSpPr>
+          <p:nvPr>
+            <p:ph type="body" idx="1"/>
+          </p:nvPr>
+        </p:nvSpPr>
+        <p:spPr/>
+        <p:txBody>
+          <a:bodyPr/>
+          <a:lstStyle/>
+          <a:p>
+            <a:r>
+              <a:rPr lang="en-US" dirty="0"/>
+              <a:t>The expected answer is: town planning with building permits and waste collection. If you got it right, well done.</a:t>
+            </a:r>
+            <a:endParaRPr lang="en-US" dirty="0"/>
+          </a:p>
+        </p:txBody>
+      </p:sp>
+      <p:sp>
+        <p:nvSpPr>
+          <p:cNvPr id="4" name="Slide Number Placeholder 3"/>
+          <p:cNvSpPr>
+            <a:spLocks noGrp="1"/>
+          </p:cNvSpPr>
+          <p:nvPr>
+            <p:ph type="sldNum" sz="quarter" idx="10"/>
+          </p:nvPr>
+        </p:nvSpPr>
+        <p:spPr/>
+        <p:txBody>
+          <a:bodyPr/>
+          <a:lstStyle/>
+          <a:p>
+            <a:fld id="{F7021451-1387-4CA6-816F-3879F97B5CBC}" type="slidenum">
+              <a:rPr lang="en-US"/>
+              <a:t>53</a:t>
+            </a:fld>
+            <a:endParaRPr lang="en-US"/>
+          </a:p>
+        </p:txBody>
+      </p:sp>
+    </p:spTree>
+    <p:extLst>
+      <p:ext uri="{BB962C8B-B14F-4D97-AF65-F5344CB8AC3E}">
+        <p14:creationId xmlns:p14="http://schemas.microsoft.com/office/powerpoint/2010/main" val="1024086991"/>
+      </p:ext>
+    </p:extLst>
+  </p:cSld>
+  <p:clrMapOvr>
+    <a:masterClrMapping/>
+  </p:clrMapOvr>
+</p:notes>
+</file>
+
+<file path=ppt/notesSlides/notesSlide54.xml><?xml version="1.0" encoding="utf-8"?>
+<p:notes xmlns:a="http://schemas.openxmlformats.org/drawingml/2006/main" xmlns:r="http://schemas.openxmlformats.org/officeDocument/2006/relationships" xmlns:p="http://schemas.openxmlformats.org/presentationml/2006/main">
+  <p:cSld>
+    <p:spTree>
+      <p:nvGrpSpPr>
+        <p:cNvPr id="1" name=""/>
+        <p:cNvGrpSpPr/>
+        <p:nvPr/>
+      </p:nvGrpSpPr>
+      <p:grpSpPr>
+        <a:xfrm>
+          <a:off x="0" y="0"/>
+          <a:ext cx="0" cy="0"/>
+          <a:chOff x="0" y="0"/>
+          <a:chExt cx="0" cy="0"/>
+        </a:xfrm>
+      </p:grpSpPr>
+      <p:sp>
+        <p:nvSpPr>
+          <p:cNvPr id="2" name="Slide Image Placeholder 1"/>
+          <p:cNvSpPr>
+            <a:spLocks noGrp="1" noRot="1" noChangeAspect="1"/>
+          </p:cNvSpPr>
+          <p:nvPr>
+            <p:ph type="sldImg"/>
+          </p:nvPr>
+        </p:nvSpPr>
+        <p:spPr/>
+      </p:sp>
+      <p:sp>
+        <p:nvSpPr>
+          <p:cNvPr id="3" name="Notes Placeholder 2"/>
+          <p:cNvSpPr>
+            <a:spLocks noGrp="1"/>
+          </p:cNvSpPr>
+          <p:nvPr>
+            <p:ph type="body" idx="1"/>
+          </p:nvPr>
+        </p:nvSpPr>
+        <p:spPr/>
+        <p:txBody>
+          <a:bodyPr/>
+          <a:lstStyle/>
+          <a:p>
+            <a:r>
+              <a:rPr lang="en-US" dirty="0"/>
+              <a:t>For those who need more practice, fill in the blanks in your exercise book. The answers are: number 1, slum; number 2, permit; number 3, floods.</a:t>
+            </a:r>
+            <a:endParaRPr lang="en-US" dirty="0"/>
+          </a:p>
+        </p:txBody>
+      </p:sp>
+      <p:sp>
+        <p:nvSpPr>
+          <p:cNvPr id="4" name="Slide Number Placeholder 3"/>
+          <p:cNvSpPr>
+            <a:spLocks noGrp="1"/>
+          </p:cNvSpPr>
+          <p:nvPr>
+            <p:ph type="sldNum" sz="quarter" idx="10"/>
+          </p:nvPr>
+        </p:nvSpPr>
+        <p:spPr/>
+        <p:txBody>
+          <a:bodyPr/>
+          <a:lstStyle/>
+          <a:p>
+            <a:fld id="{F7021451-1387-4CA6-816F-3879F97B5CBC}" type="slidenum">
+              <a:rPr lang="en-US"/>
+              <a:t>54</a:t>
+            </a:fld>
+            <a:endParaRPr lang="en-US"/>
+          </a:p>
+        </p:txBody>
+      </p:sp>
+    </p:spTree>
+    <p:extLst>
+      <p:ext uri="{BB962C8B-B14F-4D97-AF65-F5344CB8AC3E}">
+        <p14:creationId xmlns:p14="http://schemas.microsoft.com/office/powerpoint/2010/main" val="1024086991"/>
+      </p:ext>
+    </p:extLst>
+  </p:cSld>
+  <p:clrMapOvr>
+    <a:masterClrMapping/>
+  </p:clrMapOvr>
+</p:notes>
+</file>
+
+<file path=ppt/notesSlides/notesSlide55.xml><?xml version="1.0" encoding="utf-8"?>
+<p:notes xmlns:a="http://schemas.openxmlformats.org/drawingml/2006/main" xmlns:r="http://schemas.openxmlformats.org/officeDocument/2006/relationships" xmlns:p="http://schemas.openxmlformats.org/presentationml/2006/main">
+  <p:cSld>
+    <p:spTree>
+      <p:nvGrpSpPr>
+        <p:cNvPr id="1" name=""/>
+        <p:cNvGrpSpPr/>
+        <p:nvPr/>
+      </p:nvGrpSpPr>
+      <p:grpSpPr>
+        <a:xfrm>
+          <a:off x="0" y="0"/>
+          <a:ext cx="0" cy="0"/>
+          <a:chOff x="0" y="0"/>
+          <a:chExt cx="0" cy="0"/>
+        </a:xfrm>
+      </p:grpSpPr>
+      <p:sp>
+        <p:nvSpPr>
+          <p:cNvPr id="2" name="Slide Image Placeholder 1"/>
+          <p:cNvSpPr>
+            <a:spLocks noGrp="1" noRot="1" noChangeAspect="1"/>
+          </p:cNvSpPr>
+          <p:nvPr>
+            <p:ph type="sldImg"/>
+          </p:nvPr>
+        </p:nvSpPr>
+        <p:spPr/>
+      </p:sp>
+      <p:sp>
+        <p:nvSpPr>
+          <p:cNvPr id="3" name="Notes Placeholder 2"/>
+          <p:cNvSpPr>
+            <a:spLocks noGrp="1"/>
+          </p:cNvSpPr>
+          <p:nvPr>
+            <p:ph type="body" idx="1"/>
+          </p:nvPr>
+        </p:nvSpPr>
+        <p:spPr/>
+        <p:txBody>
+          <a:bodyPr/>
+          <a:lstStyle/>
+          <a:p>
+            <a:r>
+              <a:rPr lang="en-US" dirty="0"/>
+              <a:t>For your homework: Identify one urban problem in your quarter and propose two solutions. We shall correct it at the beginning of our next lesson.</a:t>
+            </a:r>
+            <a:endParaRPr lang="en-US" dirty="0"/>
+          </a:p>
+        </p:txBody>
+      </p:sp>
+      <p:sp>
+        <p:nvSpPr>
+          <p:cNvPr id="4" name="Slide Number Placeholder 3"/>
+          <p:cNvSpPr>
+            <a:spLocks noGrp="1"/>
+          </p:cNvSpPr>
+          <p:nvPr>
+            <p:ph type="sldNum" sz="quarter" idx="10"/>
+          </p:nvPr>
+        </p:nvSpPr>
+        <p:spPr/>
+        <p:txBody>
+          <a:bodyPr/>
+          <a:lstStyle/>
+          <a:p>
+            <a:fld id="{F7021451-1387-4CA6-816F-3879F97B5CBC}" type="slidenum">
+              <a:rPr lang="en-US"/>
+              <a:t>55</a:t>
+            </a:fld>
+            <a:endParaRPr lang="en-US"/>
+          </a:p>
+        </p:txBody>
+      </p:sp>
+    </p:spTree>
+    <p:extLst>
+      <p:ext uri="{BB962C8B-B14F-4D97-AF65-F5344CB8AC3E}">
+        <p14:creationId xmlns:p14="http://schemas.microsoft.com/office/powerpoint/2010/main" val="1024086991"/>
+      </p:ext>
+    </p:extLst>
+  </p:cSld>
+  <p:clrMapOvr>
+    <a:masterClrMapping/>
+  </p:clrMapOvr>
+</p:notes>
+</file>
+
+<file path=ppt/notesSlides/notesSlide56.xml><?xml version="1.0" encoding="utf-8"?>
+<p:notes xmlns:a="http://schemas.openxmlformats.org/drawingml/2006/main" xmlns:r="http://schemas.openxmlformats.org/officeDocument/2006/relationships" xmlns:p="http://schemas.openxmlformats.org/presentationml/2006/main">
+  <p:cSld>
+    <p:spTree>
+      <p:nvGrpSpPr>
+        <p:cNvPr id="1" name=""/>
+        <p:cNvGrpSpPr/>
+        <p:nvPr/>
+      </p:nvGrpSpPr>
+      <p:grpSpPr>
+        <a:xfrm>
+          <a:off x="0" y="0"/>
+          <a:ext cx="0" cy="0"/>
+          <a:chOff x="0" y="0"/>
+          <a:chExt cx="0" cy="0"/>
+        </a:xfrm>
+      </p:grpSpPr>
+      <p:sp>
+        <p:nvSpPr>
+          <p:cNvPr id="2" name="Slide Image Placeholder 1"/>
+          <p:cNvSpPr>
+            <a:spLocks noGrp="1" noRot="1" noChangeAspect="1"/>
+          </p:cNvSpPr>
+          <p:nvPr>
+            <p:ph type="sldImg"/>
+          </p:nvPr>
+        </p:nvSpPr>
+        <p:spPr/>
+      </p:sp>
+      <p:sp>
+        <p:nvSpPr>
+          <p:cNvPr id="3" name="Notes Placeholder 2"/>
+          <p:cNvSpPr>
+            <a:spLocks noGrp="1"/>
+          </p:cNvSpPr>
+          <p:nvPr>
+            <p:ph type="body" idx="1"/>
+          </p:nvPr>
+        </p:nvSpPr>
+        <p:spPr/>
+        <p:txBody>
+          <a:bodyPr/>
+          <a:lstStyle/>
+          <a:p>
+            <a:r>
+              <a:rPr lang="en-US" dirty="0"/>
+              <a:t>Our next lesson will be on Lesson 8: Relationships between Towns and Country Sides. Thank you for your attention, and see you next time.</a:t>
+            </a:r>
+            <a:endParaRPr lang="en-US" dirty="0"/>
+          </a:p>
+        </p:txBody>
+      </p:sp>
+      <p:sp>
+        <p:nvSpPr>
+          <p:cNvPr id="4" name="Slide Number Placeholder 3"/>
+          <p:cNvSpPr>
+            <a:spLocks noGrp="1"/>
+          </p:cNvSpPr>
+          <p:nvPr>
+            <p:ph type="sldNum" sz="quarter" idx="10"/>
+          </p:nvPr>
+        </p:nvSpPr>
+        <p:spPr/>
+        <p:txBody>
+          <a:bodyPr/>
+          <a:lstStyle/>
+          <a:p>
+            <a:fld id="{F7021451-1387-4CA6-816F-3879F97B5CBC}" type="slidenum">
+              <a:rPr lang="en-US"/>
+              <a:t>56</a:t>
+            </a:fld>
+            <a:endParaRPr lang="en-US"/>
+          </a:p>
+        </p:txBody>
+      </p:sp>
+    </p:spTree>
+    <p:extLst>
+      <p:ext uri="{BB962C8B-B14F-4D97-AF65-F5344CB8AC3E}">
+        <p14:creationId xmlns:p14="http://schemas.microsoft.com/office/powerpoint/2010/main" val="1024086991"/>
+      </p:ext>
+    </p:extLst>
+  </p:cSld>
+  <p:clrMapOvr>
+    <a:masterClrMapping/>
+  </p:clrMapOvr>
+</p:notes>
+</file>
+
+<file path=ppt/notesSlides/notesSlide57.xml><?xml version="1.0" encoding="utf-8"?>
+<p:notes xmlns:a="http://schemas.openxmlformats.org/drawingml/2006/main" xmlns:r="http://schemas.openxmlformats.org/officeDocument/2006/relationships" xmlns:p="http://schemas.openxmlformats.org/presentationml/2006/main">
+  <p:cSld>
+    <p:spTree>
+      <p:nvGrpSpPr>
+        <p:cNvPr id="1" name=""/>
+        <p:cNvGrpSpPr/>
+        <p:nvPr/>
+      </p:nvGrpSpPr>
+      <p:grpSpPr>
+        <a:xfrm>
+          <a:off x="0" y="0"/>
+          <a:ext cx="0" cy="0"/>
+          <a:chOff x="0" y="0"/>
+          <a:chExt cx="0" cy="0"/>
+        </a:xfrm>
+      </p:grpSpPr>
+      <p:sp>
+        <p:nvSpPr>
+          <p:cNvPr id="2" name="Slide Image Placeholder 1"/>
+          <p:cNvSpPr>
+            <a:spLocks noGrp="1" noRot="1" noChangeAspect="1"/>
+          </p:cNvSpPr>
+          <p:nvPr>
+            <p:ph type="sldImg"/>
+          </p:nvPr>
+        </p:nvSpPr>
+        <p:spPr/>
+      </p:sp>
+      <p:sp>
+        <p:nvSpPr>
+          <p:cNvPr id="3" name="Notes Placeholder 2"/>
+          <p:cNvSpPr>
+            <a:spLocks noGrp="1"/>
+          </p:cNvSpPr>
+          <p:nvPr>
+            <p:ph type="body" idx="1"/>
+          </p:nvPr>
+        </p:nvSpPr>
+        <p:spPr/>
+        <p:txBody>
+          <a:bodyPr/>
+          <a:lstStyle/>
+          <a:p>
+            <a:r>
+              <a:rPr lang="en-US" dirty="0"/>
+              <a:t>Let us play the bilingual game. I say a word in English, and you give me the French word. Then we do the reverse.</a:t>
+            </a:r>
+            <a:endParaRPr lang="en-US" dirty="0"/>
+          </a:p>
+        </p:txBody>
+      </p:sp>
+      <p:sp>
+        <p:nvSpPr>
+          <p:cNvPr id="4" name="Slide Number Placeholder 3"/>
+          <p:cNvSpPr>
+            <a:spLocks noGrp="1"/>
+          </p:cNvSpPr>
+          <p:nvPr>
+            <p:ph type="sldNum" sz="quarter" idx="10"/>
+          </p:nvPr>
+        </p:nvSpPr>
+        <p:spPr/>
+        <p:txBody>
+          <a:bodyPr/>
+          <a:lstStyle/>
+          <a:p>
+            <a:fld id="{F7021451-1387-4CA6-816F-3879F97B5CBC}" type="slidenum">
+              <a:rPr lang="en-US"/>
+              <a:t>57</a:t>
+            </a:fld>
+            <a:endParaRPr lang="en-US"/>
+          </a:p>
+        </p:txBody>
+      </p:sp>
+    </p:spTree>
+    <p:extLst>
+      <p:ext uri="{BB962C8B-B14F-4D97-AF65-F5344CB8AC3E}">
+        <p14:creationId xmlns:p14="http://schemas.microsoft.com/office/powerpoint/2010/main" val="1024086991"/>
+      </p:ext>
+    </p:extLst>
+  </p:cSld>
+  <p:clrMapOvr>
+    <a:masterClrMapping/>
+  </p:clrMapOvr>
+</p:notes>
+</file>
+
+<file path=ppt/notesSlides/notesSlide58.xml><?xml version="1.0" encoding="utf-8"?>
+<p:notes xmlns:a="http://schemas.openxmlformats.org/drawingml/2006/main" xmlns:r="http://schemas.openxmlformats.org/officeDocument/2006/relationships" xmlns:p="http://schemas.openxmlformats.org/presentationml/2006/main">
+  <p:cSld>
+    <p:spTree>
+      <p:nvGrpSpPr>
+        <p:cNvPr id="1" name=""/>
+        <p:cNvGrpSpPr/>
+        <p:nvPr/>
+      </p:nvGrpSpPr>
+      <p:grpSpPr>
+        <a:xfrm>
+          <a:off x="0" y="0"/>
+          <a:ext cx="0" cy="0"/>
+          <a:chOff x="0" y="0"/>
+          <a:chExt cx="0" cy="0"/>
+        </a:xfrm>
+      </p:grpSpPr>
+      <p:sp>
+        <p:nvSpPr>
+          <p:cNvPr id="2" name="Slide Image Placeholder 1"/>
+          <p:cNvSpPr>
+            <a:spLocks noGrp="1" noRot="1" noChangeAspect="1"/>
+          </p:cNvSpPr>
+          <p:nvPr>
+            <p:ph type="sldImg"/>
+          </p:nvPr>
+        </p:nvSpPr>
+        <p:spPr/>
+      </p:sp>
+      <p:sp>
+        <p:nvSpPr>
+          <p:cNvPr id="3" name="Notes Placeholder 2"/>
+          <p:cNvSpPr>
+            <a:spLocks noGrp="1"/>
+          </p:cNvSpPr>
+          <p:nvPr>
+            <p:ph type="body" idx="1"/>
+          </p:nvPr>
+        </p:nvSpPr>
+        <p:spPr/>
+        <p:txBody>
+          <a:bodyPr/>
+          <a:lstStyle/>
+          <a:p>
+            <a:r>
+              <a:rPr lang="en-US" dirty="0"/>
+              <a:t>I record this information in the official logbook of the class after the lesson.</a:t>
+            </a:r>
+            <a:endParaRPr lang="en-US" dirty="0"/>
+          </a:p>
+        </p:txBody>
+      </p:sp>
+      <p:sp>
+        <p:nvSpPr>
+          <p:cNvPr id="4" name="Slide Number Placeholder 3"/>
+          <p:cNvSpPr>
+            <a:spLocks noGrp="1"/>
+          </p:cNvSpPr>
+          <p:nvPr>
+            <p:ph type="sldNum" sz="quarter" idx="10"/>
+          </p:nvPr>
+        </p:nvSpPr>
+        <p:spPr/>
+        <p:txBody>
+          <a:bodyPr/>
+          <a:lstStyle/>
+          <a:p>
+            <a:fld id="{F7021451-1387-4CA6-816F-3879F97B5CBC}" type="slidenum">
+              <a:rPr lang="en-US"/>
+              <a:t>58</a:t>
+            </a:fld>
+            <a:endParaRPr lang="en-US"/>
+          </a:p>
+        </p:txBody>
+      </p:sp>
+    </p:spTree>
+    <p:extLst>
+      <p:ext uri="{BB962C8B-B14F-4D97-AF65-F5344CB8AC3E}">
+        <p14:creationId xmlns:p14="http://schemas.microsoft.com/office/powerpoint/2010/main" val="1024086991"/>
+      </p:ext>
+    </p:extLst>
+  </p:cSld>
+  <p:clrMapOvr>
+    <a:masterClrMapping/>
+  </p:clrMapOvr>
+</p:notes>
+</file>
+
+<file path=ppt/notesSlides/notesSlide59.xml><?xml version="1.0" encoding="utf-8"?>
+<p:notes xmlns:a="http://schemas.openxmlformats.org/drawingml/2006/main" xmlns:r="http://schemas.openxmlformats.org/officeDocument/2006/relationships" xmlns:p="http://schemas.openxmlformats.org/presentationml/2006/main">
+  <p:cSld>
+    <p:spTree>
+      <p:nvGrpSpPr>
+        <p:cNvPr id="1" name=""/>
+        <p:cNvGrpSpPr/>
+        <p:nvPr/>
+      </p:nvGrpSpPr>
+      <p:grpSpPr>
+        <a:xfrm>
+          <a:off x="0" y="0"/>
+          <a:ext cx="0" cy="0"/>
+          <a:chOff x="0" y="0"/>
+          <a:chExt cx="0" cy="0"/>
+        </a:xfrm>
+      </p:grpSpPr>
+      <p:sp>
+        <p:nvSpPr>
+          <p:cNvPr id="2" name="Slide Image Placeholder 1"/>
+          <p:cNvSpPr>
+            <a:spLocks noGrp="1" noRot="1" noChangeAspect="1"/>
+          </p:cNvSpPr>
+          <p:nvPr>
+            <p:ph type="sldImg"/>
+          </p:nvPr>
+        </p:nvSpPr>
+        <p:spPr/>
+      </p:sp>
+      <p:sp>
+        <p:nvSpPr>
+          <p:cNvPr id="3" name="Notes Placeholder 2"/>
+          <p:cNvSpPr>
+            <a:spLocks noGrp="1"/>
+          </p:cNvSpPr>
+          <p:nvPr>
+            <p:ph type="body" idx="1"/>
+          </p:nvPr>
+        </p:nvSpPr>
+        <p:spPr/>
+        <p:txBody>
+          <a:bodyPr/>
+          <a:lstStyle/>
+          <a:p>
+            <a:r>
+              <a:rPr lang="en-US" dirty="0"/>
+              <a:t>I complete the second page of the logbook: the matter taught, the evaluation, the homework and the attendance.</a:t>
+            </a:r>
+            <a:endParaRPr lang="en-US" dirty="0"/>
+          </a:p>
+        </p:txBody>
+      </p:sp>
+      <p:sp>
+        <p:nvSpPr>
+          <p:cNvPr id="4" name="Slide Number Placeholder 3"/>
+          <p:cNvSpPr>
+            <a:spLocks noGrp="1"/>
+          </p:cNvSpPr>
+          <p:nvPr>
+            <p:ph type="sldNum" sz="quarter" idx="10"/>
+          </p:nvPr>
+        </p:nvSpPr>
+        <p:spPr/>
+        <p:txBody>
+          <a:bodyPr/>
+          <a:lstStyle/>
+          <a:p>
+            <a:fld id="{F7021451-1387-4CA6-816F-3879F97B5CBC}" type="slidenum">
+              <a:rPr lang="en-US"/>
+              <a:t>59</a:t>
             </a:fld>
             <a:endParaRPr lang="en-US"/>
           </a:p>
@@ -4819,6 +5444,182 @@
 </p:notes>
 </file>
 
+<file path=ppt/notesSlides/notesSlide60.xml><?xml version="1.0" encoding="utf-8"?>
+<p:notes xmlns:a="http://schemas.openxmlformats.org/drawingml/2006/main" xmlns:r="http://schemas.openxmlformats.org/officeDocument/2006/relationships" xmlns:p="http://schemas.openxmlformats.org/presentationml/2006/main">
+  <p:cSld>
+    <p:spTree>
+      <p:nvGrpSpPr>
+        <p:cNvPr id="1" name=""/>
+        <p:cNvGrpSpPr/>
+        <p:nvPr/>
+      </p:nvGrpSpPr>
+      <p:grpSpPr>
+        <a:xfrm>
+          <a:off x="0" y="0"/>
+          <a:ext cx="0" cy="0"/>
+          <a:chOff x="0" y="0"/>
+          <a:chExt cx="0" cy="0"/>
+        </a:xfrm>
+      </p:grpSpPr>
+      <p:sp>
+        <p:nvSpPr>
+          <p:cNvPr id="2" name="Slide Image Placeholder 1"/>
+          <p:cNvSpPr>
+            <a:spLocks noGrp="1" noRot="1" noChangeAspect="1"/>
+          </p:cNvSpPr>
+          <p:nvPr>
+            <p:ph type="sldImg"/>
+          </p:nvPr>
+        </p:nvSpPr>
+        <p:spPr/>
+      </p:sp>
+      <p:sp>
+        <p:nvSpPr>
+          <p:cNvPr id="3" name="Notes Placeholder 2"/>
+          <p:cNvSpPr>
+            <a:spLocks noGrp="1"/>
+          </p:cNvSpPr>
+          <p:nvPr>
+            <p:ph type="body" idx="1"/>
+          </p:nvPr>
+        </p:nvSpPr>
+        <p:spPr/>
+        <p:txBody>
+          <a:bodyPr/>
+          <a:lstStyle/>
+          <a:p>
+            <a:r>
+              <a:rPr lang="en-US" dirty="0"/>
+              <a:t>This slide is for me, the teacher: it gives the timing of the lesson and what to do if the projector is not available.</a:t>
+            </a:r>
+            <a:endParaRPr lang="en-US" dirty="0"/>
+          </a:p>
+        </p:txBody>
+      </p:sp>
+      <p:sp>
+        <p:nvSpPr>
+          <p:cNvPr id="4" name="Slide Number Placeholder 3"/>
+          <p:cNvSpPr>
+            <a:spLocks noGrp="1"/>
+          </p:cNvSpPr>
+          <p:nvPr>
+            <p:ph type="sldNum" sz="quarter" idx="10"/>
+          </p:nvPr>
+        </p:nvSpPr>
+        <p:spPr/>
+        <p:txBody>
+          <a:bodyPr/>
+          <a:lstStyle/>
+          <a:p>
+            <a:fld id="{F7021451-1387-4CA6-816F-3879F97B5CBC}" type="slidenum">
+              <a:rPr lang="en-US"/>
+              <a:t>60</a:t>
+            </a:fld>
+            <a:endParaRPr lang="en-US"/>
+          </a:p>
+        </p:txBody>
+      </p:sp>
+    </p:spTree>
+    <p:extLst>
+      <p:ext uri="{BB962C8B-B14F-4D97-AF65-F5344CB8AC3E}">
+        <p14:creationId xmlns:p14="http://schemas.microsoft.com/office/powerpoint/2010/main" val="1024086991"/>
+      </p:ext>
+    </p:extLst>
+  </p:cSld>
+  <p:clrMapOvr>
+    <a:masterClrMapping/>
+  </p:clrMapOvr>
+</p:notes>
+</file>
+
+<file path=ppt/notesSlides/notesSlide61.xml><?xml version="1.0" encoding="utf-8"?>
+<p:notes xmlns:a="http://schemas.openxmlformats.org/drawingml/2006/main" xmlns:r="http://schemas.openxmlformats.org/officeDocument/2006/relationships" xmlns:p="http://schemas.openxmlformats.org/presentationml/2006/main">
+  <p:cSld>
+    <p:spTree>
+      <p:nvGrpSpPr>
+        <p:cNvPr id="1" name=""/>
+        <p:cNvGrpSpPr/>
+        <p:nvPr/>
+      </p:nvGrpSpPr>
+      <p:grpSpPr>
+        <a:xfrm>
+          <a:off x="0" y="0"/>
+          <a:ext cx="0" cy="0"/>
+          <a:chOff x="0" y="0"/>
+          <a:chExt cx="0" cy="0"/>
+        </a:xfrm>
+      </p:grpSpPr>
+      <p:sp>
+        <p:nvSpPr>
+          <p:cNvPr id="2" name="Slide Image Placeholder 1"/>
+          <p:cNvSpPr>
+            <a:spLocks noGrp="1" noRot="1" noChangeAspect="1"/>
+          </p:cNvSpPr>
+          <p:nvPr>
+            <p:ph type="sldImg"/>
+          </p:nvPr>
+        </p:nvSpPr>
+        <p:spPr/>
+      </p:sp>
+      <p:sp>
+        <p:nvSpPr>
+          <p:cNvPr id="3" name="Notes Placeholder 2"/>
+          <p:cNvSpPr>
+            <a:spLocks noGrp="1"/>
+          </p:cNvSpPr>
+          <p:nvPr>
+            <p:ph type="body" idx="1"/>
+          </p:nvPr>
+        </p:nvSpPr>
+        <p:spPr/>
+        <p:txBody>
+          <a:bodyPr/>
+          <a:lstStyle/>
+          <a:p>
+            <a:r>
+              <a:rPr lang="en-US" dirty="0"/>
+              <a:t>These are the references and picture credits used to prepare this lesson.</a:t>
+            </a:r>
+            <a:endParaRPr lang="en-US" dirty="0"/>
+          </a:p>
+        </p:txBody>
+      </p:sp>
+      <p:sp>
+        <p:nvSpPr>
+          <p:cNvPr id="4" name="Slide Number Placeholder 3"/>
+          <p:cNvSpPr>
+            <a:spLocks noGrp="1"/>
+          </p:cNvSpPr>
+          <p:nvPr>
+            <p:ph type="sldNum" sz="quarter" idx="10"/>
+          </p:nvPr>
+        </p:nvSpPr>
+        <p:spPr/>
+        <p:txBody>
+          <a:bodyPr/>
+          <a:lstStyle/>
+          <a:p>
+            <a:fld id="{F7021451-1387-4CA6-816F-3879F97B5CBC}" type="slidenum">
+              <a:rPr lang="en-US"/>
+              <a:t>61</a:t>
+            </a:fld>
+            <a:endParaRPr lang="en-US"/>
+          </a:p>
+        </p:txBody>
+      </p:sp>
+    </p:spTree>
+    <p:extLst>
+      <p:ext uri="{BB962C8B-B14F-4D97-AF65-F5344CB8AC3E}">
+        <p14:creationId xmlns:p14="http://schemas.microsoft.com/office/powerpoint/2010/main" val="1024086991"/>
+      </p:ext>
+    </p:extLst>
+  </p:cSld>
+  <p:clrMapOvr>
+    <a:masterClrMapping/>
+  </p:clrMapOvr>
+</p:notes>
+</file>
+
 <file path=ppt/notesSlides/notesSlide7.xml><?xml version="1.0" encoding="utf-8"?>
 <p:notes xmlns:a="http://schemas.openxmlformats.org/drawingml/2006/main" xmlns:r="http://schemas.openxmlformats.org/officeDocument/2006/relationships" xmlns:p="http://schemas.openxmlformats.org/presentationml/2006/main">
   <p:cSld>
@@ -4953,7 +5754,7 @@
           <a:p>
             <a:r>
               <a:rPr lang="en-US" dirty="0"/>
-              <a:t>By the end of this lesson, you should be able to do three things. Number 1: identify the types of urban problems in Cameroon. Number 2: explain their causes and consequences. Number 3: propose practical solutions and know the regulations.</a:t>
+              <a:t>By the end of this lesson, you should be able to do three things. Number 1: identify the types of urban problems in Cameroon. Number 2: explain their causes and consequences. Number 3: propose practical solutions and know the regulations in force.</a:t>
             </a:r>
             <a:endParaRPr lang="en-US" dirty="0"/>
           </a:p>
@@ -6421,7 +7222,7 @@
         <p:spPr>
           <a:xfrm>
             <a:off x="0" y="658368"/>
-            <a:ext cx="5120640" cy="5833872"/>
+            <a:ext cx="2468880" cy="5833872"/>
           </a:xfrm>
           <a:prstGeom prst="rect">
             <a:avLst/>
@@ -6436,8 +7237,8 @@
         </p:nvSpPr>
         <p:spPr>
           <a:xfrm>
-            <a:off x="5349240" y="1005840"/>
-            <a:ext cx="6522415" cy="731520"/>
+            <a:off x="2697480" y="1005840"/>
+            <a:ext cx="9174175" cy="731520"/>
           </a:xfrm>
           <a:prstGeom prst="rect">
             <a:avLst/>
@@ -6477,8 +7278,8 @@
         </p:nvSpPr>
         <p:spPr>
           <a:xfrm>
-            <a:off x="5349240" y="1783080"/>
-            <a:ext cx="6522415" cy="4663440"/>
+            <a:off x="2697480" y="1783080"/>
+            <a:ext cx="9174175" cy="4663440"/>
           </a:xfrm>
           <a:prstGeom prst="rect">
             <a:avLst/>
@@ -6505,7 +7306,7 @@
                 <a:ea typeface="Times New Roman" pitchFamily="34" charset="-122"/>
                 <a:cs typeface="Times New Roman" pitchFamily="34" charset="-120"/>
               </a:rPr>
-              <a:t>After a heavy rain in Douala, gutters blocked with rubbish overflow and flood a quarter. Houses built on the riverbank are destroyed, and there is no road for rescue vehicles.</a:t>
+              <a:t>After a heavy rain in Douala, gutters blocked with rubbish overflow and flood a quarter. Houses built on the riverbank are destroyed, and rescue vehicles cannot enter the narrow streets. A victim asks: "Why does this happen every year, and what can be done to stop it?"</a:t>
             </a:r>
             <a:endParaRPr lang="en-US" sz="4000" dirty="0"/>
           </a:p>
@@ -6943,7 +7744,7 @@
                 <a:ea typeface="Times New Roman" pitchFamily="34" charset="-122"/>
                 <a:cs typeface="Times New Roman" pitchFamily="34" charset="-120"/>
               </a:rPr>
-              <a:t>Floods and poor planning damage a quarter of Douala.</a:t>
+              <a:t>A quarter of Douala is flooded every year, and people do not know the causes or the solutions.</a:t>
             </a:r>
             <a:endParaRPr lang="en-US" sz="4000" dirty="0"/>
           </a:p>
@@ -7819,7 +8620,7 @@
                 <a:ea typeface="Times New Roman" pitchFamily="34" charset="-122"/>
                 <a:cs typeface="Times New Roman" pitchFamily="34" charset="-120"/>
               </a:rPr>
-              <a:t>They were built on the riverbank.</a:t>
+              <a:t>They were built on the riverbank, a risky zone.</a:t>
             </a:r>
             <a:endParaRPr lang="en-US" sz="4000" dirty="0"/>
           </a:p>
@@ -9285,7 +10086,7 @@
                 <a:ea typeface="Times New Roman" pitchFamily="34" charset="-122"/>
                 <a:cs typeface="Times New Roman" pitchFamily="34" charset="-120"/>
               </a:rPr>
-              <a:t>Name three types of urban problems in Cameroon.</a:t>
+              <a:t>Which urban problem does this picture show?</a:t>
             </a:r>
             <a:endParaRPr lang="en-US" sz="4000" dirty="0"/>
           </a:p>
@@ -9504,7 +10305,7 @@
                 <a:ea typeface="Times New Roman" pitchFamily="34" charset="-122"/>
                 <a:cs typeface="Times New Roman" pitchFamily="34" charset="-120"/>
               </a:rPr>
-              <a:t>Poor housing (slums), unemployment and waste (also floods, traffic, insecurity).</a:t>
+              <a:t>Poor housing: a slum.</a:t>
             </a:r>
             <a:endParaRPr lang="en-US" sz="4000" dirty="0"/>
           </a:p>
@@ -9937,7 +10738,7 @@
                 <a:ea typeface="Times New Roman" pitchFamily="34" charset="-122"/>
                 <a:cs typeface="Times New Roman" pitchFamily="34" charset="-120"/>
               </a:rPr>
-              <a:t>Give two causes of urban problems.</a:t>
+              <a:t>Why do towns in Cameroon grow faster than their roads, houses and services?</a:t>
             </a:r>
             <a:endParaRPr lang="en-US" sz="4000" dirty="0"/>
           </a:p>
@@ -10156,7 +10957,7 @@
                 <a:ea typeface="Times New Roman" pitchFamily="34" charset="-122"/>
                 <a:cs typeface="Times New Roman" pitchFamily="34" charset="-120"/>
               </a:rPr>
-              <a:t>Rapid population growth through rural exodus and poor town planning.</a:t>
+              <a:t>Many people arrive from the villages (rural exodus), and planning is poor.</a:t>
             </a:r>
             <a:endParaRPr lang="en-US" sz="4000" dirty="0"/>
           </a:p>
@@ -10589,7 +11390,7 @@
                 <a:ea typeface="Times New Roman" pitchFamily="34" charset="-122"/>
                 <a:cs typeface="Times New Roman" pitchFamily="34" charset="-120"/>
               </a:rPr>
-              <a:t>Give two consequences of poor waste management.</a:t>
+              <a:t>Which diseases spread when rubbish and flood water stay in a quarter?</a:t>
             </a:r>
             <a:endParaRPr lang="en-US" sz="4000" dirty="0"/>
           </a:p>
@@ -10808,7 +11609,7 @@
                 <a:ea typeface="Times New Roman" pitchFamily="34" charset="-122"/>
                 <a:cs typeface="Times New Roman" pitchFamily="34" charset="-120"/>
               </a:rPr>
-              <a:t>Floods and diseases such as cholera and malaria.</a:t>
+              <a:t>Cholera, typhoid and malaria.</a:t>
             </a:r>
             <a:endParaRPr lang="en-US" sz="4000" dirty="0"/>
           </a:p>
@@ -11241,7 +12042,7 @@
                 <a:ea typeface="Times New Roman" pitchFamily="34" charset="-122"/>
                 <a:cs typeface="Times New Roman" pitchFamily="34" charset="-120"/>
               </a:rPr>
-              <a:t>What are the consequences of traffic jams?</a:t>
+              <a:t>What do traffic jams cost town dwellers?</a:t>
             </a:r>
             <a:endParaRPr lang="en-US" sz="4000" dirty="0"/>
           </a:p>
@@ -12469,7 +13270,7 @@
                 <a:ea typeface="Times New Roman" pitchFamily="34" charset="-122"/>
                 <a:cs typeface="Times New Roman" pitchFamily="34" charset="-120"/>
               </a:rPr>
-              <a:t>Loss of time, accidents and air pollution.</a:t>
+              <a:t>Lost time, lost money, accidents and air pollution.</a:t>
             </a:r>
             <a:endParaRPr lang="en-US" sz="4000" dirty="0"/>
           </a:p>
@@ -12581,7 +13382,7 @@
                 <a:ea typeface="Calibri" pitchFamily="34" charset="-122"/>
                 <a:cs typeface="Calibri" pitchFamily="34" charset="-120"/>
               </a:rPr>
-              <a:t>4. SOLUTIONS</a:t>
+              <a:t>4. SOLUTIONS AND REGULATIONS</a:t>
             </a:r>
             <a:endParaRPr lang="en-US" sz="1400" dirty="0"/>
           </a:p>
@@ -12683,7 +13484,7 @@
                 <a:ea typeface="Times New Roman" pitchFamily="34" charset="-122"/>
                 <a:cs typeface="Times New Roman" pitchFamily="34" charset="-120"/>
               </a:rPr>
-              <a:t>A planned new housing area.</a:t>
+              <a:t>A planned housing area.</a:t>
             </a:r>
             <a:endParaRPr lang="en-US" sz="1800" dirty="0"/>
           </a:p>
@@ -12795,7 +13596,7 @@
                 <a:ea typeface="Calibri" pitchFamily="34" charset="-122"/>
                 <a:cs typeface="Calibri" pitchFamily="34" charset="-120"/>
               </a:rPr>
-              <a:t>4. SOLUTIONS</a:t>
+              <a:t>4. SOLUTIONS AND REGULATIONS</a:t>
             </a:r>
             <a:endParaRPr lang="en-US" sz="1400" dirty="0"/>
           </a:p>
@@ -12902,7 +13703,7 @@
                 <a:ea typeface="Times New Roman" pitchFamily="34" charset="-122"/>
                 <a:cs typeface="Times New Roman" pitchFamily="34" charset="-120"/>
               </a:rPr>
-              <a:t>Give three solutions to urban problems.</a:t>
+              <a:t>What document must you get from the council before building a house in town?</a:t>
             </a:r>
             <a:endParaRPr lang="en-US" sz="4000" dirty="0"/>
           </a:p>
@@ -13014,7 +13815,7 @@
                 <a:ea typeface="Calibri" pitchFamily="34" charset="-122"/>
                 <a:cs typeface="Calibri" pitchFamily="34" charset="-120"/>
               </a:rPr>
-              <a:t>4. SOLUTIONS</a:t>
+              <a:t>4. SOLUTIONS AND REGULATIONS</a:t>
             </a:r>
             <a:endParaRPr lang="en-US" sz="1400" dirty="0"/>
           </a:p>
@@ -13121,7 +13922,7 @@
                 <a:ea typeface="Times New Roman" pitchFamily="34" charset="-122"/>
                 <a:cs typeface="Times New Roman" pitchFamily="34" charset="-120"/>
               </a:rPr>
-              <a:t>Town planning and building permits, waste collection and job creation (also roads and drains).</a:t>
+              <a:t>A building permit.</a:t>
             </a:r>
             <a:endParaRPr lang="en-US" sz="4000" dirty="0"/>
           </a:p>
@@ -13515,7 +14316,7 @@
         <p:spPr>
           <a:xfrm>
             <a:off x="0" y="658368"/>
-            <a:ext cx="5120640" cy="5833872"/>
+            <a:ext cx="2468880" cy="5833872"/>
           </a:xfrm>
           <a:prstGeom prst="rect">
             <a:avLst/>
@@ -13530,8 +14331,8 @@
         </p:nvSpPr>
         <p:spPr>
           <a:xfrm>
-            <a:off x="5349240" y="1005840"/>
-            <a:ext cx="6522415" cy="731520"/>
+            <a:off x="2697480" y="1005840"/>
+            <a:ext cx="9174175" cy="731520"/>
           </a:xfrm>
           <a:prstGeom prst="rect">
             <a:avLst/>
@@ -13571,8 +14372,8 @@
         </p:nvSpPr>
         <p:spPr>
           <a:xfrm>
-            <a:off x="5349240" y="1783080"/>
-            <a:ext cx="6522415" cy="4663440"/>
+            <a:off x="2697480" y="1783080"/>
+            <a:ext cx="9174175" cy="4663440"/>
           </a:xfrm>
           <a:prstGeom prst="rect">
             <a:avLst/>
@@ -13637,6 +14438,43 @@
                 <a:cs typeface="Times New Roman" pitchFamily="34" charset="-120"/>
               </a:rPr>
               <a:t>It is a difficulty that affects the life of people in towns.</a:t>
+            </a:r>
+            <a:endParaRPr lang="en-US" sz="4000" dirty="0"/>
+          </a:p>
+          <a:p>
+            <a:pPr algn="l" indent="0" marL="0">
+              <a:spcAft>
+                <a:spcPts val="800"/>
+              </a:spcAft>
+              <a:buNone/>
+            </a:pPr>
+            <a:r>
+              <a:rPr lang="en-US" sz="4000" b="1" dirty="0">
+                <a:solidFill>
+                  <a:srgbClr val="111111"/>
+                </a:solidFill>
+                <a:latin typeface="Times New Roman" pitchFamily="34" charset="0"/>
+                <a:ea typeface="Times New Roman" pitchFamily="34" charset="-122"/>
+                <a:cs typeface="Times New Roman" pitchFamily="34" charset="-120"/>
+              </a:rPr>
+              <a:t>Town planning: </a:t>
+            </a:r>
+            <a:pPr algn="l" indent="0" marL="0">
+              <a:spcAft>
+                <a:spcPts val="800"/>
+              </a:spcAft>
+              <a:buNone/>
+            </a:pPr>
+            <a:r>
+              <a:rPr lang="en-US" sz="4000" dirty="0">
+                <a:solidFill>
+                  <a:srgbClr val="111111"/>
+                </a:solidFill>
+                <a:latin typeface="Times New Roman" pitchFamily="34" charset="0"/>
+                <a:ea typeface="Times New Roman" pitchFamily="34" charset="-122"/>
+                <a:cs typeface="Times New Roman" pitchFamily="34" charset="-120"/>
+              </a:rPr>
+              <a:t>It is the organisation of the use of land in a town: quarters, roads, drains and services.</a:t>
             </a:r>
             <a:endParaRPr lang="en-US" sz="4000" dirty="0"/>
           </a:p>
@@ -13754,9 +14592,129 @@
           </a:p>
         </p:txBody>
       </p:sp>
+      <p:sp>
+        <p:nvSpPr>
+          <p:cNvPr id="3" name="Text 1"/>
+          <p:cNvSpPr/>
+          <p:nvPr/>
+        </p:nvSpPr>
+        <p:spPr>
+          <a:xfrm>
+            <a:off x="365760" y="1005840"/>
+            <a:ext cx="11460175" cy="731520"/>
+          </a:xfrm>
+          <a:prstGeom prst="rect">
+            <a:avLst/>
+          </a:prstGeom>
+          <a:noFill/>
+          <a:ln/>
+        </p:spPr>
+        <p:txBody>
+          <a:bodyPr wrap="square" lIns="0" tIns="0" rIns="0" bIns="0" rtlCol="0" anchor="ctr">
+            <a:normAutofit/>
+          </a:bodyPr>
+          <a:lstStyle/>
+          <a:p>
+            <a:pPr algn="ctr" indent="0" marL="0">
+              <a:buNone/>
+            </a:pPr>
+            <a:r>
+              <a:rPr lang="en-US" sz="3600" b="1" dirty="0">
+                <a:solidFill>
+                  <a:srgbClr val="990011"/>
+                </a:solidFill>
+                <a:latin typeface="Times New Roman" pitchFamily="34" charset="0"/>
+                <a:ea typeface="Times New Roman" pitchFamily="34" charset="-122"/>
+                <a:cs typeface="Times New Roman" pitchFamily="34" charset="-120"/>
+              </a:rPr>
+              <a:t>1. Types of Urban Problems</a:t>
+            </a:r>
+            <a:endParaRPr lang="en-US" sz="3600" dirty="0"/>
+          </a:p>
+        </p:txBody>
+      </p:sp>
+      <p:sp>
+        <p:nvSpPr>
+          <p:cNvPr id="4" name="Text 2"/>
+          <p:cNvSpPr/>
+          <p:nvPr/>
+        </p:nvSpPr>
+        <p:spPr>
+          <a:xfrm>
+            <a:off x="365760" y="1783080"/>
+            <a:ext cx="4846320" cy="4617720"/>
+          </a:xfrm>
+          <a:prstGeom prst="rect">
+            <a:avLst/>
+          </a:prstGeom>
+          <a:noFill/>
+          <a:ln/>
+        </p:spPr>
+        <p:txBody>
+          <a:bodyPr wrap="square" lIns="0" tIns="0" rIns="0" bIns="0" rtlCol="0" anchor="t"/>
+          <a:lstStyle/>
+          <a:p>
+            <a:pPr algn="l" indent="0" marL="0">
+              <a:spcAft>
+                <a:spcPts val="800"/>
+              </a:spcAft>
+              <a:buNone/>
+            </a:pPr>
+            <a:r>
+              <a:rPr lang="en-US" sz="3600" i="1" dirty="0">
+                <a:solidFill>
+                  <a:srgbClr val="111111"/>
+                </a:solidFill>
+                <a:latin typeface="Times New Roman" pitchFamily="34" charset="0"/>
+                <a:ea typeface="Times New Roman" pitchFamily="34" charset="-122"/>
+                <a:cs typeface="Times New Roman" pitchFamily="34" charset="-120"/>
+              </a:rPr>
+              <a:t>Cameroonian towns face the following problems:</a:t>
+            </a:r>
+            <a:endParaRPr lang="en-US" sz="3600" dirty="0"/>
+          </a:p>
+          <a:p>
+            <a:pPr algn="l" indent="0" marL="0">
+              <a:spcAft>
+                <a:spcPts val="800"/>
+              </a:spcAft>
+              <a:buNone/>
+            </a:pPr>
+            <a:r>
+              <a:rPr lang="en-US" sz="3600" b="1" dirty="0">
+                <a:solidFill>
+                  <a:srgbClr val="111111"/>
+                </a:solidFill>
+                <a:latin typeface="Times New Roman" pitchFamily="34" charset="0"/>
+                <a:ea typeface="Times New Roman" pitchFamily="34" charset="-122"/>
+                <a:cs typeface="Times New Roman" pitchFamily="34" charset="-120"/>
+              </a:rPr>
+              <a:t>Poor housing (slums): </a:t>
+            </a:r>
+            <a:pPr algn="l" indent="0" marL="0">
+              <a:spcAft>
+                <a:spcPts val="800"/>
+              </a:spcAft>
+              <a:buNone/>
+            </a:pPr>
+            <a:r>
+              <a:rPr lang="en-US" sz="3600" dirty="0">
+                <a:solidFill>
+                  <a:srgbClr val="111111"/>
+                </a:solidFill>
+                <a:latin typeface="Times New Roman" pitchFamily="34" charset="0"/>
+                <a:ea typeface="Times New Roman" pitchFamily="34" charset="-122"/>
+                <a:cs typeface="Times New Roman" pitchFamily="34" charset="-120"/>
+              </a:rPr>
+              <a:t>Many quarters are crowded, unplanned and built in risky zones.</a:t>
+            </a:r>
+            <a:endParaRPr lang="en-US" sz="3600" dirty="0"/>
+          </a:p>
+        </p:txBody>
+      </p:sp>
       <p:pic>
         <p:nvPicPr>
-          <p:cNvPr id="3" name="Image 0" descr="/home/claude/f4/img/minesec_sheet.png">    </p:cNvPr>
+          <p:cNvPr id="5" name="Image 0" descr="/home/claude/f4/img/v2/usa_slum.jpg">    </p:cNvPr>
           <p:cNvPicPr>
             <a:picLocks noChangeAspect="1"/>
           </p:cNvPicPr>
@@ -13770,8 +14728,8 @@
         </p:blipFill>
         <p:spPr>
           <a:xfrm>
-            <a:off x="0" y="658368"/>
-            <a:ext cx="1463040" cy="5833872"/>
+            <a:off x="5349240" y="2069407"/>
+            <a:ext cx="6659575" cy="3697594"/>
           </a:xfrm>
           <a:prstGeom prst="rect">
             <a:avLst/>
@@ -13780,14 +14738,14 @@
       </p:pic>
       <p:sp>
         <p:nvSpPr>
-          <p:cNvPr id="4" name="Text 1"/>
+          <p:cNvPr id="6" name="Text 3"/>
           <p:cNvSpPr/>
           <p:nvPr/>
         </p:nvSpPr>
         <p:spPr>
           <a:xfrm>
-            <a:off x="1691640" y="1005840"/>
-            <a:ext cx="10180015" cy="731520"/>
+            <a:off x="5349240" y="6089904"/>
+            <a:ext cx="6659575" cy="347472"/>
           </a:xfrm>
           <a:prstGeom prst="rect">
             <a:avLst/>
@@ -13796,142 +14754,24 @@
           <a:ln/>
         </p:spPr>
         <p:txBody>
-          <a:bodyPr wrap="square" lIns="0" tIns="0" rIns="0" bIns="0" rtlCol="0" anchor="ctr">
-            <a:normAutofit/>
-          </a:bodyPr>
+          <a:bodyPr wrap="square" lIns="0" tIns="0" rIns="0" bIns="0" rtlCol="0" anchor="ctr"/>
           <a:lstStyle/>
           <a:p>
             <a:pPr algn="ctr" indent="0" marL="0">
               <a:buNone/>
             </a:pPr>
             <a:r>
-              <a:rPr lang="en-US" sz="3600" b="1" dirty="0">
-                <a:solidFill>
-                  <a:srgbClr val="990011"/>
+              <a:rPr lang="en-US" sz="1600" i="1" dirty="0">
+                <a:solidFill>
+                  <a:srgbClr val="555555"/>
                 </a:solidFill>
                 <a:latin typeface="Times New Roman" pitchFamily="34" charset="0"/>
                 <a:ea typeface="Times New Roman" pitchFamily="34" charset="-122"/>
                 <a:cs typeface="Times New Roman" pitchFamily="34" charset="-120"/>
               </a:rPr>
-              <a:t>1. Types and Causes</a:t>
-            </a:r>
-            <a:endParaRPr lang="en-US" sz="3600" dirty="0"/>
-          </a:p>
-        </p:txBody>
-      </p:sp>
-      <p:sp>
-        <p:nvSpPr>
-          <p:cNvPr id="5" name="Text 2"/>
-          <p:cNvSpPr/>
-          <p:nvPr/>
-        </p:nvSpPr>
-        <p:spPr>
-          <a:xfrm>
-            <a:off x="1691640" y="1783080"/>
-            <a:ext cx="10180015" cy="4663440"/>
-          </a:xfrm>
-          <a:prstGeom prst="rect">
-            <a:avLst/>
-          </a:prstGeom>
-          <a:noFill/>
-          <a:ln/>
-        </p:spPr>
-        <p:txBody>
-          <a:bodyPr wrap="square" lIns="0" tIns="0" rIns="0" bIns="0" rtlCol="0" anchor="t"/>
-          <a:lstStyle/>
-          <a:p>
-            <a:pPr algn="l" indent="0" marL="0">
-              <a:spcAft>
-                <a:spcPts val="800"/>
-              </a:spcAft>
-              <a:buNone/>
-            </a:pPr>
-            <a:r>
-              <a:rPr lang="en-US" sz="4000" i="1" dirty="0">
-                <a:solidFill>
-                  <a:srgbClr val="111111"/>
-                </a:solidFill>
-                <a:latin typeface="Times New Roman" pitchFamily="34" charset="0"/>
-                <a:ea typeface="Times New Roman" pitchFamily="34" charset="-122"/>
-                <a:cs typeface="Times New Roman" pitchFamily="34" charset="-120"/>
-              </a:rPr>
-              <a:t>Cameroonian towns face the following problems and causes:</a:t>
-            </a:r>
-            <a:endParaRPr lang="en-US" sz="4000" dirty="0"/>
-          </a:p>
-          <a:p>
-            <a:pPr algn="l" indent="0" marL="0">
-              <a:spcAft>
-                <a:spcPts val="800"/>
-              </a:spcAft>
-              <a:buNone/>
-            </a:pPr>
-            <a:r>
-              <a:rPr lang="en-US" sz="4000" b="1" dirty="0">
-                <a:solidFill>
-                  <a:srgbClr val="111111"/>
-                </a:solidFill>
-                <a:latin typeface="Times New Roman" pitchFamily="34" charset="0"/>
-                <a:ea typeface="Times New Roman" pitchFamily="34" charset="-122"/>
-                <a:cs typeface="Times New Roman" pitchFamily="34" charset="-120"/>
-              </a:rPr>
-              <a:t>Types: </a:t>
-            </a:r>
-            <a:pPr algn="l" indent="0" marL="0">
-              <a:spcAft>
-                <a:spcPts val="800"/>
-              </a:spcAft>
-              <a:buNone/>
-            </a:pPr>
-            <a:r>
-              <a:rPr lang="en-US" sz="4000" dirty="0">
-                <a:solidFill>
-                  <a:srgbClr val="111111"/>
-                </a:solidFill>
-                <a:latin typeface="Times New Roman" pitchFamily="34" charset="0"/>
-                <a:ea typeface="Times New Roman" pitchFamily="34" charset="-122"/>
-                <a:cs typeface="Times New Roman" pitchFamily="34" charset="-120"/>
-              </a:rPr>
-              <a:t>Slums, unemployment, waste, floods, traffic jams and insecurity are common.</a:t>
-            </a:r>
-            <a:endParaRPr lang="en-US" sz="4000" dirty="0"/>
-          </a:p>
-          <a:p>
-            <a:pPr algn="l" indent="0" marL="0">
-              <a:spcAft>
-                <a:spcPts val="800"/>
-              </a:spcAft>
-              <a:buNone/>
-            </a:pPr>
-            <a:r>
-              <a:rPr lang="en-US" sz="4000" b="1" dirty="0">
-                <a:solidFill>
-                  <a:srgbClr val="111111"/>
-                </a:solidFill>
-                <a:latin typeface="Times New Roman" pitchFamily="34" charset="0"/>
-                <a:ea typeface="Times New Roman" pitchFamily="34" charset="-122"/>
-                <a:cs typeface="Times New Roman" pitchFamily="34" charset="-120"/>
-              </a:rPr>
-              <a:t>Causes: </a:t>
-            </a:r>
-            <a:pPr algn="l" indent="0" marL="0">
-              <a:spcAft>
-                <a:spcPts val="800"/>
-              </a:spcAft>
-              <a:buNone/>
-            </a:pPr>
-            <a:r>
-              <a:rPr lang="en-US" sz="4000" dirty="0">
-                <a:solidFill>
-                  <a:srgbClr val="111111"/>
-                </a:solidFill>
-                <a:latin typeface="Times New Roman" pitchFamily="34" charset="0"/>
-                <a:ea typeface="Times New Roman" pitchFamily="34" charset="-122"/>
-                <a:cs typeface="Times New Roman" pitchFamily="34" charset="-120"/>
-              </a:rPr>
-              <a:t>Rapid growth through rural exodus, poverty and poor town planning cause these problems.</a:t>
-            </a:r>
-            <a:endParaRPr lang="en-US" sz="4000" dirty="0"/>
+              <a:t>Illustration: a slum</a:t>
+            </a:r>
+            <a:endParaRPr lang="en-US" sz="1600" dirty="0"/>
           </a:p>
         </p:txBody>
       </p:sp>
@@ -14047,48 +14887,9 @@
           </a:p>
         </p:txBody>
       </p:sp>
-      <p:sp>
-        <p:nvSpPr>
-          <p:cNvPr id="3" name="Text 1"/>
-          <p:cNvSpPr/>
-          <p:nvPr/>
-        </p:nvSpPr>
-        <p:spPr>
-          <a:xfrm>
-            <a:off x="457200" y="1005840"/>
-            <a:ext cx="11277295" cy="731520"/>
-          </a:xfrm>
-          <a:prstGeom prst="rect">
-            <a:avLst/>
-          </a:prstGeom>
-          <a:noFill/>
-          <a:ln/>
-        </p:spPr>
-        <p:txBody>
-          <a:bodyPr wrap="square" lIns="0" tIns="0" rIns="0" bIns="0" rtlCol="0" anchor="ctr"/>
-          <a:lstStyle/>
-          <a:p>
-            <a:pPr algn="ctr" indent="0" marL="0">
-              <a:buNone/>
-            </a:pPr>
-            <a:r>
-              <a:rPr lang="en-US" sz="3600" b="1" dirty="0">
-                <a:solidFill>
-                  <a:srgbClr val="990011"/>
-                </a:solidFill>
-                <a:latin typeface="Times New Roman" pitchFamily="34" charset="0"/>
-                <a:ea typeface="Times New Roman" pitchFamily="34" charset="-122"/>
-                <a:cs typeface="Times New Roman" pitchFamily="34" charset="-120"/>
-              </a:rPr>
-              <a:t>1. Types and Causes</a:t>
-            </a:r>
-            <a:endParaRPr lang="en-US" sz="3600" dirty="0"/>
-          </a:p>
-        </p:txBody>
-      </p:sp>
       <p:pic>
         <p:nvPicPr>
-          <p:cNvPr id="4" name="Image 0" descr="/home/claude/f4/img/v2/urban_problems_big.png">    </p:cNvPr>
+          <p:cNvPr id="3" name="Image 0" descr="/home/claude/f4/img/minesec_sheet.png">    </p:cNvPr>
           <p:cNvPicPr>
             <a:picLocks noChangeAspect="1"/>
           </p:cNvPicPr>
@@ -14102,8 +14903,8 @@
         </p:blipFill>
         <p:spPr>
           <a:xfrm>
-            <a:off x="629930" y="1783080"/>
-            <a:ext cx="10931835" cy="4270248"/>
+            <a:off x="0" y="658368"/>
+            <a:ext cx="5120640" cy="5833872"/>
           </a:xfrm>
           <a:prstGeom prst="rect">
             <a:avLst/>
@@ -14112,14 +14913,14 @@
       </p:pic>
       <p:sp>
         <p:nvSpPr>
-          <p:cNvPr id="5" name="Text 2"/>
+          <p:cNvPr id="4" name="Text 1"/>
           <p:cNvSpPr/>
           <p:nvPr/>
         </p:nvSpPr>
         <p:spPr>
           <a:xfrm>
-            <a:off x="457200" y="6089904"/>
-            <a:ext cx="11277295" cy="347472"/>
+            <a:off x="5349240" y="1005840"/>
+            <a:ext cx="6522415" cy="731520"/>
           </a:xfrm>
           <a:prstGeom prst="rect">
             <a:avLst/>
@@ -14128,24 +14929,85 @@
           <a:ln/>
         </p:spPr>
         <p:txBody>
-          <a:bodyPr wrap="square" lIns="0" tIns="0" rIns="0" bIns="0" rtlCol="0" anchor="ctr"/>
+          <a:bodyPr wrap="square" lIns="0" tIns="0" rIns="0" bIns="0" rtlCol="0" anchor="ctr">
+            <a:normAutofit/>
+          </a:bodyPr>
           <a:lstStyle/>
           <a:p>
             <a:pPr algn="ctr" indent="0" marL="0">
               <a:buNone/>
             </a:pPr>
             <a:r>
-              <a:rPr lang="en-US" sz="1800" i="1" dirty="0">
-                <a:solidFill>
-                  <a:srgbClr val="555555"/>
+              <a:rPr lang="en-US" sz="3600" b="1" dirty="0">
+                <a:solidFill>
+                  <a:srgbClr val="990011"/>
                 </a:solidFill>
                 <a:latin typeface="Times New Roman" pitchFamily="34" charset="0"/>
                 <a:ea typeface="Times New Roman" pitchFamily="34" charset="-122"/>
                 <a:cs typeface="Times New Roman" pitchFamily="34" charset="-120"/>
               </a:rPr>
-              <a:t>Illustration: urban problems</a:t>
-            </a:r>
-            <a:endParaRPr lang="en-US" sz="1800" dirty="0"/>
+              <a:t>1. Types of Urban Problems</a:t>
+            </a:r>
+            <a:endParaRPr lang="en-US" sz="3600" dirty="0"/>
+          </a:p>
+        </p:txBody>
+      </p:sp>
+      <p:sp>
+        <p:nvSpPr>
+          <p:cNvPr id="5" name="Text 2"/>
+          <p:cNvSpPr/>
+          <p:nvPr/>
+        </p:nvSpPr>
+        <p:spPr>
+          <a:xfrm>
+            <a:off x="5349240" y="1783080"/>
+            <a:ext cx="6522415" cy="4663440"/>
+          </a:xfrm>
+          <a:prstGeom prst="rect">
+            <a:avLst/>
+          </a:prstGeom>
+          <a:noFill/>
+          <a:ln/>
+        </p:spPr>
+        <p:txBody>
+          <a:bodyPr wrap="square" lIns="0" tIns="0" rIns="0" bIns="0" rtlCol="0" anchor="t"/>
+          <a:lstStyle/>
+          <a:p>
+            <a:pPr algn="l" indent="0" marL="0">
+              <a:spcAft>
+                <a:spcPts val="800"/>
+              </a:spcAft>
+              <a:buNone/>
+            </a:pPr>
+            <a:r>
+              <a:rPr lang="en-US" sz="4000" b="1" dirty="0">
+                <a:solidFill>
+                  <a:srgbClr val="111111"/>
+                </a:solidFill>
+                <a:latin typeface="Times New Roman" pitchFamily="34" charset="0"/>
+                <a:ea typeface="Times New Roman" pitchFamily="34" charset="-122"/>
+                <a:cs typeface="Times New Roman" pitchFamily="34" charset="-120"/>
+              </a:rPr>
+              <a:t>Unemployment: </a:t>
+            </a:r>
+            <a:pPr algn="l" indent="0" marL="0">
+              <a:spcAft>
+                <a:spcPts val="800"/>
+              </a:spcAft>
+              <a:buNone/>
+            </a:pPr>
+            <a:r>
+              <a:rPr lang="en-US" sz="4000" dirty="0">
+                <a:solidFill>
+                  <a:srgbClr val="111111"/>
+                </a:solidFill>
+                <a:latin typeface="Times New Roman" pitchFamily="34" charset="0"/>
+                <a:ea typeface="Times New Roman" pitchFamily="34" charset="-122"/>
+                <a:cs typeface="Times New Roman" pitchFamily="34" charset="-120"/>
+              </a:rPr>
+              <a:t>Many young people have no job or only an informal job.</a:t>
+            </a:r>
+            <a:endParaRPr lang="en-US" sz="4000" dirty="0"/>
           </a:p>
         </p:txBody>
       </p:sp>
@@ -14261,9 +15123,109 @@
           </a:p>
         </p:txBody>
       </p:sp>
+      <p:sp>
+        <p:nvSpPr>
+          <p:cNvPr id="3" name="Text 1"/>
+          <p:cNvSpPr/>
+          <p:nvPr/>
+        </p:nvSpPr>
+        <p:spPr>
+          <a:xfrm>
+            <a:off x="365760" y="1005840"/>
+            <a:ext cx="11460175" cy="731520"/>
+          </a:xfrm>
+          <a:prstGeom prst="rect">
+            <a:avLst/>
+          </a:prstGeom>
+          <a:noFill/>
+          <a:ln/>
+        </p:spPr>
+        <p:txBody>
+          <a:bodyPr wrap="square" lIns="0" tIns="0" rIns="0" bIns="0" rtlCol="0" anchor="ctr">
+            <a:normAutofit/>
+          </a:bodyPr>
+          <a:lstStyle/>
+          <a:p>
+            <a:pPr algn="ctr" indent="0" marL="0">
+              <a:buNone/>
+            </a:pPr>
+            <a:r>
+              <a:rPr lang="en-US" sz="3600" b="1" dirty="0">
+                <a:solidFill>
+                  <a:srgbClr val="990011"/>
+                </a:solidFill>
+                <a:latin typeface="Times New Roman" pitchFamily="34" charset="0"/>
+                <a:ea typeface="Times New Roman" pitchFamily="34" charset="-122"/>
+                <a:cs typeface="Times New Roman" pitchFamily="34" charset="-120"/>
+              </a:rPr>
+              <a:t>1. Types of Urban Problems</a:t>
+            </a:r>
+            <a:endParaRPr lang="en-US" sz="3600" dirty="0"/>
+          </a:p>
+        </p:txBody>
+      </p:sp>
+      <p:sp>
+        <p:nvSpPr>
+          <p:cNvPr id="4" name="Text 2"/>
+          <p:cNvSpPr/>
+          <p:nvPr/>
+        </p:nvSpPr>
+        <p:spPr>
+          <a:xfrm>
+            <a:off x="365760" y="1783080"/>
+            <a:ext cx="4846320" cy="4617720"/>
+          </a:xfrm>
+          <a:prstGeom prst="rect">
+            <a:avLst/>
+          </a:prstGeom>
+          <a:noFill/>
+          <a:ln/>
+        </p:spPr>
+        <p:txBody>
+          <a:bodyPr wrap="square" lIns="0" tIns="0" rIns="0" bIns="0" rtlCol="0" anchor="t"/>
+          <a:lstStyle/>
+          <a:p>
+            <a:pPr algn="l" indent="0" marL="0">
+              <a:spcAft>
+                <a:spcPts val="800"/>
+              </a:spcAft>
+              <a:buNone/>
+            </a:pPr>
+            <a:r>
+              <a:rPr lang="en-US" sz="3600" b="1" dirty="0">
+                <a:solidFill>
+                  <a:srgbClr val="111111"/>
+                </a:solidFill>
+                <a:latin typeface="Times New Roman" pitchFamily="34" charset="0"/>
+                <a:ea typeface="Times New Roman" pitchFamily="34" charset="-122"/>
+                <a:cs typeface="Times New Roman" pitchFamily="34" charset="-120"/>
+              </a:rPr>
+              <a:t>Waste management: </a:t>
+            </a:r>
+            <a:pPr algn="l" indent="0" marL="0">
+              <a:spcAft>
+                <a:spcPts val="800"/>
+              </a:spcAft>
+              <a:buNone/>
+            </a:pPr>
+            <a:r>
+              <a:rPr lang="en-US" sz="3600" dirty="0">
+                <a:solidFill>
+                  <a:srgbClr val="111111"/>
+                </a:solidFill>
+                <a:latin typeface="Times New Roman" pitchFamily="34" charset="0"/>
+                <a:ea typeface="Times New Roman" pitchFamily="34" charset="-122"/>
+                <a:cs typeface="Times New Roman" pitchFamily="34" charset="-120"/>
+              </a:rPr>
+              <a:t>Rubbish is thrown into gutters, rivers and open dumps.</a:t>
+            </a:r>
+            <a:endParaRPr lang="en-US" sz="3600" dirty="0"/>
+          </a:p>
+        </p:txBody>
+      </p:sp>
       <p:pic>
         <p:nvPicPr>
-          <p:cNvPr id="3" name="Image 0" descr="/home/claude/f4/img/minesec_sheet.png">    </p:cNvPr>
+          <p:cNvPr id="5" name="Image 0" descr="/home/claude/f4/img/v2/waste_problems_big.png">    </p:cNvPr>
           <p:cNvPicPr>
             <a:picLocks noChangeAspect="1"/>
           </p:cNvPicPr>
@@ -14277,8 +15239,8 @@
         </p:blipFill>
         <p:spPr>
           <a:xfrm>
-            <a:off x="0" y="658368"/>
-            <a:ext cx="3840480" cy="5833872"/>
+            <a:off x="5349240" y="2617506"/>
+            <a:ext cx="6659575" cy="2601397"/>
           </a:xfrm>
           <a:prstGeom prst="rect">
             <a:avLst/>
@@ -14287,14 +15249,14 @@
       </p:pic>
       <p:sp>
         <p:nvSpPr>
-          <p:cNvPr id="4" name="Text 1"/>
+          <p:cNvPr id="6" name="Text 3"/>
           <p:cNvSpPr/>
           <p:nvPr/>
         </p:nvSpPr>
         <p:spPr>
           <a:xfrm>
-            <a:off x="4069080" y="1005840"/>
-            <a:ext cx="7802575" cy="731520"/>
+            <a:off x="5349240" y="6089904"/>
+            <a:ext cx="6659575" cy="347472"/>
           </a:xfrm>
           <a:prstGeom prst="rect">
             <a:avLst/>
@@ -14303,142 +15265,24 @@
           <a:ln/>
         </p:spPr>
         <p:txBody>
-          <a:bodyPr wrap="square" lIns="0" tIns="0" rIns="0" bIns="0" rtlCol="0" anchor="ctr">
-            <a:normAutofit/>
-          </a:bodyPr>
+          <a:bodyPr wrap="square" lIns="0" tIns="0" rIns="0" bIns="0" rtlCol="0" anchor="ctr"/>
           <a:lstStyle/>
           <a:p>
             <a:pPr algn="ctr" indent="0" marL="0">
               <a:buNone/>
             </a:pPr>
             <a:r>
-              <a:rPr lang="en-US" sz="3600" b="1" dirty="0">
-                <a:solidFill>
-                  <a:srgbClr val="990011"/>
+              <a:rPr lang="en-US" sz="1600" i="1" dirty="0">
+                <a:solidFill>
+                  <a:srgbClr val="555555"/>
                 </a:solidFill>
                 <a:latin typeface="Times New Roman" pitchFamily="34" charset="0"/>
                 <a:ea typeface="Times New Roman" pitchFamily="34" charset="-122"/>
                 <a:cs typeface="Times New Roman" pitchFamily="34" charset="-120"/>
               </a:rPr>
-              <a:t>2. Consequences</a:t>
-            </a:r>
-            <a:endParaRPr lang="en-US" sz="3600" dirty="0"/>
-          </a:p>
-        </p:txBody>
-      </p:sp>
-      <p:sp>
-        <p:nvSpPr>
-          <p:cNvPr id="5" name="Text 2"/>
-          <p:cNvSpPr/>
-          <p:nvPr/>
-        </p:nvSpPr>
-        <p:spPr>
-          <a:xfrm>
-            <a:off x="4069080" y="1783080"/>
-            <a:ext cx="7802575" cy="4663440"/>
-          </a:xfrm>
-          <a:prstGeom prst="rect">
-            <a:avLst/>
-          </a:prstGeom>
-          <a:noFill/>
-          <a:ln/>
-        </p:spPr>
-        <p:txBody>
-          <a:bodyPr wrap="square" lIns="0" tIns="0" rIns="0" bIns="0" rtlCol="0" anchor="t"/>
-          <a:lstStyle/>
-          <a:p>
-            <a:pPr algn="l" indent="0" marL="0">
-              <a:spcAft>
-                <a:spcPts val="800"/>
-              </a:spcAft>
-              <a:buNone/>
-            </a:pPr>
-            <a:r>
-              <a:rPr lang="en-US" sz="4000" i="1" dirty="0">
-                <a:solidFill>
-                  <a:srgbClr val="111111"/>
-                </a:solidFill>
-                <a:latin typeface="Times New Roman" pitchFamily="34" charset="0"/>
-                <a:ea typeface="Times New Roman" pitchFamily="34" charset="-122"/>
-                <a:cs typeface="Times New Roman" pitchFamily="34" charset="-120"/>
-              </a:rPr>
-              <a:t>Urban problems have the following consequences:</a:t>
-            </a:r>
-            <a:endParaRPr lang="en-US" sz="4000" dirty="0"/>
-          </a:p>
-          <a:p>
-            <a:pPr algn="l" indent="0" marL="0">
-              <a:spcAft>
-                <a:spcPts val="800"/>
-              </a:spcAft>
-              <a:buNone/>
-            </a:pPr>
-            <a:r>
-              <a:rPr lang="en-US" sz="4000" b="1" dirty="0">
-                <a:solidFill>
-                  <a:srgbClr val="111111"/>
-                </a:solidFill>
-                <a:latin typeface="Times New Roman" pitchFamily="34" charset="0"/>
-                <a:ea typeface="Times New Roman" pitchFamily="34" charset="-122"/>
-                <a:cs typeface="Times New Roman" pitchFamily="34" charset="-120"/>
-              </a:rPr>
-              <a:t>Health: </a:t>
-            </a:r>
-            <a:pPr algn="l" indent="0" marL="0">
-              <a:spcAft>
-                <a:spcPts val="800"/>
-              </a:spcAft>
-              <a:buNone/>
-            </a:pPr>
-            <a:r>
-              <a:rPr lang="en-US" sz="4000" dirty="0">
-                <a:solidFill>
-                  <a:srgbClr val="111111"/>
-                </a:solidFill>
-                <a:latin typeface="Times New Roman" pitchFamily="34" charset="0"/>
-                <a:ea typeface="Times New Roman" pitchFamily="34" charset="-122"/>
-                <a:cs typeface="Times New Roman" pitchFamily="34" charset="-120"/>
-              </a:rPr>
-              <a:t>Waste and floods spread cholera, typhoid and malaria.</a:t>
-            </a:r>
-            <a:endParaRPr lang="en-US" sz="4000" dirty="0"/>
-          </a:p>
-          <a:p>
-            <a:pPr algn="l" indent="0" marL="0">
-              <a:spcAft>
-                <a:spcPts val="800"/>
-              </a:spcAft>
-              <a:buNone/>
-            </a:pPr>
-            <a:r>
-              <a:rPr lang="en-US" sz="4000" b="1" dirty="0">
-                <a:solidFill>
-                  <a:srgbClr val="111111"/>
-                </a:solidFill>
-                <a:latin typeface="Times New Roman" pitchFamily="34" charset="0"/>
-                <a:ea typeface="Times New Roman" pitchFamily="34" charset="-122"/>
-                <a:cs typeface="Times New Roman" pitchFamily="34" charset="-120"/>
-              </a:rPr>
-              <a:t>Social life: </a:t>
-            </a:r>
-            <a:pPr algn="l" indent="0" marL="0">
-              <a:spcAft>
-                <a:spcPts val="800"/>
-              </a:spcAft>
-              <a:buNone/>
-            </a:pPr>
-            <a:r>
-              <a:rPr lang="en-US" sz="4000" dirty="0">
-                <a:solidFill>
-                  <a:srgbClr val="111111"/>
-                </a:solidFill>
-                <a:latin typeface="Times New Roman" pitchFamily="34" charset="0"/>
-                <a:ea typeface="Times New Roman" pitchFamily="34" charset="-122"/>
-                <a:cs typeface="Times New Roman" pitchFamily="34" charset="-120"/>
-              </a:rPr>
-              <a:t>Unemployment and poverty increase crime and insecurity.</a:t>
-            </a:r>
-            <a:endParaRPr lang="en-US" sz="4000" dirty="0"/>
+              <a:t>Illustration: poor waste management</a:t>
+            </a:r>
+            <a:endParaRPr lang="en-US" sz="1600" dirty="0"/>
           </a:p>
         </p:txBody>
       </p:sp>
@@ -14554,9 +15398,109 @@
           </a:p>
         </p:txBody>
       </p:sp>
+      <p:sp>
+        <p:nvSpPr>
+          <p:cNvPr id="3" name="Text 1"/>
+          <p:cNvSpPr/>
+          <p:nvPr/>
+        </p:nvSpPr>
+        <p:spPr>
+          <a:xfrm>
+            <a:off x="365760" y="1005840"/>
+            <a:ext cx="11460175" cy="731520"/>
+          </a:xfrm>
+          <a:prstGeom prst="rect">
+            <a:avLst/>
+          </a:prstGeom>
+          <a:noFill/>
+          <a:ln/>
+        </p:spPr>
+        <p:txBody>
+          <a:bodyPr wrap="square" lIns="0" tIns="0" rIns="0" bIns="0" rtlCol="0" anchor="ctr">
+            <a:normAutofit/>
+          </a:bodyPr>
+          <a:lstStyle/>
+          <a:p>
+            <a:pPr algn="ctr" indent="0" marL="0">
+              <a:buNone/>
+            </a:pPr>
+            <a:r>
+              <a:rPr lang="en-US" sz="3600" b="1" dirty="0">
+                <a:solidFill>
+                  <a:srgbClr val="990011"/>
+                </a:solidFill>
+                <a:latin typeface="Times New Roman" pitchFamily="34" charset="0"/>
+                <a:ea typeface="Times New Roman" pitchFamily="34" charset="-122"/>
+                <a:cs typeface="Times New Roman" pitchFamily="34" charset="-120"/>
+              </a:rPr>
+              <a:t>1. Types of Urban Problems</a:t>
+            </a:r>
+            <a:endParaRPr lang="en-US" sz="3600" dirty="0"/>
+          </a:p>
+        </p:txBody>
+      </p:sp>
+      <p:sp>
+        <p:nvSpPr>
+          <p:cNvPr id="4" name="Text 2"/>
+          <p:cNvSpPr/>
+          <p:nvPr/>
+        </p:nvSpPr>
+        <p:spPr>
+          <a:xfrm>
+            <a:off x="365760" y="1783080"/>
+            <a:ext cx="4846320" cy="4617720"/>
+          </a:xfrm>
+          <a:prstGeom prst="rect">
+            <a:avLst/>
+          </a:prstGeom>
+          <a:noFill/>
+          <a:ln/>
+        </p:spPr>
+        <p:txBody>
+          <a:bodyPr wrap="square" lIns="0" tIns="0" rIns="0" bIns="0" rtlCol="0" anchor="t"/>
+          <a:lstStyle/>
+          <a:p>
+            <a:pPr algn="l" indent="0" marL="0">
+              <a:spcAft>
+                <a:spcPts val="800"/>
+              </a:spcAft>
+              <a:buNone/>
+            </a:pPr>
+            <a:r>
+              <a:rPr lang="en-US" sz="3600" b="1" dirty="0">
+                <a:solidFill>
+                  <a:srgbClr val="111111"/>
+                </a:solidFill>
+                <a:latin typeface="Times New Roman" pitchFamily="34" charset="0"/>
+                <a:ea typeface="Times New Roman" pitchFamily="34" charset="-122"/>
+                <a:cs typeface="Times New Roman" pitchFamily="34" charset="-120"/>
+              </a:rPr>
+              <a:t>Floods: </a:t>
+            </a:r>
+            <a:pPr algn="l" indent="0" marL="0">
+              <a:spcAft>
+                <a:spcPts val="800"/>
+              </a:spcAft>
+              <a:buNone/>
+            </a:pPr>
+            <a:r>
+              <a:rPr lang="en-US" sz="3600" dirty="0">
+                <a:solidFill>
+                  <a:srgbClr val="111111"/>
+                </a:solidFill>
+                <a:latin typeface="Times New Roman" pitchFamily="34" charset="0"/>
+                <a:ea typeface="Times New Roman" pitchFamily="34" charset="-122"/>
+                <a:cs typeface="Times New Roman" pitchFamily="34" charset="-120"/>
+              </a:rPr>
+              <a:t>Low quarters are flooded after heavy rains.</a:t>
+            </a:r>
+            <a:endParaRPr lang="en-US" sz="3600" dirty="0"/>
+          </a:p>
+        </p:txBody>
+      </p:sp>
       <p:pic>
         <p:nvPicPr>
-          <p:cNvPr id="3" name="Image 0" descr="/home/claude/f4/img/minesec_sheet.png">    </p:cNvPr>
+          <p:cNvPr id="5" name="Image 0" descr="/home/claude/f4/img/v2/lsa_streetflood.jpg">    </p:cNvPr>
           <p:cNvPicPr>
             <a:picLocks noChangeAspect="1"/>
           </p:cNvPicPr>
@@ -14570,8 +15514,8 @@
         </p:blipFill>
         <p:spPr>
           <a:xfrm>
-            <a:off x="0" y="658368"/>
-            <a:ext cx="5120640" cy="5833872"/>
+            <a:off x="5349240" y="2067961"/>
+            <a:ext cx="6659575" cy="3700487"/>
           </a:xfrm>
           <a:prstGeom prst="rect">
             <a:avLst/>
@@ -14580,14 +15524,14 @@
       </p:pic>
       <p:sp>
         <p:nvSpPr>
-          <p:cNvPr id="4" name="Text 1"/>
+          <p:cNvPr id="6" name="Text 3"/>
           <p:cNvSpPr/>
           <p:nvPr/>
         </p:nvSpPr>
         <p:spPr>
           <a:xfrm>
-            <a:off x="5349240" y="1005840"/>
-            <a:ext cx="6522415" cy="731520"/>
+            <a:off x="5349240" y="6089904"/>
+            <a:ext cx="6659575" cy="347472"/>
           </a:xfrm>
           <a:prstGeom prst="rect">
             <a:avLst/>
@@ -14596,105 +15540,24 @@
           <a:ln/>
         </p:spPr>
         <p:txBody>
-          <a:bodyPr wrap="square" lIns="0" tIns="0" rIns="0" bIns="0" rtlCol="0" anchor="ctr">
-            <a:normAutofit/>
-          </a:bodyPr>
+          <a:bodyPr wrap="square" lIns="0" tIns="0" rIns="0" bIns="0" rtlCol="0" anchor="ctr"/>
           <a:lstStyle/>
           <a:p>
             <a:pPr algn="ctr" indent="0" marL="0">
               <a:buNone/>
             </a:pPr>
             <a:r>
-              <a:rPr lang="en-US" sz="3600" b="1" dirty="0">
-                <a:solidFill>
-                  <a:srgbClr val="990011"/>
+              <a:rPr lang="en-US" sz="1600" i="1" dirty="0">
+                <a:solidFill>
+                  <a:srgbClr val="555555"/>
                 </a:solidFill>
                 <a:latin typeface="Times New Roman" pitchFamily="34" charset="0"/>
                 <a:ea typeface="Times New Roman" pitchFamily="34" charset="-122"/>
                 <a:cs typeface="Times New Roman" pitchFamily="34" charset="-120"/>
               </a:rPr>
-              <a:t>3. Solutions and Regulations</a:t>
-            </a:r>
-            <a:endParaRPr lang="en-US" sz="3600" dirty="0"/>
-          </a:p>
-        </p:txBody>
-      </p:sp>
-      <p:sp>
-        <p:nvSpPr>
-          <p:cNvPr id="5" name="Text 2"/>
-          <p:cNvSpPr/>
-          <p:nvPr/>
-        </p:nvSpPr>
-        <p:spPr>
-          <a:xfrm>
-            <a:off x="5349240" y="1783080"/>
-            <a:ext cx="6522415" cy="4663440"/>
-          </a:xfrm>
-          <a:prstGeom prst="rect">
-            <a:avLst/>
-          </a:prstGeom>
-          <a:noFill/>
-          <a:ln/>
-        </p:spPr>
-        <p:txBody>
-          <a:bodyPr wrap="square" lIns="0" tIns="0" rIns="0" bIns="0" rtlCol="0" anchor="t"/>
-          <a:lstStyle/>
-          <a:p>
-            <a:pPr algn="l" indent="0" marL="0">
-              <a:spcAft>
-                <a:spcPts val="800"/>
-              </a:spcAft>
-              <a:buNone/>
-            </a:pPr>
-            <a:r>
-              <a:rPr lang="en-US" sz="4000" i="1" dirty="0">
-                <a:solidFill>
-                  <a:srgbClr val="111111"/>
-                </a:solidFill>
-                <a:latin typeface="Times New Roman" pitchFamily="34" charset="0"/>
-                <a:ea typeface="Times New Roman" pitchFamily="34" charset="-122"/>
-                <a:cs typeface="Times New Roman" pitchFamily="34" charset="-120"/>
-              </a:rPr>
-              <a:t>Urban problems can be solved by the following measures:</a:t>
-            </a:r>
-            <a:endParaRPr lang="en-US" sz="4000" dirty="0"/>
-          </a:p>
-          <a:p>
-            <a:pPr algn="l" indent="0" marL="0">
-              <a:spcAft>
-                <a:spcPts val="800"/>
-              </a:spcAft>
-              <a:buNone/>
-            </a:pPr>
-            <a:r>
-              <a:rPr lang="en-US" sz="4000" b="1" dirty="0">
-                <a:solidFill>
-                  <a:srgbClr val="111111"/>
-                </a:solidFill>
-                <a:latin typeface="Times New Roman" pitchFamily="34" charset="0"/>
-                <a:ea typeface="Times New Roman" pitchFamily="34" charset="-122"/>
-                <a:cs typeface="Times New Roman" pitchFamily="34" charset="-120"/>
-              </a:rPr>
-              <a:t>Town planning: </a:t>
-            </a:r>
-            <a:pPr algn="l" indent="0" marL="0">
-              <a:spcAft>
-                <a:spcPts val="800"/>
-              </a:spcAft>
-              <a:buNone/>
-            </a:pPr>
-            <a:r>
-              <a:rPr lang="en-US" sz="4000" dirty="0">
-                <a:solidFill>
-                  <a:srgbClr val="111111"/>
-                </a:solidFill>
-                <a:latin typeface="Times New Roman" pitchFamily="34" charset="0"/>
-                <a:ea typeface="Times New Roman" pitchFamily="34" charset="-122"/>
-                <a:cs typeface="Times New Roman" pitchFamily="34" charset="-120"/>
-              </a:rPr>
-              <a:t>Councils plan quarters, roads and drains, and building permits are required.</a:t>
-            </a:r>
-            <a:endParaRPr lang="en-US" sz="4000" dirty="0"/>
+              <a:t>Illustration: a flooded street</a:t>
+            </a:r>
+            <a:endParaRPr lang="en-US" sz="1600" dirty="0"/>
           </a:p>
         </p:txBody>
       </p:sp>
@@ -15049,9 +15912,109 @@
           </a:p>
         </p:txBody>
       </p:sp>
+      <p:sp>
+        <p:nvSpPr>
+          <p:cNvPr id="3" name="Text 1"/>
+          <p:cNvSpPr/>
+          <p:nvPr/>
+        </p:nvSpPr>
+        <p:spPr>
+          <a:xfrm>
+            <a:off x="365760" y="1005840"/>
+            <a:ext cx="11460175" cy="731520"/>
+          </a:xfrm>
+          <a:prstGeom prst="rect">
+            <a:avLst/>
+          </a:prstGeom>
+          <a:noFill/>
+          <a:ln/>
+        </p:spPr>
+        <p:txBody>
+          <a:bodyPr wrap="square" lIns="0" tIns="0" rIns="0" bIns="0" rtlCol="0" anchor="ctr">
+            <a:normAutofit/>
+          </a:bodyPr>
+          <a:lstStyle/>
+          <a:p>
+            <a:pPr algn="ctr" indent="0" marL="0">
+              <a:buNone/>
+            </a:pPr>
+            <a:r>
+              <a:rPr lang="en-US" sz="3600" b="1" dirty="0">
+                <a:solidFill>
+                  <a:srgbClr val="990011"/>
+                </a:solidFill>
+                <a:latin typeface="Times New Roman" pitchFamily="34" charset="0"/>
+                <a:ea typeface="Times New Roman" pitchFamily="34" charset="-122"/>
+                <a:cs typeface="Times New Roman" pitchFamily="34" charset="-120"/>
+              </a:rPr>
+              <a:t>1. Types of Urban Problems</a:t>
+            </a:r>
+            <a:endParaRPr lang="en-US" sz="3600" dirty="0"/>
+          </a:p>
+        </p:txBody>
+      </p:sp>
+      <p:sp>
+        <p:nvSpPr>
+          <p:cNvPr id="4" name="Text 2"/>
+          <p:cNvSpPr/>
+          <p:nvPr/>
+        </p:nvSpPr>
+        <p:spPr>
+          <a:xfrm>
+            <a:off x="365760" y="1783080"/>
+            <a:ext cx="4846320" cy="4617720"/>
+          </a:xfrm>
+          <a:prstGeom prst="rect">
+            <a:avLst/>
+          </a:prstGeom>
+          <a:noFill/>
+          <a:ln/>
+        </p:spPr>
+        <p:txBody>
+          <a:bodyPr wrap="square" lIns="0" tIns="0" rIns="0" bIns="0" rtlCol="0" anchor="t"/>
+          <a:lstStyle/>
+          <a:p>
+            <a:pPr algn="l" indent="0" marL="0">
+              <a:spcAft>
+                <a:spcPts val="800"/>
+              </a:spcAft>
+              <a:buNone/>
+            </a:pPr>
+            <a:r>
+              <a:rPr lang="en-US" sz="3600" b="1" dirty="0">
+                <a:solidFill>
+                  <a:srgbClr val="111111"/>
+                </a:solidFill>
+                <a:latin typeface="Times New Roman" pitchFamily="34" charset="0"/>
+                <a:ea typeface="Times New Roman" pitchFamily="34" charset="-122"/>
+                <a:cs typeface="Times New Roman" pitchFamily="34" charset="-120"/>
+              </a:rPr>
+              <a:t>Traffic jams and bad roads: </a:t>
+            </a:r>
+            <a:pPr algn="l" indent="0" marL="0">
+              <a:spcAft>
+                <a:spcPts val="800"/>
+              </a:spcAft>
+              <a:buNone/>
+            </a:pPr>
+            <a:r>
+              <a:rPr lang="en-US" sz="3600" dirty="0">
+                <a:solidFill>
+                  <a:srgbClr val="111111"/>
+                </a:solidFill>
+                <a:latin typeface="Times New Roman" pitchFamily="34" charset="0"/>
+                <a:ea typeface="Times New Roman" pitchFamily="34" charset="-122"/>
+                <a:cs typeface="Times New Roman" pitchFamily="34" charset="-120"/>
+              </a:rPr>
+              <a:t>Roads are too narrow and full of potholes.</a:t>
+            </a:r>
+            <a:endParaRPr lang="en-US" sz="3600" dirty="0"/>
+          </a:p>
+        </p:txBody>
+      </p:sp>
       <p:pic>
         <p:nvPicPr>
-          <p:cNvPr id="3" name="Image 0" descr="/home/claude/f4/img/minesec_sheet.png">    </p:cNvPr>
+          <p:cNvPr id="5" name="Image 0" descr="/home/claude/f4/img/v2/usa_traffic.jpg">    </p:cNvPr>
           <p:cNvPicPr>
             <a:picLocks noChangeAspect="1"/>
           </p:cNvPicPr>
@@ -15065,8 +16028,8 @@
         </p:blipFill>
         <p:spPr>
           <a:xfrm>
-            <a:off x="0" y="658368"/>
-            <a:ext cx="5120640" cy="5833872"/>
+            <a:off x="5349240" y="2071212"/>
+            <a:ext cx="6659575" cy="3693983"/>
           </a:xfrm>
           <a:prstGeom prst="rect">
             <a:avLst/>
@@ -15075,14 +16038,14 @@
       </p:pic>
       <p:sp>
         <p:nvSpPr>
-          <p:cNvPr id="4" name="Text 1"/>
+          <p:cNvPr id="6" name="Text 3"/>
           <p:cNvSpPr/>
           <p:nvPr/>
         </p:nvSpPr>
         <p:spPr>
           <a:xfrm>
-            <a:off x="5349240" y="1005840"/>
-            <a:ext cx="6522415" cy="731520"/>
+            <a:off x="5349240" y="6089904"/>
+            <a:ext cx="6659575" cy="347472"/>
           </a:xfrm>
           <a:prstGeom prst="rect">
             <a:avLst/>
@@ -15091,122 +16054,24 @@
           <a:ln/>
         </p:spPr>
         <p:txBody>
-          <a:bodyPr wrap="square" lIns="0" tIns="0" rIns="0" bIns="0" rtlCol="0" anchor="ctr">
-            <a:normAutofit/>
-          </a:bodyPr>
+          <a:bodyPr wrap="square" lIns="0" tIns="0" rIns="0" bIns="0" rtlCol="0" anchor="ctr"/>
           <a:lstStyle/>
           <a:p>
             <a:pPr algn="ctr" indent="0" marL="0">
               <a:buNone/>
             </a:pPr>
             <a:r>
-              <a:rPr lang="en-US" sz="3600" b="1" dirty="0">
-                <a:solidFill>
-                  <a:srgbClr val="990011"/>
+              <a:rPr lang="en-US" sz="1600" i="1" dirty="0">
+                <a:solidFill>
+                  <a:srgbClr val="555555"/>
                 </a:solidFill>
                 <a:latin typeface="Times New Roman" pitchFamily="34" charset="0"/>
                 <a:ea typeface="Times New Roman" pitchFamily="34" charset="-122"/>
                 <a:cs typeface="Times New Roman" pitchFamily="34" charset="-120"/>
               </a:rPr>
-              <a:t>3. Solutions and Regulations (continued)</a:t>
-            </a:r>
-            <a:endParaRPr lang="en-US" sz="3600" dirty="0"/>
-          </a:p>
-        </p:txBody>
-      </p:sp>
-      <p:sp>
-        <p:nvSpPr>
-          <p:cNvPr id="5" name="Text 2"/>
-          <p:cNvSpPr/>
-          <p:nvPr/>
-        </p:nvSpPr>
-        <p:spPr>
-          <a:xfrm>
-            <a:off x="5349240" y="1783080"/>
-            <a:ext cx="6522415" cy="4663440"/>
-          </a:xfrm>
-          <a:prstGeom prst="rect">
-            <a:avLst/>
-          </a:prstGeom>
-          <a:noFill/>
-          <a:ln/>
-        </p:spPr>
-        <p:txBody>
-          <a:bodyPr wrap="square" lIns="0" tIns="0" rIns="0" bIns="0" rtlCol="0" anchor="t"/>
-          <a:lstStyle/>
-          <a:p>
-            <a:pPr algn="l" indent="0" marL="0">
-              <a:spcAft>
-                <a:spcPts val="800"/>
-              </a:spcAft>
-              <a:buNone/>
-            </a:pPr>
-            <a:r>
-              <a:rPr lang="en-US" sz="4000" b="1" dirty="0">
-                <a:solidFill>
-                  <a:srgbClr val="111111"/>
-                </a:solidFill>
-                <a:latin typeface="Times New Roman" pitchFamily="34" charset="0"/>
-                <a:ea typeface="Times New Roman" pitchFamily="34" charset="-122"/>
-                <a:cs typeface="Times New Roman" pitchFamily="34" charset="-120"/>
-              </a:rPr>
-              <a:t>Waste management: </a:t>
-            </a:r>
-            <a:pPr algn="l" indent="0" marL="0">
-              <a:spcAft>
-                <a:spcPts val="800"/>
-              </a:spcAft>
-              <a:buNone/>
-            </a:pPr>
-            <a:r>
-              <a:rPr lang="en-US" sz="4000" dirty="0">
-                <a:solidFill>
-                  <a:srgbClr val="111111"/>
-                </a:solidFill>
-                <a:latin typeface="Times New Roman" pitchFamily="34" charset="0"/>
-                <a:ea typeface="Times New Roman" pitchFamily="34" charset="-122"/>
-                <a:cs typeface="Times New Roman" pitchFamily="34" charset="-120"/>
-              </a:rPr>
-              <a:t>Companies such as HYSACAM collect waste and people must not dump it in gutters.</a:t>
-            </a:r>
-            <a:endParaRPr lang="en-US" sz="4000" dirty="0"/>
-          </a:p>
-          <a:p>
-            <a:pPr algn="l" indent="0" marL="0">
-              <a:spcAft>
-                <a:spcPts val="800"/>
-              </a:spcAft>
-              <a:buNone/>
-            </a:pPr>
-            <a:r>
-              <a:rPr lang="en-US" sz="4000" b="1" dirty="0">
-                <a:solidFill>
-                  <a:srgbClr val="111111"/>
-                </a:solidFill>
-                <a:latin typeface="Times New Roman" pitchFamily="34" charset="0"/>
-                <a:ea typeface="Times New Roman" pitchFamily="34" charset="-122"/>
-                <a:cs typeface="Times New Roman" pitchFamily="34" charset="-120"/>
-              </a:rPr>
-              <a:t>Jobs: </a:t>
-            </a:r>
-            <a:pPr algn="l" indent="0" marL="0">
-              <a:spcAft>
-                <a:spcPts val="800"/>
-              </a:spcAft>
-              <a:buNone/>
-            </a:pPr>
-            <a:r>
-              <a:rPr lang="en-US" sz="4000" dirty="0">
-                <a:solidFill>
-                  <a:srgbClr val="111111"/>
-                </a:solidFill>
-                <a:latin typeface="Times New Roman" pitchFamily="34" charset="0"/>
-                <a:ea typeface="Times New Roman" pitchFamily="34" charset="-122"/>
-                <a:cs typeface="Times New Roman" pitchFamily="34" charset="-120"/>
-              </a:rPr>
-              <a:t>The state and private sector create jobs and train young people.</a:t>
-            </a:r>
-            <a:endParaRPr lang="en-US" sz="4000" dirty="0"/>
+              <a:t>Illustration: a traffic jam</a:t>
+            </a:r>
+            <a:endParaRPr lang="en-US" sz="1600" dirty="0"/>
           </a:p>
         </p:txBody>
       </p:sp>
@@ -15316,7 +16181,7 @@
                 <a:ea typeface="Calibri" pitchFamily="34" charset="-122"/>
                 <a:cs typeface="Calibri" pitchFamily="34" charset="-120"/>
               </a:rPr>
-              <a:t>FORMATIVE EVALUATION</a:t>
+              <a:t>BOARD SUMMARY</a:t>
             </a:r>
             <a:endParaRPr lang="en-US" sz="1400" dirty="0"/>
           </a:p>
@@ -15381,7 +16246,7 @@
                 <a:ea typeface="Times New Roman" pitchFamily="34" charset="-122"/>
                 <a:cs typeface="Times New Roman" pitchFamily="34" charset="-120"/>
               </a:rPr>
-              <a:t>Evaluation 1</a:t>
+              <a:t>1. Types of Urban Problems</a:t>
             </a:r>
             <a:endParaRPr lang="en-US" sz="3600" dirty="0"/>
           </a:p>
@@ -15415,7 +16280,7 @@
               <a:buNone/>
             </a:pPr>
             <a:r>
-              <a:rPr lang="en-US" sz="4000" dirty="0">
+              <a:rPr lang="en-US" sz="4000" b="1" dirty="0">
                 <a:solidFill>
                   <a:srgbClr val="111111"/>
                 </a:solidFill>
@@ -15423,7 +16288,24 @@
                 <a:ea typeface="Times New Roman" pitchFamily="34" charset="-122"/>
                 <a:cs typeface="Times New Roman" pitchFamily="34" charset="-120"/>
               </a:rPr>
-              <a:t>Give three urban problems in Cameroon.</a:t>
+              <a:t>Insecurity: </a:t>
+            </a:r>
+            <a:pPr algn="l" indent="0" marL="0">
+              <a:spcAft>
+                <a:spcPts val="800"/>
+              </a:spcAft>
+              <a:buNone/>
+            </a:pPr>
+            <a:r>
+              <a:rPr lang="en-US" sz="4000" dirty="0">
+                <a:solidFill>
+                  <a:srgbClr val="111111"/>
+                </a:solidFill>
+                <a:latin typeface="Times New Roman" pitchFamily="34" charset="0"/>
+                <a:ea typeface="Times New Roman" pitchFamily="34" charset="-122"/>
+                <a:cs typeface="Times New Roman" pitchFamily="34" charset="-120"/>
+              </a:rPr>
+              <a:t>Theft and aggression are frequent in some quarters.</a:t>
             </a:r>
             <a:endParaRPr lang="en-US" sz="4000" dirty="0"/>
           </a:p>
@@ -15535,15 +16417,135 @@
                 <a:ea typeface="Calibri" pitchFamily="34" charset="-122"/>
                 <a:cs typeface="Calibri" pitchFamily="34" charset="-120"/>
               </a:rPr>
-              <a:t>FORMATIVE EVALUATION</a:t>
+              <a:t>BOARD SUMMARY</a:t>
             </a:r>
             <a:endParaRPr lang="en-US" sz="1400" dirty="0"/>
+          </a:p>
+        </p:txBody>
+      </p:sp>
+      <p:sp>
+        <p:nvSpPr>
+          <p:cNvPr id="3" name="Text 1"/>
+          <p:cNvSpPr/>
+          <p:nvPr/>
+        </p:nvSpPr>
+        <p:spPr>
+          <a:xfrm>
+            <a:off x="365760" y="1005840"/>
+            <a:ext cx="11460175" cy="731520"/>
+          </a:xfrm>
+          <a:prstGeom prst="rect">
+            <a:avLst/>
+          </a:prstGeom>
+          <a:noFill/>
+          <a:ln/>
+        </p:spPr>
+        <p:txBody>
+          <a:bodyPr wrap="square" lIns="0" tIns="0" rIns="0" bIns="0" rtlCol="0" anchor="ctr">
+            <a:normAutofit/>
+          </a:bodyPr>
+          <a:lstStyle/>
+          <a:p>
+            <a:pPr algn="ctr" indent="0" marL="0">
+              <a:buNone/>
+            </a:pPr>
+            <a:r>
+              <a:rPr lang="en-US" sz="3600" b="1" dirty="0">
+                <a:solidFill>
+                  <a:srgbClr val="990011"/>
+                </a:solidFill>
+                <a:latin typeface="Times New Roman" pitchFamily="34" charset="0"/>
+                <a:ea typeface="Times New Roman" pitchFamily="34" charset="-122"/>
+                <a:cs typeface="Times New Roman" pitchFamily="34" charset="-120"/>
+              </a:rPr>
+              <a:t>2. Causes of Urban Problems</a:t>
+            </a:r>
+            <a:endParaRPr lang="en-US" sz="3600" dirty="0"/>
+          </a:p>
+        </p:txBody>
+      </p:sp>
+      <p:sp>
+        <p:nvSpPr>
+          <p:cNvPr id="4" name="Text 2"/>
+          <p:cNvSpPr/>
+          <p:nvPr/>
+        </p:nvSpPr>
+        <p:spPr>
+          <a:xfrm>
+            <a:off x="365760" y="1783080"/>
+            <a:ext cx="4846320" cy="4617720"/>
+          </a:xfrm>
+          <a:prstGeom prst="rect">
+            <a:avLst/>
+          </a:prstGeom>
+          <a:noFill/>
+          <a:ln/>
+        </p:spPr>
+        <p:txBody>
+          <a:bodyPr wrap="square" lIns="0" tIns="0" rIns="0" bIns="0" rtlCol="0" anchor="t"/>
+          <a:lstStyle/>
+          <a:p>
+            <a:pPr algn="l" indent="0" marL="0">
+              <a:spcAft>
+                <a:spcPts val="800"/>
+              </a:spcAft>
+              <a:buNone/>
+            </a:pPr>
+            <a:r>
+              <a:rPr lang="en-US" sz="3600" i="1" dirty="0">
+                <a:solidFill>
+                  <a:srgbClr val="111111"/>
+                </a:solidFill>
+                <a:latin typeface="Times New Roman" pitchFamily="34" charset="0"/>
+                <a:ea typeface="Times New Roman" pitchFamily="34" charset="-122"/>
+                <a:cs typeface="Times New Roman" pitchFamily="34" charset="-120"/>
+              </a:rPr>
+              <a:t>Urban problems have the following causes:</a:t>
+            </a:r>
+            <a:endParaRPr lang="en-US" sz="3600" dirty="0"/>
+          </a:p>
+          <a:p>
+            <a:pPr algn="l" indent="0" marL="0">
+              <a:spcAft>
+                <a:spcPts val="800"/>
+              </a:spcAft>
+              <a:buNone/>
+            </a:pPr>
+            <a:r>
+              <a:rPr lang="en-US" sz="3600" b="1" dirty="0">
+                <a:solidFill>
+                  <a:srgbClr val="111111"/>
+                </a:solidFill>
+                <a:latin typeface="Times New Roman" pitchFamily="34" charset="0"/>
+                <a:ea typeface="Times New Roman" pitchFamily="34" charset="-122"/>
+                <a:cs typeface="Times New Roman" pitchFamily="34" charset="-120"/>
+              </a:rPr>
+              <a:t>Rapid population growth: </a:t>
+            </a:r>
+            <a:pPr algn="l" indent="0" marL="0">
+              <a:spcAft>
+                <a:spcPts val="800"/>
+              </a:spcAft>
+              <a:buNone/>
+            </a:pPr>
+            <a:r>
+              <a:rPr lang="en-US" sz="3600" dirty="0">
+                <a:solidFill>
+                  <a:srgbClr val="111111"/>
+                </a:solidFill>
+                <a:latin typeface="Times New Roman" pitchFamily="34" charset="0"/>
+                <a:ea typeface="Times New Roman" pitchFamily="34" charset="-122"/>
+                <a:cs typeface="Times New Roman" pitchFamily="34" charset="-120"/>
+              </a:rPr>
+              <a:t>Rural exodus and high birth rates make towns grow very fast.</a:t>
+            </a:r>
+            <a:endParaRPr lang="en-US" sz="3600" dirty="0"/>
           </a:p>
         </p:txBody>
       </p:sp>
       <p:pic>
         <p:nvPicPr>
-          <p:cNvPr id="3" name="Image 0" descr="/home/claude/f4/img/minesec_sheet.png">    </p:cNvPr>
+          <p:cNvPr id="5" name="Image 0" descr="/home/claude/f4/img/v2/usa_crowd.jpg">    </p:cNvPr>
           <p:cNvPicPr>
             <a:picLocks noChangeAspect="1"/>
           </p:cNvPicPr>
@@ -15557,8 +16559,8 @@
         </p:blipFill>
         <p:spPr>
           <a:xfrm>
-            <a:off x="0" y="658368"/>
-            <a:ext cx="5120640" cy="5833872"/>
+            <a:off x="5349240" y="2071212"/>
+            <a:ext cx="6659575" cy="3693983"/>
           </a:xfrm>
           <a:prstGeom prst="rect">
             <a:avLst/>
@@ -15567,14 +16569,14 @@
       </p:pic>
       <p:sp>
         <p:nvSpPr>
-          <p:cNvPr id="4" name="Text 1"/>
+          <p:cNvPr id="6" name="Text 3"/>
           <p:cNvSpPr/>
           <p:nvPr/>
         </p:nvSpPr>
         <p:spPr>
           <a:xfrm>
-            <a:off x="5349240" y="1005840"/>
-            <a:ext cx="6522415" cy="731520"/>
+            <a:off x="5349240" y="6089904"/>
+            <a:ext cx="6659575" cy="347472"/>
           </a:xfrm>
           <a:prstGeom prst="rect">
             <a:avLst/>
@@ -15583,68 +16585,24 @@
           <a:ln/>
         </p:spPr>
         <p:txBody>
-          <a:bodyPr wrap="square" lIns="0" tIns="0" rIns="0" bIns="0" rtlCol="0" anchor="ctr">
-            <a:normAutofit/>
-          </a:bodyPr>
+          <a:bodyPr wrap="square" lIns="0" tIns="0" rIns="0" bIns="0" rtlCol="0" anchor="ctr"/>
           <a:lstStyle/>
           <a:p>
             <a:pPr algn="ctr" indent="0" marL="0">
               <a:buNone/>
             </a:pPr>
             <a:r>
-              <a:rPr lang="en-US" sz="3600" b="1" dirty="0">
-                <a:solidFill>
-                  <a:srgbClr val="990011"/>
+              <a:rPr lang="en-US" sz="1600" i="1" dirty="0">
+                <a:solidFill>
+                  <a:srgbClr val="555555"/>
                 </a:solidFill>
                 <a:latin typeface="Times New Roman" pitchFamily="34" charset="0"/>
                 <a:ea typeface="Times New Roman" pitchFamily="34" charset="-122"/>
                 <a:cs typeface="Times New Roman" pitchFamily="34" charset="-120"/>
               </a:rPr>
-              <a:t>Expected Answer</a:t>
-            </a:r>
-            <a:endParaRPr lang="en-US" sz="3600" dirty="0"/>
-          </a:p>
-        </p:txBody>
-      </p:sp>
-      <p:sp>
-        <p:nvSpPr>
-          <p:cNvPr id="5" name="Text 2"/>
-          <p:cNvSpPr/>
-          <p:nvPr/>
-        </p:nvSpPr>
-        <p:spPr>
-          <a:xfrm>
-            <a:off x="5349240" y="1783080"/>
-            <a:ext cx="6522415" cy="4663440"/>
-          </a:xfrm>
-          <a:prstGeom prst="rect">
-            <a:avLst/>
-          </a:prstGeom>
-          <a:noFill/>
-          <a:ln/>
-        </p:spPr>
-        <p:txBody>
-          <a:bodyPr wrap="square" lIns="0" tIns="0" rIns="0" bIns="0" rtlCol="0" anchor="t"/>
-          <a:lstStyle/>
-          <a:p>
-            <a:pPr algn="l" indent="0" marL="0">
-              <a:spcAft>
-                <a:spcPts val="800"/>
-              </a:spcAft>
-              <a:buNone/>
-            </a:pPr>
-            <a:r>
-              <a:rPr lang="en-US" sz="4000" dirty="0">
-                <a:solidFill>
-                  <a:srgbClr val="111111"/>
-                </a:solidFill>
-                <a:latin typeface="Times New Roman" pitchFamily="34" charset="0"/>
-                <a:ea typeface="Times New Roman" pitchFamily="34" charset="-122"/>
-                <a:cs typeface="Times New Roman" pitchFamily="34" charset="-120"/>
-              </a:rPr>
-              <a:t>Slums, floods and unemployment.</a:t>
-            </a:r>
-            <a:endParaRPr lang="en-US" sz="4000" dirty="0"/>
+              <a:t>Illustration: a crowded town</a:t>
+            </a:r>
+            <a:endParaRPr lang="en-US" sz="1600" dirty="0"/>
           </a:p>
         </p:txBody>
       </p:sp>
@@ -15754,7 +16712,7 @@
                 <a:ea typeface="Calibri" pitchFamily="34" charset="-122"/>
                 <a:cs typeface="Calibri" pitchFamily="34" charset="-120"/>
               </a:rPr>
-              <a:t>FORMATIVE EVALUATION</a:t>
+              <a:t>BOARD SUMMARY</a:t>
             </a:r>
             <a:endParaRPr lang="en-US" sz="1400" dirty="0"/>
           </a:p>
@@ -15777,7 +16735,7 @@
         <p:spPr>
           <a:xfrm>
             <a:off x="0" y="658368"/>
-            <a:ext cx="5120640" cy="5833872"/>
+            <a:ext cx="1463040" cy="5833872"/>
           </a:xfrm>
           <a:prstGeom prst="rect">
             <a:avLst/>
@@ -15792,8 +16750,8 @@
         </p:nvSpPr>
         <p:spPr>
           <a:xfrm>
-            <a:off x="5349240" y="1005840"/>
-            <a:ext cx="6522415" cy="731520"/>
+            <a:off x="1691640" y="1005840"/>
+            <a:ext cx="10180015" cy="731520"/>
           </a:xfrm>
           <a:prstGeom prst="rect">
             <a:avLst/>
@@ -15819,7 +16777,7 @@
                 <a:ea typeface="Times New Roman" pitchFamily="34" charset="-122"/>
                 <a:cs typeface="Times New Roman" pitchFamily="34" charset="-120"/>
               </a:rPr>
-              <a:t>Evaluation 2</a:t>
+              <a:t>2. Causes of Urban Problems</a:t>
             </a:r>
             <a:endParaRPr lang="en-US" sz="3600" dirty="0"/>
           </a:p>
@@ -15833,8 +16791,8 @@
         </p:nvSpPr>
         <p:spPr>
           <a:xfrm>
-            <a:off x="5349240" y="1783080"/>
-            <a:ext cx="6522415" cy="4663440"/>
+            <a:off x="1691640" y="1783080"/>
+            <a:ext cx="10180015" cy="4663440"/>
           </a:xfrm>
           <a:prstGeom prst="rect">
             <a:avLst/>
@@ -15853,7 +16811,7 @@
               <a:buNone/>
             </a:pPr>
             <a:r>
-              <a:rPr lang="en-US" sz="4000" dirty="0">
+              <a:rPr lang="en-US" sz="4000" b="1" dirty="0">
                 <a:solidFill>
                   <a:srgbClr val="111111"/>
                 </a:solidFill>
@@ -15861,7 +16819,98 @@
                 <a:ea typeface="Times New Roman" pitchFamily="34" charset="-122"/>
                 <a:cs typeface="Times New Roman" pitchFamily="34" charset="-120"/>
               </a:rPr>
-              <a:t>Give two solutions.</a:t>
+              <a:t>Poor town planning: </a:t>
+            </a:r>
+            <a:pPr algn="l" indent="0" marL="0">
+              <a:spcAft>
+                <a:spcPts val="800"/>
+              </a:spcAft>
+              <a:buNone/>
+            </a:pPr>
+            <a:r>
+              <a:rPr lang="en-US" sz="4000" dirty="0">
+                <a:solidFill>
+                  <a:srgbClr val="111111"/>
+                </a:solidFill>
+                <a:latin typeface="Times New Roman" pitchFamily="34" charset="0"/>
+                <a:ea typeface="Times New Roman" pitchFamily="34" charset="-122"/>
+                <a:cs typeface="Times New Roman" pitchFamily="34" charset="-120"/>
+              </a:rPr>
+              <a:t>People build without permits, even in marshes and on riverbanks.</a:t>
+            </a:r>
+            <a:endParaRPr lang="en-US" sz="4000" dirty="0"/>
+          </a:p>
+          <a:p>
+            <a:pPr algn="l" indent="0" marL="0">
+              <a:spcAft>
+                <a:spcPts val="800"/>
+              </a:spcAft>
+              <a:buNone/>
+            </a:pPr>
+            <a:r>
+              <a:rPr lang="en-US" sz="4000" b="1" dirty="0">
+                <a:solidFill>
+                  <a:srgbClr val="111111"/>
+                </a:solidFill>
+                <a:latin typeface="Times New Roman" pitchFamily="34" charset="0"/>
+                <a:ea typeface="Times New Roman" pitchFamily="34" charset="-122"/>
+                <a:cs typeface="Times New Roman" pitchFamily="34" charset="-120"/>
+              </a:rPr>
+              <a:t>Poverty: </a:t>
+            </a:r>
+            <a:pPr algn="l" indent="0" marL="0">
+              <a:spcAft>
+                <a:spcPts val="800"/>
+              </a:spcAft>
+              <a:buNone/>
+            </a:pPr>
+            <a:r>
+              <a:rPr lang="en-US" sz="4000" dirty="0">
+                <a:solidFill>
+                  <a:srgbClr val="111111"/>
+                </a:solidFill>
+                <a:latin typeface="Times New Roman" pitchFamily="34" charset="0"/>
+                <a:ea typeface="Times New Roman" pitchFamily="34" charset="-122"/>
+                <a:cs typeface="Times New Roman" pitchFamily="34" charset="-120"/>
+              </a:rPr>
+              <a:t>Many people cannot afford decent houses or pay for services.</a:t>
+            </a:r>
+            <a:endParaRPr lang="en-US" sz="4000" dirty="0"/>
+          </a:p>
+          <a:p>
+            <a:pPr algn="l" indent="0" marL="0">
+              <a:spcAft>
+                <a:spcPts val="800"/>
+              </a:spcAft>
+              <a:buNone/>
+            </a:pPr>
+            <a:r>
+              <a:rPr lang="en-US" sz="4000" b="1" dirty="0">
+                <a:solidFill>
+                  <a:srgbClr val="111111"/>
+                </a:solidFill>
+                <a:latin typeface="Times New Roman" pitchFamily="34" charset="0"/>
+                <a:ea typeface="Times New Roman" pitchFamily="34" charset="-122"/>
+                <a:cs typeface="Times New Roman" pitchFamily="34" charset="-120"/>
+              </a:rPr>
+              <a:t>Lack of means: </a:t>
+            </a:r>
+            <a:pPr algn="l" indent="0" marL="0">
+              <a:spcAft>
+                <a:spcPts val="800"/>
+              </a:spcAft>
+              <a:buNone/>
+            </a:pPr>
+            <a:r>
+              <a:rPr lang="en-US" sz="4000" dirty="0">
+                <a:solidFill>
+                  <a:srgbClr val="111111"/>
+                </a:solidFill>
+                <a:latin typeface="Times New Roman" pitchFamily="34" charset="0"/>
+                <a:ea typeface="Times New Roman" pitchFamily="34" charset="-122"/>
+                <a:cs typeface="Times New Roman" pitchFamily="34" charset="-120"/>
+              </a:rPr>
+              <a:t>Councils lack money and equipment for roads, drains and waste collection.</a:t>
             </a:r>
             <a:endParaRPr lang="en-US" sz="4000" dirty="0"/>
           </a:p>
@@ -15973,7 +17022,7 @@
                 <a:ea typeface="Calibri" pitchFamily="34" charset="-122"/>
                 <a:cs typeface="Calibri" pitchFamily="34" charset="-120"/>
               </a:rPr>
-              <a:t>FORMATIVE EVALUATION</a:t>
+              <a:t>BOARD SUMMARY</a:t>
             </a:r>
             <a:endParaRPr lang="en-US" sz="1400" dirty="0"/>
           </a:p>
@@ -16038,7 +17087,7 @@
                 <a:ea typeface="Times New Roman" pitchFamily="34" charset="-122"/>
                 <a:cs typeface="Times New Roman" pitchFamily="34" charset="-120"/>
               </a:rPr>
-              <a:t>Expected Answer</a:t>
+              <a:t>2. Causes of Urban Problems (continued)</a:t>
             </a:r>
             <a:endParaRPr lang="en-US" sz="3600" dirty="0"/>
           </a:p>
@@ -16072,7 +17121,7 @@
               <a:buNone/>
             </a:pPr>
             <a:r>
-              <a:rPr lang="en-US" sz="4000" dirty="0">
+              <a:rPr lang="en-US" sz="4000" b="1" dirty="0">
                 <a:solidFill>
                   <a:srgbClr val="111111"/>
                 </a:solidFill>
@@ -16080,7 +17129,24 @@
                 <a:ea typeface="Times New Roman" pitchFamily="34" charset="-122"/>
                 <a:cs typeface="Times New Roman" pitchFamily="34" charset="-120"/>
               </a:rPr>
-              <a:t>Town planning and waste collection.</a:t>
+              <a:t>Bad behaviour: </a:t>
+            </a:r>
+            <a:pPr algn="l" indent="0" marL="0">
+              <a:spcAft>
+                <a:spcPts val="800"/>
+              </a:spcAft>
+              <a:buNone/>
+            </a:pPr>
+            <a:r>
+              <a:rPr lang="en-US" sz="4000" dirty="0">
+                <a:solidFill>
+                  <a:srgbClr val="111111"/>
+                </a:solidFill>
+                <a:latin typeface="Times New Roman" pitchFamily="34" charset="0"/>
+                <a:ea typeface="Times New Roman" pitchFamily="34" charset="-122"/>
+                <a:cs typeface="Times New Roman" pitchFamily="34" charset="-120"/>
+              </a:rPr>
+              <a:t>Some people throw rubbish anywhere and do not respect rules.</a:t>
             </a:r>
             <a:endParaRPr lang="en-US" sz="4000" dirty="0"/>
           </a:p>
@@ -16192,7 +17258,7 @@
                 <a:ea typeface="Calibri" pitchFamily="34" charset="-122"/>
                 <a:cs typeface="Calibri" pitchFamily="34" charset="-120"/>
               </a:rPr>
-              <a:t>REMEDIATION</a:t>
+              <a:t>BOARD SUMMARY</a:t>
             </a:r>
             <a:endParaRPr lang="en-US" sz="1400" dirty="0"/>
           </a:p>
@@ -16257,7 +17323,7 @@
                 <a:ea typeface="Times New Roman" pitchFamily="34" charset="-122"/>
                 <a:cs typeface="Times New Roman" pitchFamily="34" charset="-120"/>
               </a:rPr>
-              <a:t>Remediation</a:t>
+              <a:t>3. Consequences of Urban Problems</a:t>
             </a:r>
             <a:endParaRPr lang="en-US" sz="3600" dirty="0"/>
           </a:p>
@@ -16291,7 +17357,7 @@
               <a:buNone/>
             </a:pPr>
             <a:r>
-              <a:rPr lang="en-US" sz="4000" b="1" dirty="0">
+              <a:rPr lang="en-US" sz="4000" i="1" dirty="0">
                 <a:solidFill>
                   <a:srgbClr val="111111"/>
                 </a:solidFill>
@@ -16299,21 +17365,19 @@
                 <a:ea typeface="Times New Roman" pitchFamily="34" charset="-122"/>
                 <a:cs typeface="Times New Roman" pitchFamily="34" charset="-120"/>
               </a:rPr>
-              <a:t>Fill in the blanks:</a:t>
+              <a:t>Urban problems have the following consequences:</a:t>
             </a:r>
             <a:endParaRPr lang="en-US" sz="4000" dirty="0"/>
           </a:p>
           <a:p>
-            <a:pPr algn="l" marL="342900" indent="-342900">
+            <a:pPr algn="l" indent="0" marL="0">
               <a:spcAft>
                 <a:spcPts val="800"/>
               </a:spcAft>
-              <a:buSzPct val="100000"/>
-              <a:buFont typeface="+mj-lt"/>
-              <a:buAutoNum type="arabicPeriod" startAt="1"/>
-            </a:pPr>
-            <a:r>
-              <a:rPr lang="en-US" sz="4000" dirty="0">
+              <a:buNone/>
+            </a:pPr>
+            <a:r>
+              <a:rPr lang="en-US" sz="4000" b="1" dirty="0">
                 <a:solidFill>
                   <a:srgbClr val="111111"/>
                 </a:solidFill>
@@ -16321,18 +17385,13 @@
                 <a:ea typeface="Times New Roman" pitchFamily="34" charset="-122"/>
                 <a:cs typeface="Times New Roman" pitchFamily="34" charset="-120"/>
               </a:rPr>
-              <a:t>A crowded poor quarter is a ______.</a:t>
-            </a:r>
-            <a:endParaRPr lang="en-US" sz="4000" dirty="0"/>
-          </a:p>
-          <a:p>
-            <a:pPr algn="l" marL="342900" indent="-342900">
+              <a:t>Diseases: </a:t>
+            </a:r>
+            <a:pPr algn="l" indent="0" marL="0">
               <a:spcAft>
                 <a:spcPts val="800"/>
               </a:spcAft>
-              <a:buSzPct val="100000"/>
-              <a:buFont typeface="+mj-lt"/>
-              <a:buAutoNum type="arabicPeriod" startAt="1"/>
+              <a:buNone/>
             </a:pPr>
             <a:r>
               <a:rPr lang="en-US" sz="4000" dirty="0">
@@ -16343,21 +17402,19 @@
                 <a:ea typeface="Times New Roman" pitchFamily="34" charset="-122"/>
                 <a:cs typeface="Times New Roman" pitchFamily="34" charset="-120"/>
               </a:rPr>
-              <a:t>Permission to build a house is a building ______.</a:t>
+              <a:t>Waste and dirty water spread cholera, typhoid and malaria.</a:t>
             </a:r>
             <a:endParaRPr lang="en-US" sz="4000" dirty="0"/>
           </a:p>
           <a:p>
-            <a:pPr algn="l" marL="342900" indent="-342900">
+            <a:pPr algn="l" indent="0" marL="0">
               <a:spcAft>
                 <a:spcPts val="800"/>
               </a:spcAft>
-              <a:buSzPct val="100000"/>
-              <a:buFont typeface="+mj-lt"/>
-              <a:buAutoNum type="arabicPeriod" startAt="1"/>
-            </a:pPr>
-            <a:r>
-              <a:rPr lang="en-US" sz="4000" dirty="0">
+              <a:buNone/>
+            </a:pPr>
+            <a:r>
+              <a:rPr lang="en-US" sz="4000" b="1" dirty="0">
                 <a:solidFill>
                   <a:srgbClr val="111111"/>
                 </a:solidFill>
@@ -16365,7 +17422,24 @@
                 <a:ea typeface="Times New Roman" pitchFamily="34" charset="-122"/>
                 <a:cs typeface="Times New Roman" pitchFamily="34" charset="-120"/>
               </a:rPr>
-              <a:t>Rubbish in gutters causes ______.</a:t>
+              <a:t>Loss of life and property: </a:t>
+            </a:r>
+            <a:pPr algn="l" indent="0" marL="0">
+              <a:spcAft>
+                <a:spcPts val="800"/>
+              </a:spcAft>
+              <a:buNone/>
+            </a:pPr>
+            <a:r>
+              <a:rPr lang="en-US" sz="4000" dirty="0">
+                <a:solidFill>
+                  <a:srgbClr val="111111"/>
+                </a:solidFill>
+                <a:latin typeface="Times New Roman" pitchFamily="34" charset="0"/>
+                <a:ea typeface="Times New Roman" pitchFamily="34" charset="-122"/>
+                <a:cs typeface="Times New Roman" pitchFamily="34" charset="-120"/>
+              </a:rPr>
+              <a:t>Floods and collapsing houses kill people and destroy goods.</a:t>
             </a:r>
             <a:endParaRPr lang="en-US" sz="4000" dirty="0"/>
           </a:p>
@@ -16477,7 +17551,7 @@
                 <a:ea typeface="Calibri" pitchFamily="34" charset="-122"/>
                 <a:cs typeface="Calibri" pitchFamily="34" charset="-120"/>
               </a:rPr>
-              <a:t>HOMEWORK</a:t>
+              <a:t>BOARD SUMMARY</a:t>
             </a:r>
             <a:endParaRPr lang="en-US" sz="1400" dirty="0"/>
           </a:p>
@@ -16542,7 +17616,7 @@
                 <a:ea typeface="Times New Roman" pitchFamily="34" charset="-122"/>
                 <a:cs typeface="Times New Roman" pitchFamily="34" charset="-120"/>
               </a:rPr>
-              <a:t>Homework</a:t>
+              <a:t>3. Consequences of Urban Problems (continued)</a:t>
             </a:r>
             <a:endParaRPr lang="en-US" sz="3600" dirty="0"/>
           </a:p>
@@ -16576,7 +17650,7 @@
               <a:buNone/>
             </a:pPr>
             <a:r>
-              <a:rPr lang="en-US" sz="4000" dirty="0">
+              <a:rPr lang="en-US" sz="4000" b="1" dirty="0">
                 <a:solidFill>
                   <a:srgbClr val="111111"/>
                 </a:solidFill>
@@ -16584,7 +17658,61 @@
                 <a:ea typeface="Times New Roman" pitchFamily="34" charset="-122"/>
                 <a:cs typeface="Times New Roman" pitchFamily="34" charset="-120"/>
               </a:rPr>
-              <a:t>Identify one urban problem in your quarter and propose two solutions.</a:t>
+              <a:t>Crime and insecurity: </a:t>
+            </a:r>
+            <a:pPr algn="l" indent="0" marL="0">
+              <a:spcAft>
+                <a:spcPts val="800"/>
+              </a:spcAft>
+              <a:buNone/>
+            </a:pPr>
+            <a:r>
+              <a:rPr lang="en-US" sz="4000" dirty="0">
+                <a:solidFill>
+                  <a:srgbClr val="111111"/>
+                </a:solidFill>
+                <a:latin typeface="Times New Roman" pitchFamily="34" charset="0"/>
+                <a:ea typeface="Times New Roman" pitchFamily="34" charset="-122"/>
+                <a:cs typeface="Times New Roman" pitchFamily="34" charset="-120"/>
+              </a:rPr>
+              <a:t>Unemployment and poverty favour theft and drug abuse.</a:t>
+            </a:r>
+            <a:endParaRPr lang="en-US" sz="4000" dirty="0"/>
+          </a:p>
+          <a:p>
+            <a:pPr algn="l" indent="0" marL="0">
+              <a:spcAft>
+                <a:spcPts val="800"/>
+              </a:spcAft>
+              <a:buNone/>
+            </a:pPr>
+            <a:r>
+              <a:rPr lang="en-US" sz="4000" b="1" dirty="0">
+                <a:solidFill>
+                  <a:srgbClr val="111111"/>
+                </a:solidFill>
+                <a:latin typeface="Times New Roman" pitchFamily="34" charset="0"/>
+                <a:ea typeface="Times New Roman" pitchFamily="34" charset="-122"/>
+                <a:cs typeface="Times New Roman" pitchFamily="34" charset="-120"/>
+              </a:rPr>
+              <a:t>Loss of time and pollution: </a:t>
+            </a:r>
+            <a:pPr algn="l" indent="0" marL="0">
+              <a:spcAft>
+                <a:spcPts val="800"/>
+              </a:spcAft>
+              <a:buNone/>
+            </a:pPr>
+            <a:r>
+              <a:rPr lang="en-US" sz="4000" dirty="0">
+                <a:solidFill>
+                  <a:srgbClr val="111111"/>
+                </a:solidFill>
+                <a:latin typeface="Times New Roman" pitchFamily="34" charset="0"/>
+                <a:ea typeface="Times New Roman" pitchFamily="34" charset="-122"/>
+                <a:cs typeface="Times New Roman" pitchFamily="34" charset="-120"/>
+              </a:rPr>
+              <a:t>Traffic jams waste time and fuel and pollute the air.</a:t>
             </a:r>
             <a:endParaRPr lang="en-US" sz="4000" dirty="0"/>
           </a:p>
@@ -16696,15 +17824,135 @@
                 <a:ea typeface="Calibri" pitchFamily="34" charset="-122"/>
                 <a:cs typeface="Calibri" pitchFamily="34" charset="-120"/>
               </a:rPr>
-              <a:t>NEXT LESSON</a:t>
+              <a:t>BOARD SUMMARY</a:t>
             </a:r>
             <a:endParaRPr lang="en-US" sz="1400" dirty="0"/>
+          </a:p>
+        </p:txBody>
+      </p:sp>
+      <p:sp>
+        <p:nvSpPr>
+          <p:cNvPr id="3" name="Text 1"/>
+          <p:cNvSpPr/>
+          <p:nvPr/>
+        </p:nvSpPr>
+        <p:spPr>
+          <a:xfrm>
+            <a:off x="365760" y="1005840"/>
+            <a:ext cx="11460175" cy="731520"/>
+          </a:xfrm>
+          <a:prstGeom prst="rect">
+            <a:avLst/>
+          </a:prstGeom>
+          <a:noFill/>
+          <a:ln/>
+        </p:spPr>
+        <p:txBody>
+          <a:bodyPr wrap="square" lIns="0" tIns="0" rIns="0" bIns="0" rtlCol="0" anchor="ctr">
+            <a:normAutofit/>
+          </a:bodyPr>
+          <a:lstStyle/>
+          <a:p>
+            <a:pPr algn="ctr" indent="0" marL="0">
+              <a:buNone/>
+            </a:pPr>
+            <a:r>
+              <a:rPr lang="en-US" sz="3600" b="1" dirty="0">
+                <a:solidFill>
+                  <a:srgbClr val="990011"/>
+                </a:solidFill>
+                <a:latin typeface="Times New Roman" pitchFamily="34" charset="0"/>
+                <a:ea typeface="Times New Roman" pitchFamily="34" charset="-122"/>
+                <a:cs typeface="Times New Roman" pitchFamily="34" charset="-120"/>
+              </a:rPr>
+              <a:t>4. Solutions and Regulations in Force</a:t>
+            </a:r>
+            <a:endParaRPr lang="en-US" sz="3600" dirty="0"/>
+          </a:p>
+        </p:txBody>
+      </p:sp>
+      <p:sp>
+        <p:nvSpPr>
+          <p:cNvPr id="4" name="Text 2"/>
+          <p:cNvSpPr/>
+          <p:nvPr/>
+        </p:nvSpPr>
+        <p:spPr>
+          <a:xfrm>
+            <a:off x="365760" y="1783080"/>
+            <a:ext cx="4846320" cy="4617720"/>
+          </a:xfrm>
+          <a:prstGeom prst="rect">
+            <a:avLst/>
+          </a:prstGeom>
+          <a:noFill/>
+          <a:ln/>
+        </p:spPr>
+        <p:txBody>
+          <a:bodyPr wrap="square" lIns="0" tIns="0" rIns="0" bIns="0" rtlCol="0" anchor="t"/>
+          <a:lstStyle/>
+          <a:p>
+            <a:pPr algn="l" indent="0" marL="0">
+              <a:spcAft>
+                <a:spcPts val="800"/>
+              </a:spcAft>
+              <a:buNone/>
+            </a:pPr>
+            <a:r>
+              <a:rPr lang="en-US" sz="3600" i="1" dirty="0">
+                <a:solidFill>
+                  <a:srgbClr val="111111"/>
+                </a:solidFill>
+                <a:latin typeface="Times New Roman" pitchFamily="34" charset="0"/>
+                <a:ea typeface="Times New Roman" pitchFamily="34" charset="-122"/>
+                <a:cs typeface="Times New Roman" pitchFamily="34" charset="-120"/>
+              </a:rPr>
+              <a:t>Urban problems can be reduced by the following measures:</a:t>
+            </a:r>
+            <a:endParaRPr lang="en-US" sz="3600" dirty="0"/>
+          </a:p>
+          <a:p>
+            <a:pPr algn="l" indent="0" marL="0">
+              <a:spcAft>
+                <a:spcPts val="800"/>
+              </a:spcAft>
+              <a:buNone/>
+            </a:pPr>
+            <a:r>
+              <a:rPr lang="en-US" sz="3600" b="1" dirty="0">
+                <a:solidFill>
+                  <a:srgbClr val="111111"/>
+                </a:solidFill>
+                <a:latin typeface="Times New Roman" pitchFamily="34" charset="0"/>
+                <a:ea typeface="Times New Roman" pitchFamily="34" charset="-122"/>
+                <a:cs typeface="Times New Roman" pitchFamily="34" charset="-120"/>
+              </a:rPr>
+              <a:t>Town planning: </a:t>
+            </a:r>
+            <a:pPr algn="l" indent="0" marL="0">
+              <a:spcAft>
+                <a:spcPts val="800"/>
+              </a:spcAft>
+              <a:buNone/>
+            </a:pPr>
+            <a:r>
+              <a:rPr lang="en-US" sz="3600" dirty="0">
+                <a:solidFill>
+                  <a:srgbClr val="111111"/>
+                </a:solidFill>
+                <a:latin typeface="Times New Roman" pitchFamily="34" charset="0"/>
+                <a:ea typeface="Times New Roman" pitchFamily="34" charset="-122"/>
+                <a:cs typeface="Times New Roman" pitchFamily="34" charset="-120"/>
+              </a:rPr>
+              <a:t>Councils plan quarters, roads and drains, and every building needs a building permit.</a:t>
+            </a:r>
+            <a:endParaRPr lang="en-US" sz="3600" dirty="0"/>
           </a:p>
         </p:txBody>
       </p:sp>
       <p:pic>
         <p:nvPicPr>
-          <p:cNvPr id="3" name="Image 0" descr="/home/claude/f4/img/minesec_sheet.png">    </p:cNvPr>
+          <p:cNvPr id="5" name="Image 0" descr="/home/claude/f4/img/v2/usa_newtown.jpg">    </p:cNvPr>
           <p:cNvPicPr>
             <a:picLocks noChangeAspect="1"/>
           </p:cNvPicPr>
@@ -16718,8 +17966,8 @@
         </p:blipFill>
         <p:spPr>
           <a:xfrm>
-            <a:off x="0" y="658368"/>
-            <a:ext cx="5120640" cy="5833872"/>
+            <a:off x="5349240" y="2071212"/>
+            <a:ext cx="6659575" cy="3693983"/>
           </a:xfrm>
           <a:prstGeom prst="rect">
             <a:avLst/>
@@ -16728,14 +17976,14 @@
       </p:pic>
       <p:sp>
         <p:nvSpPr>
-          <p:cNvPr id="4" name="Text 1"/>
+          <p:cNvPr id="6" name="Text 3"/>
           <p:cNvSpPr/>
           <p:nvPr/>
         </p:nvSpPr>
         <p:spPr>
           <a:xfrm>
-            <a:off x="5349240" y="1005840"/>
-            <a:ext cx="6522415" cy="731520"/>
+            <a:off x="5349240" y="6089904"/>
+            <a:ext cx="6659575" cy="347472"/>
           </a:xfrm>
           <a:prstGeom prst="rect">
             <a:avLst/>
@@ -16744,88 +17992,24 @@
           <a:ln/>
         </p:spPr>
         <p:txBody>
-          <a:bodyPr wrap="square" lIns="0" tIns="0" rIns="0" bIns="0" rtlCol="0" anchor="ctr">
-            <a:normAutofit/>
-          </a:bodyPr>
+          <a:bodyPr wrap="square" lIns="0" tIns="0" rIns="0" bIns="0" rtlCol="0" anchor="ctr"/>
           <a:lstStyle/>
           <a:p>
             <a:pPr algn="ctr" indent="0" marL="0">
               <a:buNone/>
             </a:pPr>
             <a:r>
-              <a:rPr lang="en-US" sz="3600" b="1" dirty="0">
-                <a:solidFill>
-                  <a:srgbClr val="990011"/>
+              <a:rPr lang="en-US" sz="1600" i="1" dirty="0">
+                <a:solidFill>
+                  <a:srgbClr val="555555"/>
                 </a:solidFill>
                 <a:latin typeface="Times New Roman" pitchFamily="34" charset="0"/>
                 <a:ea typeface="Times New Roman" pitchFamily="34" charset="-122"/>
                 <a:cs typeface="Times New Roman" pitchFamily="34" charset="-120"/>
               </a:rPr>
-              <a:t>Next Lesson</a:t>
-            </a:r>
-            <a:endParaRPr lang="en-US" sz="3600" dirty="0"/>
-          </a:p>
-        </p:txBody>
-      </p:sp>
-      <p:sp>
-        <p:nvSpPr>
-          <p:cNvPr id="5" name="Text 2"/>
-          <p:cNvSpPr/>
-          <p:nvPr/>
-        </p:nvSpPr>
-        <p:spPr>
-          <a:xfrm>
-            <a:off x="5349240" y="1783080"/>
-            <a:ext cx="6522415" cy="4663440"/>
-          </a:xfrm>
-          <a:prstGeom prst="rect">
-            <a:avLst/>
-          </a:prstGeom>
-          <a:noFill/>
-          <a:ln/>
-        </p:spPr>
-        <p:txBody>
-          <a:bodyPr wrap="square" lIns="0" tIns="0" rIns="0" bIns="0" rtlCol="0" anchor="ctr"/>
-          <a:lstStyle/>
-          <a:p>
-            <a:pPr algn="ctr" indent="0" marL="0">
-              <a:spcAft>
-                <a:spcPts val="800"/>
-              </a:spcAft>
-              <a:buNone/>
-            </a:pPr>
-            <a:r>
-              <a:rPr lang="en-US" sz="4000" b="1" dirty="0">
-                <a:solidFill>
-                  <a:srgbClr val="111111"/>
-                </a:solidFill>
-                <a:latin typeface="Times New Roman" pitchFamily="34" charset="0"/>
-                <a:ea typeface="Times New Roman" pitchFamily="34" charset="-122"/>
-                <a:cs typeface="Times New Roman" pitchFamily="34" charset="-120"/>
-              </a:rPr>
-              <a:t>Our next lesson will be on:</a:t>
-            </a:r>
-            <a:endParaRPr lang="en-US" sz="4000" dirty="0"/>
-          </a:p>
-          <a:p>
-            <a:pPr algn="ctr" indent="0" marL="0">
-              <a:spcAft>
-                <a:spcPts val="800"/>
-              </a:spcAft>
-              <a:buNone/>
-            </a:pPr>
-            <a:r>
-              <a:rPr lang="en-US" sz="4000" b="1" dirty="0">
-                <a:solidFill>
-                  <a:srgbClr val="990011"/>
-                </a:solidFill>
-                <a:latin typeface="Times New Roman" pitchFamily="34" charset="0"/>
-                <a:ea typeface="Times New Roman" pitchFamily="34" charset="-122"/>
-                <a:cs typeface="Times New Roman" pitchFamily="34" charset="-120"/>
-              </a:rPr>
-              <a:t>Lesson 8: Relationships between Towns and Country Sides</a:t>
-            </a:r>
-            <a:endParaRPr lang="en-US" sz="4000" dirty="0"/>
+              <a:t>Illustration: a planned housing area</a:t>
+            </a:r>
+            <a:endParaRPr lang="en-US" sz="1600" dirty="0"/>
           </a:p>
         </p:txBody>
       </p:sp>
@@ -16935,22 +18119,46 @@
                 <a:ea typeface="Calibri" pitchFamily="34" charset="-122"/>
                 <a:cs typeface="Calibri" pitchFamily="34" charset="-120"/>
               </a:rPr>
-              <a:t>BILINGUAL GAME</a:t>
+              <a:t>BOARD SUMMARY</a:t>
             </a:r>
             <a:endParaRPr lang="en-US" sz="1400" dirty="0"/>
           </a:p>
         </p:txBody>
       </p:sp>
-      <p:sp>
-        <p:nvSpPr>
-          <p:cNvPr id="3" name="Text 1"/>
+      <p:pic>
+        <p:nvPicPr>
+          <p:cNvPr id="3" name="Image 0" descr="/home/claude/f4/img/minesec_sheet.png">    </p:cNvPr>
+          <p:cNvPicPr>
+            <a:picLocks noChangeAspect="1"/>
+          </p:cNvPicPr>
+          <p:nvPr/>
+        </p:nvPicPr>
+        <p:blipFill>
+          <a:blip r:embed="rId1"/>
+          <a:stretch>
+            <a:fillRect/>
+          </a:stretch>
+        </p:blipFill>
+        <p:spPr>
+          <a:xfrm>
+            <a:off x="0" y="658368"/>
+            <a:ext cx="2468880" cy="5833872"/>
+          </a:xfrm>
+          <a:prstGeom prst="rect">
+            <a:avLst/>
+          </a:prstGeom>
+        </p:spPr>
+      </p:pic>
+      <p:sp>
+        <p:nvSpPr>
+          <p:cNvPr id="4" name="Text 1"/>
           <p:cNvSpPr/>
           <p:nvPr/>
         </p:nvSpPr>
         <p:spPr>
           <a:xfrm>
-            <a:off x="457200" y="1005840"/>
-            <a:ext cx="11277295" cy="731520"/>
+            <a:off x="2697480" y="1005840"/>
+            <a:ext cx="9174175" cy="731520"/>
           </a:xfrm>
           <a:prstGeom prst="rect">
             <a:avLst/>
@@ -16959,7 +18167,9 @@
           <a:ln/>
         </p:spPr>
         <p:txBody>
-          <a:bodyPr wrap="square" lIns="0" tIns="0" rIns="0" bIns="0" rtlCol="0" anchor="ctr"/>
+          <a:bodyPr wrap="square" lIns="0" tIns="0" rIns="0" bIns="0" rtlCol="0" anchor="ctr">
+            <a:normAutofit/>
+          </a:bodyPr>
           <a:lstStyle/>
           <a:p>
             <a:pPr algn="ctr" indent="0" marL="0">
@@ -16974,6 +18184,2364 @@
                 <a:ea typeface="Times New Roman" pitchFamily="34" charset="-122"/>
                 <a:cs typeface="Times New Roman" pitchFamily="34" charset="-120"/>
               </a:rPr>
+              <a:t>4. Solutions and Regulations in Force</a:t>
+            </a:r>
+            <a:endParaRPr lang="en-US" sz="3600" dirty="0"/>
+          </a:p>
+        </p:txBody>
+      </p:sp>
+      <p:sp>
+        <p:nvSpPr>
+          <p:cNvPr id="5" name="Text 2"/>
+          <p:cNvSpPr/>
+          <p:nvPr/>
+        </p:nvSpPr>
+        <p:spPr>
+          <a:xfrm>
+            <a:off x="2697480" y="1783080"/>
+            <a:ext cx="9174175" cy="4663440"/>
+          </a:xfrm>
+          <a:prstGeom prst="rect">
+            <a:avLst/>
+          </a:prstGeom>
+          <a:noFill/>
+          <a:ln/>
+        </p:spPr>
+        <p:txBody>
+          <a:bodyPr wrap="square" lIns="0" tIns="0" rIns="0" bIns="0" rtlCol="0" anchor="t"/>
+          <a:lstStyle/>
+          <a:p>
+            <a:pPr algn="l" indent="0" marL="0">
+              <a:spcAft>
+                <a:spcPts val="800"/>
+              </a:spcAft>
+              <a:buNone/>
+            </a:pPr>
+            <a:r>
+              <a:rPr lang="en-US" sz="4000" b="1" dirty="0">
+                <a:solidFill>
+                  <a:srgbClr val="111111"/>
+                </a:solidFill>
+                <a:latin typeface="Times New Roman" pitchFamily="34" charset="0"/>
+                <a:ea typeface="Times New Roman" pitchFamily="34" charset="-122"/>
+                <a:cs typeface="Times New Roman" pitchFamily="34" charset="-120"/>
+              </a:rPr>
+              <a:t>Risky zones: </a:t>
+            </a:r>
+            <a:pPr algn="l" indent="0" marL="0">
+              <a:spcAft>
+                <a:spcPts val="800"/>
+              </a:spcAft>
+              <a:buNone/>
+            </a:pPr>
+            <a:r>
+              <a:rPr lang="en-US" sz="4000" dirty="0">
+                <a:solidFill>
+                  <a:srgbClr val="111111"/>
+                </a:solidFill>
+                <a:latin typeface="Times New Roman" pitchFamily="34" charset="0"/>
+                <a:ea typeface="Times New Roman" pitchFamily="34" charset="-122"/>
+                <a:cs typeface="Times New Roman" pitchFamily="34" charset="-120"/>
+              </a:rPr>
+              <a:t>The law forbids building in marshes, on riverbanks and on steep slopes, and illegal houses can be demolished.</a:t>
+            </a:r>
+            <a:endParaRPr lang="en-US" sz="4000" dirty="0"/>
+          </a:p>
+          <a:p>
+            <a:pPr algn="l" indent="0" marL="0">
+              <a:spcAft>
+                <a:spcPts val="800"/>
+              </a:spcAft>
+              <a:buNone/>
+            </a:pPr>
+            <a:r>
+              <a:rPr lang="en-US" sz="4000" b="1" dirty="0">
+                <a:solidFill>
+                  <a:srgbClr val="111111"/>
+                </a:solidFill>
+                <a:latin typeface="Times New Roman" pitchFamily="34" charset="0"/>
+                <a:ea typeface="Times New Roman" pitchFamily="34" charset="-122"/>
+                <a:cs typeface="Times New Roman" pitchFamily="34" charset="-120"/>
+              </a:rPr>
+              <a:t>Waste collection: </a:t>
+            </a:r>
+            <a:pPr algn="l" indent="0" marL="0">
+              <a:spcAft>
+                <a:spcPts val="800"/>
+              </a:spcAft>
+              <a:buNone/>
+            </a:pPr>
+            <a:r>
+              <a:rPr lang="en-US" sz="4000" dirty="0">
+                <a:solidFill>
+                  <a:srgbClr val="111111"/>
+                </a:solidFill>
+                <a:latin typeface="Times New Roman" pitchFamily="34" charset="0"/>
+                <a:ea typeface="Times New Roman" pitchFamily="34" charset="-122"/>
+                <a:cs typeface="Times New Roman" pitchFamily="34" charset="-120"/>
+              </a:rPr>
+              <a:t>Companies such as HYSACAM collect waste, and throwing rubbish in gutters is punished.</a:t>
+            </a:r>
+            <a:endParaRPr lang="en-US" sz="4000" dirty="0"/>
+          </a:p>
+        </p:txBody>
+      </p:sp>
+      <p:sp>
+        <p:nvSpPr>
+          <p:cNvPr id="25" name="Slide Number Placeholder 0"/>
+          <p:cNvSpPr>
+            <a:spLocks noGrp="1"/>
+          </p:cNvSpPr>
+          <p:nvPr>
+            <p:ph type="sldNum" sz="quarter" idx="4294967295"/>
+          </p:nvPr>
+        </p:nvSpPr>
+        <p:spPr>
+          <a:xfrm>
+            <a:off x="27432" y="91440"/>
+            <a:ext cx="585216" cy="475488"/>
+          </a:xfrm>
+          <a:prstGeom prst="rect">
+            <a:avLst/>
+          </a:prstGeom>
+          <a:extLst>
+            <a:ext uri="{C572A759-6A51-4108-AA02-DFA0A04FC94B}">
+              <ma14:wrappingTextBoxFlag xmlns:ma14="http://schemas.microsoft.com/office/mac/drawingml/2011/main" val="0"/>
+            </a:ext>
+          </a:extLst>
+        </p:spPr>
+        <p:txBody>
+          <a:bodyPr/>
+          <a:lstStyle>
+            <a:lvl1pPr>
+              <a:defRPr sz="2000">
+                <a:solidFill>
+                  <a:srgbClr val="FFFFFF"/>
+                </a:solidFill>
+                <a:latin typeface="Calibri"/>
+                <a:ea typeface="Calibri"/>
+                <a:cs typeface="Calibri"/>
+              </a:defRPr>
+            </a:lvl1pPr>
+          </a:lstStyle>
+          <a:p>
+            <a:pPr algn="ctr"/>
+            <a:fld id="{F7021451-1387-4CA6-816F-3879F97B5CBC}" type="slidenum">
+              <a:rPr b="1" lang="en-US"/>
+              <a:t>48</a:t>
+            </a:fld>
+            <a:endParaRPr lang="en-US"/>
+          </a:p>
+        </p:txBody>
+      </p:sp>
+    </p:spTree>
+  </p:cSld>
+  <p:clrMapOvr>
+    <a:masterClrMapping/>
+  </p:clrMapOvr>
+</p:sld>
+</file>
+
+<file path=ppt/slides/slide49.xml><?xml version="1.0" encoding="utf-8"?>
+<p:sld xmlns:a="http://schemas.openxmlformats.org/drawingml/2006/main" xmlns:r="http://schemas.openxmlformats.org/officeDocument/2006/relationships" xmlns:p="http://schemas.openxmlformats.org/presentationml/2006/main">
+  <p:cSld name="Slide 49">
+    <p:spTree>
+      <p:nvGrpSpPr>
+        <p:cNvPr id="1" name=""/>
+        <p:cNvGrpSpPr/>
+        <p:nvPr/>
+      </p:nvGrpSpPr>
+      <p:grpSpPr>
+        <a:xfrm>
+          <a:off x="0" y="0"/>
+          <a:ext cx="0" cy="0"/>
+          <a:chOff x="0" y="0"/>
+          <a:chExt cx="0" cy="0"/>
+        </a:xfrm>
+      </p:grpSpPr>
+      <p:sp>
+        <p:nvSpPr>
+          <p:cNvPr id="2" name="Text 0"/>
+          <p:cNvSpPr/>
+          <p:nvPr/>
+        </p:nvSpPr>
+        <p:spPr>
+          <a:xfrm>
+            <a:off x="457200" y="713232"/>
+            <a:ext cx="11368735" cy="274320"/>
+          </a:xfrm>
+          <a:prstGeom prst="rect">
+            <a:avLst/>
+          </a:prstGeom>
+          <a:noFill/>
+          <a:ln/>
+        </p:spPr>
+        <p:txBody>
+          <a:bodyPr wrap="square" lIns="0" tIns="0" rIns="0" bIns="0" rtlCol="0" anchor="ctr"/>
+          <a:lstStyle/>
+          <a:p>
+            <a:pPr algn="r" indent="0" marL="0">
+              <a:buNone/>
+            </a:pPr>
+            <a:r>
+              <a:rPr lang="en-US" sz="1400" b="1" dirty="0">
+                <a:solidFill>
+                  <a:srgbClr val="1C3F6E"/>
+                </a:solidFill>
+                <a:latin typeface="Calibri" pitchFamily="34" charset="0"/>
+                <a:ea typeface="Calibri" pitchFamily="34" charset="-122"/>
+                <a:cs typeface="Calibri" pitchFamily="34" charset="-120"/>
+              </a:rPr>
+              <a:t>BOARD SUMMARY</a:t>
+            </a:r>
+            <a:endParaRPr lang="en-US" sz="1400" dirty="0"/>
+          </a:p>
+        </p:txBody>
+      </p:sp>
+      <p:pic>
+        <p:nvPicPr>
+          <p:cNvPr id="3" name="Image 0" descr="/home/claude/f4/img/minesec_sheet.png">    </p:cNvPr>
+          <p:cNvPicPr>
+            <a:picLocks noChangeAspect="1"/>
+          </p:cNvPicPr>
+          <p:nvPr/>
+        </p:nvPicPr>
+        <p:blipFill>
+          <a:blip r:embed="rId1"/>
+          <a:stretch>
+            <a:fillRect/>
+          </a:stretch>
+        </p:blipFill>
+        <p:spPr>
+          <a:xfrm>
+            <a:off x="0" y="658368"/>
+            <a:ext cx="5120640" cy="5833872"/>
+          </a:xfrm>
+          <a:prstGeom prst="rect">
+            <a:avLst/>
+          </a:prstGeom>
+        </p:spPr>
+      </p:pic>
+      <p:sp>
+        <p:nvSpPr>
+          <p:cNvPr id="4" name="Text 1"/>
+          <p:cNvSpPr/>
+          <p:nvPr/>
+        </p:nvSpPr>
+        <p:spPr>
+          <a:xfrm>
+            <a:off x="5349240" y="1005840"/>
+            <a:ext cx="6522415" cy="731520"/>
+          </a:xfrm>
+          <a:prstGeom prst="rect">
+            <a:avLst/>
+          </a:prstGeom>
+          <a:noFill/>
+          <a:ln/>
+        </p:spPr>
+        <p:txBody>
+          <a:bodyPr wrap="square" lIns="0" tIns="0" rIns="0" bIns="0" rtlCol="0" anchor="ctr">
+            <a:normAutofit/>
+          </a:bodyPr>
+          <a:lstStyle/>
+          <a:p>
+            <a:pPr algn="ctr" indent="0" marL="0">
+              <a:buNone/>
+            </a:pPr>
+            <a:r>
+              <a:rPr lang="en-US" sz="3600" b="1" dirty="0">
+                <a:solidFill>
+                  <a:srgbClr val="990011"/>
+                </a:solidFill>
+                <a:latin typeface="Times New Roman" pitchFamily="34" charset="0"/>
+                <a:ea typeface="Times New Roman" pitchFamily="34" charset="-122"/>
+                <a:cs typeface="Times New Roman" pitchFamily="34" charset="-120"/>
+              </a:rPr>
+              <a:t>4. Solutions and Regulations in Force (continued)</a:t>
+            </a:r>
+            <a:endParaRPr lang="en-US" sz="3600" dirty="0"/>
+          </a:p>
+        </p:txBody>
+      </p:sp>
+      <p:sp>
+        <p:nvSpPr>
+          <p:cNvPr id="5" name="Text 2"/>
+          <p:cNvSpPr/>
+          <p:nvPr/>
+        </p:nvSpPr>
+        <p:spPr>
+          <a:xfrm>
+            <a:off x="5349240" y="1783080"/>
+            <a:ext cx="6522415" cy="4663440"/>
+          </a:xfrm>
+          <a:prstGeom prst="rect">
+            <a:avLst/>
+          </a:prstGeom>
+          <a:noFill/>
+          <a:ln/>
+        </p:spPr>
+        <p:txBody>
+          <a:bodyPr wrap="square" lIns="0" tIns="0" rIns="0" bIns="0" rtlCol="0" anchor="t"/>
+          <a:lstStyle/>
+          <a:p>
+            <a:pPr algn="l" indent="0" marL="0">
+              <a:spcAft>
+                <a:spcPts val="800"/>
+              </a:spcAft>
+              <a:buNone/>
+            </a:pPr>
+            <a:r>
+              <a:rPr lang="en-US" sz="4000" b="1" dirty="0">
+                <a:solidFill>
+                  <a:srgbClr val="111111"/>
+                </a:solidFill>
+                <a:latin typeface="Times New Roman" pitchFamily="34" charset="0"/>
+                <a:ea typeface="Times New Roman" pitchFamily="34" charset="-122"/>
+                <a:cs typeface="Times New Roman" pitchFamily="34" charset="-120"/>
+              </a:rPr>
+              <a:t>Roads and drains: </a:t>
+            </a:r>
+            <a:pPr algn="l" indent="0" marL="0">
+              <a:spcAft>
+                <a:spcPts val="800"/>
+              </a:spcAft>
+              <a:buNone/>
+            </a:pPr>
+            <a:r>
+              <a:rPr lang="en-US" sz="4000" dirty="0">
+                <a:solidFill>
+                  <a:srgbClr val="111111"/>
+                </a:solidFill>
+                <a:latin typeface="Times New Roman" pitchFamily="34" charset="0"/>
+                <a:ea typeface="Times New Roman" pitchFamily="34" charset="-122"/>
+                <a:cs typeface="Times New Roman" pitchFamily="34" charset="-120"/>
+              </a:rPr>
+              <a:t>The state and councils build roads and clean gutters regularly.</a:t>
+            </a:r>
+            <a:endParaRPr lang="en-US" sz="4000" dirty="0"/>
+          </a:p>
+          <a:p>
+            <a:pPr algn="l" indent="0" marL="0">
+              <a:spcAft>
+                <a:spcPts val="800"/>
+              </a:spcAft>
+              <a:buNone/>
+            </a:pPr>
+            <a:r>
+              <a:rPr lang="en-US" sz="4000" b="1" dirty="0">
+                <a:solidFill>
+                  <a:srgbClr val="111111"/>
+                </a:solidFill>
+                <a:latin typeface="Times New Roman" pitchFamily="34" charset="0"/>
+                <a:ea typeface="Times New Roman" pitchFamily="34" charset="-122"/>
+                <a:cs typeface="Times New Roman" pitchFamily="34" charset="-120"/>
+              </a:rPr>
+              <a:t>Jobs and housing: </a:t>
+            </a:r>
+            <a:pPr algn="l" indent="0" marL="0">
+              <a:spcAft>
+                <a:spcPts val="800"/>
+              </a:spcAft>
+              <a:buNone/>
+            </a:pPr>
+            <a:r>
+              <a:rPr lang="en-US" sz="4000" dirty="0">
+                <a:solidFill>
+                  <a:srgbClr val="111111"/>
+                </a:solidFill>
+                <a:latin typeface="Times New Roman" pitchFamily="34" charset="0"/>
+                <a:ea typeface="Times New Roman" pitchFamily="34" charset="-122"/>
+                <a:cs typeface="Times New Roman" pitchFamily="34" charset="-120"/>
+              </a:rPr>
+              <a:t>The state creates jobs and builds social housing for low-income families.</a:t>
+            </a:r>
+            <a:endParaRPr lang="en-US" sz="4000" dirty="0"/>
+          </a:p>
+        </p:txBody>
+      </p:sp>
+      <p:sp>
+        <p:nvSpPr>
+          <p:cNvPr id="25" name="Slide Number Placeholder 0"/>
+          <p:cNvSpPr>
+            <a:spLocks noGrp="1"/>
+          </p:cNvSpPr>
+          <p:nvPr>
+            <p:ph type="sldNum" sz="quarter" idx="4294967295"/>
+          </p:nvPr>
+        </p:nvSpPr>
+        <p:spPr>
+          <a:xfrm>
+            <a:off x="27432" y="91440"/>
+            <a:ext cx="585216" cy="475488"/>
+          </a:xfrm>
+          <a:prstGeom prst="rect">
+            <a:avLst/>
+          </a:prstGeom>
+          <a:extLst>
+            <a:ext uri="{C572A759-6A51-4108-AA02-DFA0A04FC94B}">
+              <ma14:wrappingTextBoxFlag xmlns:ma14="http://schemas.microsoft.com/office/mac/drawingml/2011/main" val="0"/>
+            </a:ext>
+          </a:extLst>
+        </p:spPr>
+        <p:txBody>
+          <a:bodyPr/>
+          <a:lstStyle>
+            <a:lvl1pPr>
+              <a:defRPr sz="2000">
+                <a:solidFill>
+                  <a:srgbClr val="FFFFFF"/>
+                </a:solidFill>
+                <a:latin typeface="Calibri"/>
+                <a:ea typeface="Calibri"/>
+                <a:cs typeface="Calibri"/>
+              </a:defRPr>
+            </a:lvl1pPr>
+          </a:lstStyle>
+          <a:p>
+            <a:pPr algn="ctr"/>
+            <a:fld id="{F7021451-1387-4CA6-816F-3879F97B5CBC}" type="slidenum">
+              <a:rPr b="1" lang="en-US"/>
+              <a:t>49</a:t>
+            </a:fld>
+            <a:endParaRPr lang="en-US"/>
+          </a:p>
+        </p:txBody>
+      </p:sp>
+    </p:spTree>
+  </p:cSld>
+  <p:clrMapOvr>
+    <a:masterClrMapping/>
+  </p:clrMapOvr>
+</p:sld>
+</file>
+
+<file path=ppt/slides/slide5.xml><?xml version="1.0" encoding="utf-8"?>
+<p:sld xmlns:a="http://schemas.openxmlformats.org/drawingml/2006/main" xmlns:r="http://schemas.openxmlformats.org/officeDocument/2006/relationships" xmlns:p="http://schemas.openxmlformats.org/presentationml/2006/main">
+  <p:cSld name="Slide 5">
+    <p:spTree>
+      <p:nvGrpSpPr>
+        <p:cNvPr id="1" name=""/>
+        <p:cNvGrpSpPr/>
+        <p:nvPr/>
+      </p:nvGrpSpPr>
+      <p:grpSpPr>
+        <a:xfrm>
+          <a:off x="0" y="0"/>
+          <a:ext cx="0" cy="0"/>
+          <a:chOff x="0" y="0"/>
+          <a:chExt cx="0" cy="0"/>
+        </a:xfrm>
+      </p:grpSpPr>
+      <p:sp>
+        <p:nvSpPr>
+          <p:cNvPr id="2" name="Text 0"/>
+          <p:cNvSpPr/>
+          <p:nvPr/>
+        </p:nvSpPr>
+        <p:spPr>
+          <a:xfrm>
+            <a:off x="457200" y="713232"/>
+            <a:ext cx="11368735" cy="274320"/>
+          </a:xfrm>
+          <a:prstGeom prst="rect">
+            <a:avLst/>
+          </a:prstGeom>
+          <a:noFill/>
+          <a:ln/>
+        </p:spPr>
+        <p:txBody>
+          <a:bodyPr wrap="square" lIns="0" tIns="0" rIns="0" bIns="0" rtlCol="0" anchor="ctr"/>
+          <a:lstStyle/>
+          <a:p>
+            <a:pPr algn="r" indent="0" marL="0">
+              <a:buNone/>
+            </a:pPr>
+            <a:r>
+              <a:rPr lang="en-US" sz="1400" b="1" dirty="0">
+                <a:solidFill>
+                  <a:srgbClr val="1C3F6E"/>
+                </a:solidFill>
+                <a:latin typeface="Calibri" pitchFamily="34" charset="0"/>
+                <a:ea typeface="Calibri" pitchFamily="34" charset="-122"/>
+                <a:cs typeface="Calibri" pitchFamily="34" charset="-120"/>
+              </a:rPr>
+              <a:t>HOMEWORK CORRECTION</a:t>
+            </a:r>
+            <a:endParaRPr lang="en-US" sz="1400" dirty="0"/>
+          </a:p>
+        </p:txBody>
+      </p:sp>
+      <p:pic>
+        <p:nvPicPr>
+          <p:cNvPr id="3" name="Image 0" descr="/home/claude/f4/img/minesec_sheet.png">    </p:cNvPr>
+          <p:cNvPicPr>
+            <a:picLocks noChangeAspect="1"/>
+          </p:cNvPicPr>
+          <p:nvPr/>
+        </p:nvPicPr>
+        <p:blipFill>
+          <a:blip r:embed="rId1"/>
+          <a:stretch>
+            <a:fillRect/>
+          </a:stretch>
+        </p:blipFill>
+        <p:spPr>
+          <a:xfrm>
+            <a:off x="0" y="658368"/>
+            <a:ext cx="5120640" cy="5833872"/>
+          </a:xfrm>
+          <a:prstGeom prst="rect">
+            <a:avLst/>
+          </a:prstGeom>
+        </p:spPr>
+      </p:pic>
+      <p:sp>
+        <p:nvSpPr>
+          <p:cNvPr id="4" name="Text 1"/>
+          <p:cNvSpPr/>
+          <p:nvPr/>
+        </p:nvSpPr>
+        <p:spPr>
+          <a:xfrm>
+            <a:off x="5349240" y="1005840"/>
+            <a:ext cx="6522415" cy="731520"/>
+          </a:xfrm>
+          <a:prstGeom prst="rect">
+            <a:avLst/>
+          </a:prstGeom>
+          <a:noFill/>
+          <a:ln/>
+        </p:spPr>
+        <p:txBody>
+          <a:bodyPr wrap="square" lIns="0" tIns="0" rIns="0" bIns="0" rtlCol="0" anchor="ctr">
+            <a:normAutofit/>
+          </a:bodyPr>
+          <a:lstStyle/>
+          <a:p>
+            <a:pPr algn="ctr" indent="0" marL="0">
+              <a:buNone/>
+            </a:pPr>
+            <a:r>
+              <a:rPr lang="en-US" sz="3600" b="1" dirty="0">
+                <a:solidFill>
+                  <a:srgbClr val="990011"/>
+                </a:solidFill>
+                <a:latin typeface="Times New Roman" pitchFamily="34" charset="0"/>
+                <a:ea typeface="Times New Roman" pitchFamily="34" charset="-122"/>
+                <a:cs typeface="Times New Roman" pitchFamily="34" charset="-120"/>
+              </a:rPr>
+              <a:t>Correction: Possible Answer</a:t>
+            </a:r>
+            <a:endParaRPr lang="en-US" sz="3600" dirty="0"/>
+          </a:p>
+        </p:txBody>
+      </p:sp>
+      <p:sp>
+        <p:nvSpPr>
+          <p:cNvPr id="5" name="Text 2"/>
+          <p:cNvSpPr/>
+          <p:nvPr/>
+        </p:nvSpPr>
+        <p:spPr>
+          <a:xfrm>
+            <a:off x="5349240" y="1783080"/>
+            <a:ext cx="6522415" cy="4663440"/>
+          </a:xfrm>
+          <a:prstGeom prst="rect">
+            <a:avLst/>
+          </a:prstGeom>
+          <a:noFill/>
+          <a:ln/>
+        </p:spPr>
+        <p:txBody>
+          <a:bodyPr wrap="square" lIns="0" tIns="0" rIns="0" bIns="0" rtlCol="0" anchor="t"/>
+          <a:lstStyle/>
+          <a:p>
+            <a:pPr algn="l" indent="0" marL="0">
+              <a:spcAft>
+                <a:spcPts val="800"/>
+              </a:spcAft>
+              <a:buNone/>
+            </a:pPr>
+            <a:r>
+              <a:rPr lang="en-US" sz="4000" dirty="0">
+                <a:solidFill>
+                  <a:srgbClr val="111111"/>
+                </a:solidFill>
+                <a:latin typeface="Times New Roman" pitchFamily="34" charset="0"/>
+                <a:ea typeface="Times New Roman" pitchFamily="34" charset="-122"/>
+                <a:cs typeface="Times New Roman" pitchFamily="34" charset="-120"/>
+              </a:rPr>
+              <a:t>The map shows Maroua, Garoua, Ngaoundéré, Bertoua, Yaoundé, Ebolowa, Douala, Buea, Bafoussam and Bamenda, each in its region, with a title and a key.</a:t>
+            </a:r>
+            <a:endParaRPr lang="en-US" sz="4000" dirty="0"/>
+          </a:p>
+        </p:txBody>
+      </p:sp>
+      <p:sp>
+        <p:nvSpPr>
+          <p:cNvPr id="25" name="Slide Number Placeholder 0"/>
+          <p:cNvSpPr>
+            <a:spLocks noGrp="1"/>
+          </p:cNvSpPr>
+          <p:nvPr>
+            <p:ph type="sldNum" sz="quarter" idx="4294967295"/>
+          </p:nvPr>
+        </p:nvSpPr>
+        <p:spPr>
+          <a:xfrm>
+            <a:off x="27432" y="91440"/>
+            <a:ext cx="585216" cy="475488"/>
+          </a:xfrm>
+          <a:prstGeom prst="rect">
+            <a:avLst/>
+          </a:prstGeom>
+          <a:extLst>
+            <a:ext uri="{C572A759-6A51-4108-AA02-DFA0A04FC94B}">
+              <ma14:wrappingTextBoxFlag xmlns:ma14="http://schemas.microsoft.com/office/mac/drawingml/2011/main" val="0"/>
+            </a:ext>
+          </a:extLst>
+        </p:spPr>
+        <p:txBody>
+          <a:bodyPr/>
+          <a:lstStyle>
+            <a:lvl1pPr>
+              <a:defRPr sz="2000">
+                <a:solidFill>
+                  <a:srgbClr val="FFFFFF"/>
+                </a:solidFill>
+                <a:latin typeface="Calibri"/>
+                <a:ea typeface="Calibri"/>
+                <a:cs typeface="Calibri"/>
+              </a:defRPr>
+            </a:lvl1pPr>
+          </a:lstStyle>
+          <a:p>
+            <a:pPr algn="ctr"/>
+            <a:fld id="{F7021451-1387-4CA6-816F-3879F97B5CBC}" type="slidenum">
+              <a:rPr b="1" lang="en-US"/>
+              <a:t>5</a:t>
+            </a:fld>
+            <a:endParaRPr lang="en-US"/>
+          </a:p>
+        </p:txBody>
+      </p:sp>
+    </p:spTree>
+  </p:cSld>
+  <p:clrMapOvr>
+    <a:masterClrMapping/>
+  </p:clrMapOvr>
+</p:sld>
+</file>
+
+<file path=ppt/slides/slide50.xml><?xml version="1.0" encoding="utf-8"?>
+<p:sld xmlns:a="http://schemas.openxmlformats.org/drawingml/2006/main" xmlns:r="http://schemas.openxmlformats.org/officeDocument/2006/relationships" xmlns:p="http://schemas.openxmlformats.org/presentationml/2006/main">
+  <p:cSld name="Slide 50">
+    <p:spTree>
+      <p:nvGrpSpPr>
+        <p:cNvPr id="1" name=""/>
+        <p:cNvGrpSpPr/>
+        <p:nvPr/>
+      </p:nvGrpSpPr>
+      <p:grpSpPr>
+        <a:xfrm>
+          <a:off x="0" y="0"/>
+          <a:ext cx="0" cy="0"/>
+          <a:chOff x="0" y="0"/>
+          <a:chExt cx="0" cy="0"/>
+        </a:xfrm>
+      </p:grpSpPr>
+      <p:sp>
+        <p:nvSpPr>
+          <p:cNvPr id="2" name="Text 0"/>
+          <p:cNvSpPr/>
+          <p:nvPr/>
+        </p:nvSpPr>
+        <p:spPr>
+          <a:xfrm>
+            <a:off x="457200" y="713232"/>
+            <a:ext cx="11368735" cy="274320"/>
+          </a:xfrm>
+          <a:prstGeom prst="rect">
+            <a:avLst/>
+          </a:prstGeom>
+          <a:noFill/>
+          <a:ln/>
+        </p:spPr>
+        <p:txBody>
+          <a:bodyPr wrap="square" lIns="0" tIns="0" rIns="0" bIns="0" rtlCol="0" anchor="ctr"/>
+          <a:lstStyle/>
+          <a:p>
+            <a:pPr algn="r" indent="0" marL="0">
+              <a:buNone/>
+            </a:pPr>
+            <a:r>
+              <a:rPr lang="en-US" sz="1400" b="1" dirty="0">
+                <a:solidFill>
+                  <a:srgbClr val="1C3F6E"/>
+                </a:solidFill>
+                <a:latin typeface="Calibri" pitchFamily="34" charset="0"/>
+                <a:ea typeface="Calibri" pitchFamily="34" charset="-122"/>
+                <a:cs typeface="Calibri" pitchFamily="34" charset="-120"/>
+              </a:rPr>
+              <a:t>FORMATIVE EVALUATION</a:t>
+            </a:r>
+            <a:endParaRPr lang="en-US" sz="1400" dirty="0"/>
+          </a:p>
+        </p:txBody>
+      </p:sp>
+      <p:pic>
+        <p:nvPicPr>
+          <p:cNvPr id="3" name="Image 0" descr="/home/claude/f4/img/minesec_sheet.png">    </p:cNvPr>
+          <p:cNvPicPr>
+            <a:picLocks noChangeAspect="1"/>
+          </p:cNvPicPr>
+          <p:nvPr/>
+        </p:nvPicPr>
+        <p:blipFill>
+          <a:blip r:embed="rId1"/>
+          <a:stretch>
+            <a:fillRect/>
+          </a:stretch>
+        </p:blipFill>
+        <p:spPr>
+          <a:xfrm>
+            <a:off x="0" y="658368"/>
+            <a:ext cx="5120640" cy="5833872"/>
+          </a:xfrm>
+          <a:prstGeom prst="rect">
+            <a:avLst/>
+          </a:prstGeom>
+        </p:spPr>
+      </p:pic>
+      <p:sp>
+        <p:nvSpPr>
+          <p:cNvPr id="4" name="Text 1"/>
+          <p:cNvSpPr/>
+          <p:nvPr/>
+        </p:nvSpPr>
+        <p:spPr>
+          <a:xfrm>
+            <a:off x="5349240" y="1005840"/>
+            <a:ext cx="6522415" cy="731520"/>
+          </a:xfrm>
+          <a:prstGeom prst="rect">
+            <a:avLst/>
+          </a:prstGeom>
+          <a:noFill/>
+          <a:ln/>
+        </p:spPr>
+        <p:txBody>
+          <a:bodyPr wrap="square" lIns="0" tIns="0" rIns="0" bIns="0" rtlCol="0" anchor="ctr">
+            <a:normAutofit/>
+          </a:bodyPr>
+          <a:lstStyle/>
+          <a:p>
+            <a:pPr algn="ctr" indent="0" marL="0">
+              <a:buNone/>
+            </a:pPr>
+            <a:r>
+              <a:rPr lang="en-US" sz="3600" b="1" dirty="0">
+                <a:solidFill>
+                  <a:srgbClr val="990011"/>
+                </a:solidFill>
+                <a:latin typeface="Times New Roman" pitchFamily="34" charset="0"/>
+                <a:ea typeface="Times New Roman" pitchFamily="34" charset="-122"/>
+                <a:cs typeface="Times New Roman" pitchFamily="34" charset="-120"/>
+              </a:rPr>
+              <a:t>Evaluation 1</a:t>
+            </a:r>
+            <a:endParaRPr lang="en-US" sz="3600" dirty="0"/>
+          </a:p>
+        </p:txBody>
+      </p:sp>
+      <p:sp>
+        <p:nvSpPr>
+          <p:cNvPr id="5" name="Text 2"/>
+          <p:cNvSpPr/>
+          <p:nvPr/>
+        </p:nvSpPr>
+        <p:spPr>
+          <a:xfrm>
+            <a:off x="5349240" y="1783080"/>
+            <a:ext cx="6522415" cy="4663440"/>
+          </a:xfrm>
+          <a:prstGeom prst="rect">
+            <a:avLst/>
+          </a:prstGeom>
+          <a:noFill/>
+          <a:ln/>
+        </p:spPr>
+        <p:txBody>
+          <a:bodyPr wrap="square" lIns="0" tIns="0" rIns="0" bIns="0" rtlCol="0" anchor="t"/>
+          <a:lstStyle/>
+          <a:p>
+            <a:pPr algn="l" indent="0" marL="0">
+              <a:spcAft>
+                <a:spcPts val="800"/>
+              </a:spcAft>
+              <a:buNone/>
+            </a:pPr>
+            <a:r>
+              <a:rPr lang="en-US" sz="4000" dirty="0">
+                <a:solidFill>
+                  <a:srgbClr val="111111"/>
+                </a:solidFill>
+                <a:latin typeface="Times New Roman" pitchFamily="34" charset="0"/>
+                <a:ea typeface="Times New Roman" pitchFamily="34" charset="-122"/>
+                <a:cs typeface="Times New Roman" pitchFamily="34" charset="-120"/>
+              </a:rPr>
+              <a:t>Give three urban problems in Cameroon.</a:t>
+            </a:r>
+            <a:endParaRPr lang="en-US" sz="4000" dirty="0"/>
+          </a:p>
+        </p:txBody>
+      </p:sp>
+      <p:sp>
+        <p:nvSpPr>
+          <p:cNvPr id="25" name="Slide Number Placeholder 0"/>
+          <p:cNvSpPr>
+            <a:spLocks noGrp="1"/>
+          </p:cNvSpPr>
+          <p:nvPr>
+            <p:ph type="sldNum" sz="quarter" idx="4294967295"/>
+          </p:nvPr>
+        </p:nvSpPr>
+        <p:spPr>
+          <a:xfrm>
+            <a:off x="27432" y="91440"/>
+            <a:ext cx="585216" cy="475488"/>
+          </a:xfrm>
+          <a:prstGeom prst="rect">
+            <a:avLst/>
+          </a:prstGeom>
+          <a:extLst>
+            <a:ext uri="{C572A759-6A51-4108-AA02-DFA0A04FC94B}">
+              <ma14:wrappingTextBoxFlag xmlns:ma14="http://schemas.microsoft.com/office/mac/drawingml/2011/main" val="0"/>
+            </a:ext>
+          </a:extLst>
+        </p:spPr>
+        <p:txBody>
+          <a:bodyPr/>
+          <a:lstStyle>
+            <a:lvl1pPr>
+              <a:defRPr sz="2000">
+                <a:solidFill>
+                  <a:srgbClr val="FFFFFF"/>
+                </a:solidFill>
+                <a:latin typeface="Calibri"/>
+                <a:ea typeface="Calibri"/>
+                <a:cs typeface="Calibri"/>
+              </a:defRPr>
+            </a:lvl1pPr>
+          </a:lstStyle>
+          <a:p>
+            <a:pPr algn="ctr"/>
+            <a:fld id="{F7021451-1387-4CA6-816F-3879F97B5CBC}" type="slidenum">
+              <a:rPr b="1" lang="en-US"/>
+              <a:t>50</a:t>
+            </a:fld>
+            <a:endParaRPr lang="en-US"/>
+          </a:p>
+        </p:txBody>
+      </p:sp>
+    </p:spTree>
+  </p:cSld>
+  <p:clrMapOvr>
+    <a:masterClrMapping/>
+  </p:clrMapOvr>
+</p:sld>
+</file>
+
+<file path=ppt/slides/slide51.xml><?xml version="1.0" encoding="utf-8"?>
+<p:sld xmlns:a="http://schemas.openxmlformats.org/drawingml/2006/main" xmlns:r="http://schemas.openxmlformats.org/officeDocument/2006/relationships" xmlns:p="http://schemas.openxmlformats.org/presentationml/2006/main">
+  <p:cSld name="Slide 51">
+    <p:spTree>
+      <p:nvGrpSpPr>
+        <p:cNvPr id="1" name=""/>
+        <p:cNvGrpSpPr/>
+        <p:nvPr/>
+      </p:nvGrpSpPr>
+      <p:grpSpPr>
+        <a:xfrm>
+          <a:off x="0" y="0"/>
+          <a:ext cx="0" cy="0"/>
+          <a:chOff x="0" y="0"/>
+          <a:chExt cx="0" cy="0"/>
+        </a:xfrm>
+      </p:grpSpPr>
+      <p:sp>
+        <p:nvSpPr>
+          <p:cNvPr id="2" name="Text 0"/>
+          <p:cNvSpPr/>
+          <p:nvPr/>
+        </p:nvSpPr>
+        <p:spPr>
+          <a:xfrm>
+            <a:off x="457200" y="713232"/>
+            <a:ext cx="11368735" cy="274320"/>
+          </a:xfrm>
+          <a:prstGeom prst="rect">
+            <a:avLst/>
+          </a:prstGeom>
+          <a:noFill/>
+          <a:ln/>
+        </p:spPr>
+        <p:txBody>
+          <a:bodyPr wrap="square" lIns="0" tIns="0" rIns="0" bIns="0" rtlCol="0" anchor="ctr"/>
+          <a:lstStyle/>
+          <a:p>
+            <a:pPr algn="r" indent="0" marL="0">
+              <a:buNone/>
+            </a:pPr>
+            <a:r>
+              <a:rPr lang="en-US" sz="1400" b="1" dirty="0">
+                <a:solidFill>
+                  <a:srgbClr val="1C3F6E"/>
+                </a:solidFill>
+                <a:latin typeface="Calibri" pitchFamily="34" charset="0"/>
+                <a:ea typeface="Calibri" pitchFamily="34" charset="-122"/>
+                <a:cs typeface="Calibri" pitchFamily="34" charset="-120"/>
+              </a:rPr>
+              <a:t>FORMATIVE EVALUATION</a:t>
+            </a:r>
+            <a:endParaRPr lang="en-US" sz="1400" dirty="0"/>
+          </a:p>
+        </p:txBody>
+      </p:sp>
+      <p:pic>
+        <p:nvPicPr>
+          <p:cNvPr id="3" name="Image 0" descr="/home/claude/f4/img/minesec_sheet.png">    </p:cNvPr>
+          <p:cNvPicPr>
+            <a:picLocks noChangeAspect="1"/>
+          </p:cNvPicPr>
+          <p:nvPr/>
+        </p:nvPicPr>
+        <p:blipFill>
+          <a:blip r:embed="rId1"/>
+          <a:stretch>
+            <a:fillRect/>
+          </a:stretch>
+        </p:blipFill>
+        <p:spPr>
+          <a:xfrm>
+            <a:off x="0" y="658368"/>
+            <a:ext cx="5120640" cy="5833872"/>
+          </a:xfrm>
+          <a:prstGeom prst="rect">
+            <a:avLst/>
+          </a:prstGeom>
+        </p:spPr>
+      </p:pic>
+      <p:sp>
+        <p:nvSpPr>
+          <p:cNvPr id="4" name="Text 1"/>
+          <p:cNvSpPr/>
+          <p:nvPr/>
+        </p:nvSpPr>
+        <p:spPr>
+          <a:xfrm>
+            <a:off x="5349240" y="1005840"/>
+            <a:ext cx="6522415" cy="731520"/>
+          </a:xfrm>
+          <a:prstGeom prst="rect">
+            <a:avLst/>
+          </a:prstGeom>
+          <a:noFill/>
+          <a:ln/>
+        </p:spPr>
+        <p:txBody>
+          <a:bodyPr wrap="square" lIns="0" tIns="0" rIns="0" bIns="0" rtlCol="0" anchor="ctr">
+            <a:normAutofit/>
+          </a:bodyPr>
+          <a:lstStyle/>
+          <a:p>
+            <a:pPr algn="ctr" indent="0" marL="0">
+              <a:buNone/>
+            </a:pPr>
+            <a:r>
+              <a:rPr lang="en-US" sz="3600" b="1" dirty="0">
+                <a:solidFill>
+                  <a:srgbClr val="990011"/>
+                </a:solidFill>
+                <a:latin typeface="Times New Roman" pitchFamily="34" charset="0"/>
+                <a:ea typeface="Times New Roman" pitchFamily="34" charset="-122"/>
+                <a:cs typeface="Times New Roman" pitchFamily="34" charset="-120"/>
+              </a:rPr>
+              <a:t>Expected Answer</a:t>
+            </a:r>
+            <a:endParaRPr lang="en-US" sz="3600" dirty="0"/>
+          </a:p>
+        </p:txBody>
+      </p:sp>
+      <p:sp>
+        <p:nvSpPr>
+          <p:cNvPr id="5" name="Text 2"/>
+          <p:cNvSpPr/>
+          <p:nvPr/>
+        </p:nvSpPr>
+        <p:spPr>
+          <a:xfrm>
+            <a:off x="5349240" y="1783080"/>
+            <a:ext cx="6522415" cy="4663440"/>
+          </a:xfrm>
+          <a:prstGeom prst="rect">
+            <a:avLst/>
+          </a:prstGeom>
+          <a:noFill/>
+          <a:ln/>
+        </p:spPr>
+        <p:txBody>
+          <a:bodyPr wrap="square" lIns="0" tIns="0" rIns="0" bIns="0" rtlCol="0" anchor="t"/>
+          <a:lstStyle/>
+          <a:p>
+            <a:pPr algn="l" indent="0" marL="0">
+              <a:spcAft>
+                <a:spcPts val="800"/>
+              </a:spcAft>
+              <a:buNone/>
+            </a:pPr>
+            <a:r>
+              <a:rPr lang="en-US" sz="4000" dirty="0">
+                <a:solidFill>
+                  <a:srgbClr val="111111"/>
+                </a:solidFill>
+                <a:latin typeface="Times New Roman" pitchFamily="34" charset="0"/>
+                <a:ea typeface="Times New Roman" pitchFamily="34" charset="-122"/>
+                <a:cs typeface="Times New Roman" pitchFamily="34" charset="-120"/>
+              </a:rPr>
+              <a:t>Slums, floods and unemployment.</a:t>
+            </a:r>
+            <a:endParaRPr lang="en-US" sz="4000" dirty="0"/>
+          </a:p>
+        </p:txBody>
+      </p:sp>
+      <p:sp>
+        <p:nvSpPr>
+          <p:cNvPr id="25" name="Slide Number Placeholder 0"/>
+          <p:cNvSpPr>
+            <a:spLocks noGrp="1"/>
+          </p:cNvSpPr>
+          <p:nvPr>
+            <p:ph type="sldNum" sz="quarter" idx="4294967295"/>
+          </p:nvPr>
+        </p:nvSpPr>
+        <p:spPr>
+          <a:xfrm>
+            <a:off x="27432" y="91440"/>
+            <a:ext cx="585216" cy="475488"/>
+          </a:xfrm>
+          <a:prstGeom prst="rect">
+            <a:avLst/>
+          </a:prstGeom>
+          <a:extLst>
+            <a:ext uri="{C572A759-6A51-4108-AA02-DFA0A04FC94B}">
+              <ma14:wrappingTextBoxFlag xmlns:ma14="http://schemas.microsoft.com/office/mac/drawingml/2011/main" val="0"/>
+            </a:ext>
+          </a:extLst>
+        </p:spPr>
+        <p:txBody>
+          <a:bodyPr/>
+          <a:lstStyle>
+            <a:lvl1pPr>
+              <a:defRPr sz="2000">
+                <a:solidFill>
+                  <a:srgbClr val="FFFFFF"/>
+                </a:solidFill>
+                <a:latin typeface="Calibri"/>
+                <a:ea typeface="Calibri"/>
+                <a:cs typeface="Calibri"/>
+              </a:defRPr>
+            </a:lvl1pPr>
+          </a:lstStyle>
+          <a:p>
+            <a:pPr algn="ctr"/>
+            <a:fld id="{F7021451-1387-4CA6-816F-3879F97B5CBC}" type="slidenum">
+              <a:rPr b="1" lang="en-US"/>
+              <a:t>51</a:t>
+            </a:fld>
+            <a:endParaRPr lang="en-US"/>
+          </a:p>
+        </p:txBody>
+      </p:sp>
+    </p:spTree>
+  </p:cSld>
+  <p:clrMapOvr>
+    <a:masterClrMapping/>
+  </p:clrMapOvr>
+</p:sld>
+</file>
+
+<file path=ppt/slides/slide52.xml><?xml version="1.0" encoding="utf-8"?>
+<p:sld xmlns:a="http://schemas.openxmlformats.org/drawingml/2006/main" xmlns:r="http://schemas.openxmlformats.org/officeDocument/2006/relationships" xmlns:p="http://schemas.openxmlformats.org/presentationml/2006/main">
+  <p:cSld name="Slide 52">
+    <p:spTree>
+      <p:nvGrpSpPr>
+        <p:cNvPr id="1" name=""/>
+        <p:cNvGrpSpPr/>
+        <p:nvPr/>
+      </p:nvGrpSpPr>
+      <p:grpSpPr>
+        <a:xfrm>
+          <a:off x="0" y="0"/>
+          <a:ext cx="0" cy="0"/>
+          <a:chOff x="0" y="0"/>
+          <a:chExt cx="0" cy="0"/>
+        </a:xfrm>
+      </p:grpSpPr>
+      <p:sp>
+        <p:nvSpPr>
+          <p:cNvPr id="2" name="Text 0"/>
+          <p:cNvSpPr/>
+          <p:nvPr/>
+        </p:nvSpPr>
+        <p:spPr>
+          <a:xfrm>
+            <a:off x="457200" y="713232"/>
+            <a:ext cx="11368735" cy="274320"/>
+          </a:xfrm>
+          <a:prstGeom prst="rect">
+            <a:avLst/>
+          </a:prstGeom>
+          <a:noFill/>
+          <a:ln/>
+        </p:spPr>
+        <p:txBody>
+          <a:bodyPr wrap="square" lIns="0" tIns="0" rIns="0" bIns="0" rtlCol="0" anchor="ctr"/>
+          <a:lstStyle/>
+          <a:p>
+            <a:pPr algn="r" indent="0" marL="0">
+              <a:buNone/>
+            </a:pPr>
+            <a:r>
+              <a:rPr lang="en-US" sz="1400" b="1" dirty="0">
+                <a:solidFill>
+                  <a:srgbClr val="1C3F6E"/>
+                </a:solidFill>
+                <a:latin typeface="Calibri" pitchFamily="34" charset="0"/>
+                <a:ea typeface="Calibri" pitchFamily="34" charset="-122"/>
+                <a:cs typeface="Calibri" pitchFamily="34" charset="-120"/>
+              </a:rPr>
+              <a:t>FORMATIVE EVALUATION</a:t>
+            </a:r>
+            <a:endParaRPr lang="en-US" sz="1400" dirty="0"/>
+          </a:p>
+        </p:txBody>
+      </p:sp>
+      <p:pic>
+        <p:nvPicPr>
+          <p:cNvPr id="3" name="Image 0" descr="/home/claude/f4/img/minesec_sheet.png">    </p:cNvPr>
+          <p:cNvPicPr>
+            <a:picLocks noChangeAspect="1"/>
+          </p:cNvPicPr>
+          <p:nvPr/>
+        </p:nvPicPr>
+        <p:blipFill>
+          <a:blip r:embed="rId1"/>
+          <a:stretch>
+            <a:fillRect/>
+          </a:stretch>
+        </p:blipFill>
+        <p:spPr>
+          <a:xfrm>
+            <a:off x="0" y="658368"/>
+            <a:ext cx="5120640" cy="5833872"/>
+          </a:xfrm>
+          <a:prstGeom prst="rect">
+            <a:avLst/>
+          </a:prstGeom>
+        </p:spPr>
+      </p:pic>
+      <p:sp>
+        <p:nvSpPr>
+          <p:cNvPr id="4" name="Text 1"/>
+          <p:cNvSpPr/>
+          <p:nvPr/>
+        </p:nvSpPr>
+        <p:spPr>
+          <a:xfrm>
+            <a:off x="5349240" y="1005840"/>
+            <a:ext cx="6522415" cy="731520"/>
+          </a:xfrm>
+          <a:prstGeom prst="rect">
+            <a:avLst/>
+          </a:prstGeom>
+          <a:noFill/>
+          <a:ln/>
+        </p:spPr>
+        <p:txBody>
+          <a:bodyPr wrap="square" lIns="0" tIns="0" rIns="0" bIns="0" rtlCol="0" anchor="ctr">
+            <a:normAutofit/>
+          </a:bodyPr>
+          <a:lstStyle/>
+          <a:p>
+            <a:pPr algn="ctr" indent="0" marL="0">
+              <a:buNone/>
+            </a:pPr>
+            <a:r>
+              <a:rPr lang="en-US" sz="3600" b="1" dirty="0">
+                <a:solidFill>
+                  <a:srgbClr val="990011"/>
+                </a:solidFill>
+                <a:latin typeface="Times New Roman" pitchFamily="34" charset="0"/>
+                <a:ea typeface="Times New Roman" pitchFamily="34" charset="-122"/>
+                <a:cs typeface="Times New Roman" pitchFamily="34" charset="-120"/>
+              </a:rPr>
+              <a:t>Evaluation 2</a:t>
+            </a:r>
+            <a:endParaRPr lang="en-US" sz="3600" dirty="0"/>
+          </a:p>
+        </p:txBody>
+      </p:sp>
+      <p:sp>
+        <p:nvSpPr>
+          <p:cNvPr id="5" name="Text 2"/>
+          <p:cNvSpPr/>
+          <p:nvPr/>
+        </p:nvSpPr>
+        <p:spPr>
+          <a:xfrm>
+            <a:off x="5349240" y="1783080"/>
+            <a:ext cx="6522415" cy="4663440"/>
+          </a:xfrm>
+          <a:prstGeom prst="rect">
+            <a:avLst/>
+          </a:prstGeom>
+          <a:noFill/>
+          <a:ln/>
+        </p:spPr>
+        <p:txBody>
+          <a:bodyPr wrap="square" lIns="0" tIns="0" rIns="0" bIns="0" rtlCol="0" anchor="t"/>
+          <a:lstStyle/>
+          <a:p>
+            <a:pPr algn="l" indent="0" marL="0">
+              <a:spcAft>
+                <a:spcPts val="800"/>
+              </a:spcAft>
+              <a:buNone/>
+            </a:pPr>
+            <a:r>
+              <a:rPr lang="en-US" sz="4000" dirty="0">
+                <a:solidFill>
+                  <a:srgbClr val="111111"/>
+                </a:solidFill>
+                <a:latin typeface="Times New Roman" pitchFamily="34" charset="0"/>
+                <a:ea typeface="Times New Roman" pitchFamily="34" charset="-122"/>
+                <a:cs typeface="Times New Roman" pitchFamily="34" charset="-120"/>
+              </a:rPr>
+              <a:t>Give two solutions.</a:t>
+            </a:r>
+            <a:endParaRPr lang="en-US" sz="4000" dirty="0"/>
+          </a:p>
+        </p:txBody>
+      </p:sp>
+      <p:sp>
+        <p:nvSpPr>
+          <p:cNvPr id="25" name="Slide Number Placeholder 0"/>
+          <p:cNvSpPr>
+            <a:spLocks noGrp="1"/>
+          </p:cNvSpPr>
+          <p:nvPr>
+            <p:ph type="sldNum" sz="quarter" idx="4294967295"/>
+          </p:nvPr>
+        </p:nvSpPr>
+        <p:spPr>
+          <a:xfrm>
+            <a:off x="27432" y="91440"/>
+            <a:ext cx="585216" cy="475488"/>
+          </a:xfrm>
+          <a:prstGeom prst="rect">
+            <a:avLst/>
+          </a:prstGeom>
+          <a:extLst>
+            <a:ext uri="{C572A759-6A51-4108-AA02-DFA0A04FC94B}">
+              <ma14:wrappingTextBoxFlag xmlns:ma14="http://schemas.microsoft.com/office/mac/drawingml/2011/main" val="0"/>
+            </a:ext>
+          </a:extLst>
+        </p:spPr>
+        <p:txBody>
+          <a:bodyPr/>
+          <a:lstStyle>
+            <a:lvl1pPr>
+              <a:defRPr sz="2000">
+                <a:solidFill>
+                  <a:srgbClr val="FFFFFF"/>
+                </a:solidFill>
+                <a:latin typeface="Calibri"/>
+                <a:ea typeface="Calibri"/>
+                <a:cs typeface="Calibri"/>
+              </a:defRPr>
+            </a:lvl1pPr>
+          </a:lstStyle>
+          <a:p>
+            <a:pPr algn="ctr"/>
+            <a:fld id="{F7021451-1387-4CA6-816F-3879F97B5CBC}" type="slidenum">
+              <a:rPr b="1" lang="en-US"/>
+              <a:t>52</a:t>
+            </a:fld>
+            <a:endParaRPr lang="en-US"/>
+          </a:p>
+        </p:txBody>
+      </p:sp>
+    </p:spTree>
+  </p:cSld>
+  <p:clrMapOvr>
+    <a:masterClrMapping/>
+  </p:clrMapOvr>
+</p:sld>
+</file>
+
+<file path=ppt/slides/slide53.xml><?xml version="1.0" encoding="utf-8"?>
+<p:sld xmlns:a="http://schemas.openxmlformats.org/drawingml/2006/main" xmlns:r="http://schemas.openxmlformats.org/officeDocument/2006/relationships" xmlns:p="http://schemas.openxmlformats.org/presentationml/2006/main">
+  <p:cSld name="Slide 53">
+    <p:spTree>
+      <p:nvGrpSpPr>
+        <p:cNvPr id="1" name=""/>
+        <p:cNvGrpSpPr/>
+        <p:nvPr/>
+      </p:nvGrpSpPr>
+      <p:grpSpPr>
+        <a:xfrm>
+          <a:off x="0" y="0"/>
+          <a:ext cx="0" cy="0"/>
+          <a:chOff x="0" y="0"/>
+          <a:chExt cx="0" cy="0"/>
+        </a:xfrm>
+      </p:grpSpPr>
+      <p:sp>
+        <p:nvSpPr>
+          <p:cNvPr id="2" name="Text 0"/>
+          <p:cNvSpPr/>
+          <p:nvPr/>
+        </p:nvSpPr>
+        <p:spPr>
+          <a:xfrm>
+            <a:off x="457200" y="713232"/>
+            <a:ext cx="11368735" cy="274320"/>
+          </a:xfrm>
+          <a:prstGeom prst="rect">
+            <a:avLst/>
+          </a:prstGeom>
+          <a:noFill/>
+          <a:ln/>
+        </p:spPr>
+        <p:txBody>
+          <a:bodyPr wrap="square" lIns="0" tIns="0" rIns="0" bIns="0" rtlCol="0" anchor="ctr"/>
+          <a:lstStyle/>
+          <a:p>
+            <a:pPr algn="r" indent="0" marL="0">
+              <a:buNone/>
+            </a:pPr>
+            <a:r>
+              <a:rPr lang="en-US" sz="1400" b="1" dirty="0">
+                <a:solidFill>
+                  <a:srgbClr val="1C3F6E"/>
+                </a:solidFill>
+                <a:latin typeface="Calibri" pitchFamily="34" charset="0"/>
+                <a:ea typeface="Calibri" pitchFamily="34" charset="-122"/>
+                <a:cs typeface="Calibri" pitchFamily="34" charset="-120"/>
+              </a:rPr>
+              <a:t>FORMATIVE EVALUATION</a:t>
+            </a:r>
+            <a:endParaRPr lang="en-US" sz="1400" dirty="0"/>
+          </a:p>
+        </p:txBody>
+      </p:sp>
+      <p:pic>
+        <p:nvPicPr>
+          <p:cNvPr id="3" name="Image 0" descr="/home/claude/f4/img/minesec_sheet.png">    </p:cNvPr>
+          <p:cNvPicPr>
+            <a:picLocks noChangeAspect="1"/>
+          </p:cNvPicPr>
+          <p:nvPr/>
+        </p:nvPicPr>
+        <p:blipFill>
+          <a:blip r:embed="rId1"/>
+          <a:stretch>
+            <a:fillRect/>
+          </a:stretch>
+        </p:blipFill>
+        <p:spPr>
+          <a:xfrm>
+            <a:off x="0" y="658368"/>
+            <a:ext cx="5120640" cy="5833872"/>
+          </a:xfrm>
+          <a:prstGeom prst="rect">
+            <a:avLst/>
+          </a:prstGeom>
+        </p:spPr>
+      </p:pic>
+      <p:sp>
+        <p:nvSpPr>
+          <p:cNvPr id="4" name="Text 1"/>
+          <p:cNvSpPr/>
+          <p:nvPr/>
+        </p:nvSpPr>
+        <p:spPr>
+          <a:xfrm>
+            <a:off x="5349240" y="1005840"/>
+            <a:ext cx="6522415" cy="731520"/>
+          </a:xfrm>
+          <a:prstGeom prst="rect">
+            <a:avLst/>
+          </a:prstGeom>
+          <a:noFill/>
+          <a:ln/>
+        </p:spPr>
+        <p:txBody>
+          <a:bodyPr wrap="square" lIns="0" tIns="0" rIns="0" bIns="0" rtlCol="0" anchor="ctr">
+            <a:normAutofit/>
+          </a:bodyPr>
+          <a:lstStyle/>
+          <a:p>
+            <a:pPr algn="ctr" indent="0" marL="0">
+              <a:buNone/>
+            </a:pPr>
+            <a:r>
+              <a:rPr lang="en-US" sz="3600" b="1" dirty="0">
+                <a:solidFill>
+                  <a:srgbClr val="990011"/>
+                </a:solidFill>
+                <a:latin typeface="Times New Roman" pitchFamily="34" charset="0"/>
+                <a:ea typeface="Times New Roman" pitchFamily="34" charset="-122"/>
+                <a:cs typeface="Times New Roman" pitchFamily="34" charset="-120"/>
+              </a:rPr>
+              <a:t>Expected Answer</a:t>
+            </a:r>
+            <a:endParaRPr lang="en-US" sz="3600" dirty="0"/>
+          </a:p>
+        </p:txBody>
+      </p:sp>
+      <p:sp>
+        <p:nvSpPr>
+          <p:cNvPr id="5" name="Text 2"/>
+          <p:cNvSpPr/>
+          <p:nvPr/>
+        </p:nvSpPr>
+        <p:spPr>
+          <a:xfrm>
+            <a:off x="5349240" y="1783080"/>
+            <a:ext cx="6522415" cy="4663440"/>
+          </a:xfrm>
+          <a:prstGeom prst="rect">
+            <a:avLst/>
+          </a:prstGeom>
+          <a:noFill/>
+          <a:ln/>
+        </p:spPr>
+        <p:txBody>
+          <a:bodyPr wrap="square" lIns="0" tIns="0" rIns="0" bIns="0" rtlCol="0" anchor="t"/>
+          <a:lstStyle/>
+          <a:p>
+            <a:pPr algn="l" indent="0" marL="0">
+              <a:spcAft>
+                <a:spcPts val="800"/>
+              </a:spcAft>
+              <a:buNone/>
+            </a:pPr>
+            <a:r>
+              <a:rPr lang="en-US" sz="4000" dirty="0">
+                <a:solidFill>
+                  <a:srgbClr val="111111"/>
+                </a:solidFill>
+                <a:latin typeface="Times New Roman" pitchFamily="34" charset="0"/>
+                <a:ea typeface="Times New Roman" pitchFamily="34" charset="-122"/>
+                <a:cs typeface="Times New Roman" pitchFamily="34" charset="-120"/>
+              </a:rPr>
+              <a:t>Town planning with building permits and waste collection.</a:t>
+            </a:r>
+            <a:endParaRPr lang="en-US" sz="4000" dirty="0"/>
+          </a:p>
+        </p:txBody>
+      </p:sp>
+      <p:sp>
+        <p:nvSpPr>
+          <p:cNvPr id="25" name="Slide Number Placeholder 0"/>
+          <p:cNvSpPr>
+            <a:spLocks noGrp="1"/>
+          </p:cNvSpPr>
+          <p:nvPr>
+            <p:ph type="sldNum" sz="quarter" idx="4294967295"/>
+          </p:nvPr>
+        </p:nvSpPr>
+        <p:spPr>
+          <a:xfrm>
+            <a:off x="27432" y="91440"/>
+            <a:ext cx="585216" cy="475488"/>
+          </a:xfrm>
+          <a:prstGeom prst="rect">
+            <a:avLst/>
+          </a:prstGeom>
+          <a:extLst>
+            <a:ext uri="{C572A759-6A51-4108-AA02-DFA0A04FC94B}">
+              <ma14:wrappingTextBoxFlag xmlns:ma14="http://schemas.microsoft.com/office/mac/drawingml/2011/main" val="0"/>
+            </a:ext>
+          </a:extLst>
+        </p:spPr>
+        <p:txBody>
+          <a:bodyPr/>
+          <a:lstStyle>
+            <a:lvl1pPr>
+              <a:defRPr sz="2000">
+                <a:solidFill>
+                  <a:srgbClr val="FFFFFF"/>
+                </a:solidFill>
+                <a:latin typeface="Calibri"/>
+                <a:ea typeface="Calibri"/>
+                <a:cs typeface="Calibri"/>
+              </a:defRPr>
+            </a:lvl1pPr>
+          </a:lstStyle>
+          <a:p>
+            <a:pPr algn="ctr"/>
+            <a:fld id="{F7021451-1387-4CA6-816F-3879F97B5CBC}" type="slidenum">
+              <a:rPr b="1" lang="en-US"/>
+              <a:t>53</a:t>
+            </a:fld>
+            <a:endParaRPr lang="en-US"/>
+          </a:p>
+        </p:txBody>
+      </p:sp>
+    </p:spTree>
+  </p:cSld>
+  <p:clrMapOvr>
+    <a:masterClrMapping/>
+  </p:clrMapOvr>
+</p:sld>
+</file>
+
+<file path=ppt/slides/slide54.xml><?xml version="1.0" encoding="utf-8"?>
+<p:sld xmlns:a="http://schemas.openxmlformats.org/drawingml/2006/main" xmlns:r="http://schemas.openxmlformats.org/officeDocument/2006/relationships" xmlns:p="http://schemas.openxmlformats.org/presentationml/2006/main">
+  <p:cSld name="Slide 54">
+    <p:spTree>
+      <p:nvGrpSpPr>
+        <p:cNvPr id="1" name=""/>
+        <p:cNvGrpSpPr/>
+        <p:nvPr/>
+      </p:nvGrpSpPr>
+      <p:grpSpPr>
+        <a:xfrm>
+          <a:off x="0" y="0"/>
+          <a:ext cx="0" cy="0"/>
+          <a:chOff x="0" y="0"/>
+          <a:chExt cx="0" cy="0"/>
+        </a:xfrm>
+      </p:grpSpPr>
+      <p:sp>
+        <p:nvSpPr>
+          <p:cNvPr id="2" name="Text 0"/>
+          <p:cNvSpPr/>
+          <p:nvPr/>
+        </p:nvSpPr>
+        <p:spPr>
+          <a:xfrm>
+            <a:off x="457200" y="713232"/>
+            <a:ext cx="11368735" cy="274320"/>
+          </a:xfrm>
+          <a:prstGeom prst="rect">
+            <a:avLst/>
+          </a:prstGeom>
+          <a:noFill/>
+          <a:ln/>
+        </p:spPr>
+        <p:txBody>
+          <a:bodyPr wrap="square" lIns="0" tIns="0" rIns="0" bIns="0" rtlCol="0" anchor="ctr"/>
+          <a:lstStyle/>
+          <a:p>
+            <a:pPr algn="r" indent="0" marL="0">
+              <a:buNone/>
+            </a:pPr>
+            <a:r>
+              <a:rPr lang="en-US" sz="1400" b="1" dirty="0">
+                <a:solidFill>
+                  <a:srgbClr val="1C3F6E"/>
+                </a:solidFill>
+                <a:latin typeface="Calibri" pitchFamily="34" charset="0"/>
+                <a:ea typeface="Calibri" pitchFamily="34" charset="-122"/>
+                <a:cs typeface="Calibri" pitchFamily="34" charset="-120"/>
+              </a:rPr>
+              <a:t>REMEDIATION</a:t>
+            </a:r>
+            <a:endParaRPr lang="en-US" sz="1400" dirty="0"/>
+          </a:p>
+        </p:txBody>
+      </p:sp>
+      <p:pic>
+        <p:nvPicPr>
+          <p:cNvPr id="3" name="Image 0" descr="/home/claude/f4/img/minesec_sheet.png">    </p:cNvPr>
+          <p:cNvPicPr>
+            <a:picLocks noChangeAspect="1"/>
+          </p:cNvPicPr>
+          <p:nvPr/>
+        </p:nvPicPr>
+        <p:blipFill>
+          <a:blip r:embed="rId1"/>
+          <a:stretch>
+            <a:fillRect/>
+          </a:stretch>
+        </p:blipFill>
+        <p:spPr>
+          <a:xfrm>
+            <a:off x="0" y="658368"/>
+            <a:ext cx="2468880" cy="5833872"/>
+          </a:xfrm>
+          <a:prstGeom prst="rect">
+            <a:avLst/>
+          </a:prstGeom>
+        </p:spPr>
+      </p:pic>
+      <p:sp>
+        <p:nvSpPr>
+          <p:cNvPr id="4" name="Text 1"/>
+          <p:cNvSpPr/>
+          <p:nvPr/>
+        </p:nvSpPr>
+        <p:spPr>
+          <a:xfrm>
+            <a:off x="2697480" y="1005840"/>
+            <a:ext cx="9174175" cy="731520"/>
+          </a:xfrm>
+          <a:prstGeom prst="rect">
+            <a:avLst/>
+          </a:prstGeom>
+          <a:noFill/>
+          <a:ln/>
+        </p:spPr>
+        <p:txBody>
+          <a:bodyPr wrap="square" lIns="0" tIns="0" rIns="0" bIns="0" rtlCol="0" anchor="ctr">
+            <a:normAutofit/>
+          </a:bodyPr>
+          <a:lstStyle/>
+          <a:p>
+            <a:pPr algn="ctr" indent="0" marL="0">
+              <a:buNone/>
+            </a:pPr>
+            <a:r>
+              <a:rPr lang="en-US" sz="3600" b="1" dirty="0">
+                <a:solidFill>
+                  <a:srgbClr val="990011"/>
+                </a:solidFill>
+                <a:latin typeface="Times New Roman" pitchFamily="34" charset="0"/>
+                <a:ea typeface="Times New Roman" pitchFamily="34" charset="-122"/>
+                <a:cs typeface="Times New Roman" pitchFamily="34" charset="-120"/>
+              </a:rPr>
+              <a:t>Remediation</a:t>
+            </a:r>
+            <a:endParaRPr lang="en-US" sz="3600" dirty="0"/>
+          </a:p>
+        </p:txBody>
+      </p:sp>
+      <p:sp>
+        <p:nvSpPr>
+          <p:cNvPr id="5" name="Text 2"/>
+          <p:cNvSpPr/>
+          <p:nvPr/>
+        </p:nvSpPr>
+        <p:spPr>
+          <a:xfrm>
+            <a:off x="2697480" y="1783080"/>
+            <a:ext cx="9174175" cy="4663440"/>
+          </a:xfrm>
+          <a:prstGeom prst="rect">
+            <a:avLst/>
+          </a:prstGeom>
+          <a:noFill/>
+          <a:ln/>
+        </p:spPr>
+        <p:txBody>
+          <a:bodyPr wrap="square" lIns="0" tIns="0" rIns="0" bIns="0" rtlCol="0" anchor="t"/>
+          <a:lstStyle/>
+          <a:p>
+            <a:pPr algn="l" indent="0" marL="0">
+              <a:spcAft>
+                <a:spcPts val="800"/>
+              </a:spcAft>
+              <a:buNone/>
+            </a:pPr>
+            <a:r>
+              <a:rPr lang="en-US" sz="4000" b="1" dirty="0">
+                <a:solidFill>
+                  <a:srgbClr val="111111"/>
+                </a:solidFill>
+                <a:latin typeface="Times New Roman" pitchFamily="34" charset="0"/>
+                <a:ea typeface="Times New Roman" pitchFamily="34" charset="-122"/>
+                <a:cs typeface="Times New Roman" pitchFamily="34" charset="-120"/>
+              </a:rPr>
+              <a:t>Fill in the blanks:</a:t>
+            </a:r>
+            <a:endParaRPr lang="en-US" sz="4000" dirty="0"/>
+          </a:p>
+          <a:p>
+            <a:pPr algn="l" marL="342900" indent="-342900">
+              <a:spcAft>
+                <a:spcPts val="800"/>
+              </a:spcAft>
+              <a:buSzPct val="100000"/>
+              <a:buFont typeface="+mj-lt"/>
+              <a:buAutoNum type="arabicPeriod" startAt="1"/>
+            </a:pPr>
+            <a:r>
+              <a:rPr lang="en-US" sz="4000" dirty="0">
+                <a:solidFill>
+                  <a:srgbClr val="111111"/>
+                </a:solidFill>
+                <a:latin typeface="Times New Roman" pitchFamily="34" charset="0"/>
+                <a:ea typeface="Times New Roman" pitchFamily="34" charset="-122"/>
+                <a:cs typeface="Times New Roman" pitchFamily="34" charset="-120"/>
+              </a:rPr>
+              <a:t>A crowded poor quarter is a ______.</a:t>
+            </a:r>
+            <a:endParaRPr lang="en-US" sz="4000" dirty="0"/>
+          </a:p>
+          <a:p>
+            <a:pPr algn="l" marL="342900" indent="-342900">
+              <a:spcAft>
+                <a:spcPts val="800"/>
+              </a:spcAft>
+              <a:buSzPct val="100000"/>
+              <a:buFont typeface="+mj-lt"/>
+              <a:buAutoNum type="arabicPeriod" startAt="1"/>
+            </a:pPr>
+            <a:r>
+              <a:rPr lang="en-US" sz="4000" dirty="0">
+                <a:solidFill>
+                  <a:srgbClr val="111111"/>
+                </a:solidFill>
+                <a:latin typeface="Times New Roman" pitchFamily="34" charset="0"/>
+                <a:ea typeface="Times New Roman" pitchFamily="34" charset="-122"/>
+                <a:cs typeface="Times New Roman" pitchFamily="34" charset="-120"/>
+              </a:rPr>
+              <a:t>Permission to build a house is a building ______.</a:t>
+            </a:r>
+            <a:endParaRPr lang="en-US" sz="4000" dirty="0"/>
+          </a:p>
+          <a:p>
+            <a:pPr algn="l" marL="342900" indent="-342900">
+              <a:spcAft>
+                <a:spcPts val="800"/>
+              </a:spcAft>
+              <a:buSzPct val="100000"/>
+              <a:buFont typeface="+mj-lt"/>
+              <a:buAutoNum type="arabicPeriod" startAt="1"/>
+            </a:pPr>
+            <a:r>
+              <a:rPr lang="en-US" sz="4000" dirty="0">
+                <a:solidFill>
+                  <a:srgbClr val="111111"/>
+                </a:solidFill>
+                <a:latin typeface="Times New Roman" pitchFamily="34" charset="0"/>
+                <a:ea typeface="Times New Roman" pitchFamily="34" charset="-122"/>
+                <a:cs typeface="Times New Roman" pitchFamily="34" charset="-120"/>
+              </a:rPr>
+              <a:t>Rubbish in gutters causes ______.</a:t>
+            </a:r>
+            <a:endParaRPr lang="en-US" sz="4000" dirty="0"/>
+          </a:p>
+        </p:txBody>
+      </p:sp>
+      <p:sp>
+        <p:nvSpPr>
+          <p:cNvPr id="25" name="Slide Number Placeholder 0"/>
+          <p:cNvSpPr>
+            <a:spLocks noGrp="1"/>
+          </p:cNvSpPr>
+          <p:nvPr>
+            <p:ph type="sldNum" sz="quarter" idx="4294967295"/>
+          </p:nvPr>
+        </p:nvSpPr>
+        <p:spPr>
+          <a:xfrm>
+            <a:off x="27432" y="91440"/>
+            <a:ext cx="585216" cy="475488"/>
+          </a:xfrm>
+          <a:prstGeom prst="rect">
+            <a:avLst/>
+          </a:prstGeom>
+          <a:extLst>
+            <a:ext uri="{C572A759-6A51-4108-AA02-DFA0A04FC94B}">
+              <ma14:wrappingTextBoxFlag xmlns:ma14="http://schemas.microsoft.com/office/mac/drawingml/2011/main" val="0"/>
+            </a:ext>
+          </a:extLst>
+        </p:spPr>
+        <p:txBody>
+          <a:bodyPr/>
+          <a:lstStyle>
+            <a:lvl1pPr>
+              <a:defRPr sz="2000">
+                <a:solidFill>
+                  <a:srgbClr val="FFFFFF"/>
+                </a:solidFill>
+                <a:latin typeface="Calibri"/>
+                <a:ea typeface="Calibri"/>
+                <a:cs typeface="Calibri"/>
+              </a:defRPr>
+            </a:lvl1pPr>
+          </a:lstStyle>
+          <a:p>
+            <a:pPr algn="ctr"/>
+            <a:fld id="{F7021451-1387-4CA6-816F-3879F97B5CBC}" type="slidenum">
+              <a:rPr b="1" lang="en-US"/>
+              <a:t>54</a:t>
+            </a:fld>
+            <a:endParaRPr lang="en-US"/>
+          </a:p>
+        </p:txBody>
+      </p:sp>
+    </p:spTree>
+  </p:cSld>
+  <p:clrMapOvr>
+    <a:masterClrMapping/>
+  </p:clrMapOvr>
+</p:sld>
+</file>
+
+<file path=ppt/slides/slide55.xml><?xml version="1.0" encoding="utf-8"?>
+<p:sld xmlns:a="http://schemas.openxmlformats.org/drawingml/2006/main" xmlns:r="http://schemas.openxmlformats.org/officeDocument/2006/relationships" xmlns:p="http://schemas.openxmlformats.org/presentationml/2006/main">
+  <p:cSld name="Slide 55">
+    <p:spTree>
+      <p:nvGrpSpPr>
+        <p:cNvPr id="1" name=""/>
+        <p:cNvGrpSpPr/>
+        <p:nvPr/>
+      </p:nvGrpSpPr>
+      <p:grpSpPr>
+        <a:xfrm>
+          <a:off x="0" y="0"/>
+          <a:ext cx="0" cy="0"/>
+          <a:chOff x="0" y="0"/>
+          <a:chExt cx="0" cy="0"/>
+        </a:xfrm>
+      </p:grpSpPr>
+      <p:sp>
+        <p:nvSpPr>
+          <p:cNvPr id="2" name="Text 0"/>
+          <p:cNvSpPr/>
+          <p:nvPr/>
+        </p:nvSpPr>
+        <p:spPr>
+          <a:xfrm>
+            <a:off x="457200" y="713232"/>
+            <a:ext cx="11368735" cy="274320"/>
+          </a:xfrm>
+          <a:prstGeom prst="rect">
+            <a:avLst/>
+          </a:prstGeom>
+          <a:noFill/>
+          <a:ln/>
+        </p:spPr>
+        <p:txBody>
+          <a:bodyPr wrap="square" lIns="0" tIns="0" rIns="0" bIns="0" rtlCol="0" anchor="ctr"/>
+          <a:lstStyle/>
+          <a:p>
+            <a:pPr algn="r" indent="0" marL="0">
+              <a:buNone/>
+            </a:pPr>
+            <a:r>
+              <a:rPr lang="en-US" sz="1400" b="1" dirty="0">
+                <a:solidFill>
+                  <a:srgbClr val="1C3F6E"/>
+                </a:solidFill>
+                <a:latin typeface="Calibri" pitchFamily="34" charset="0"/>
+                <a:ea typeface="Calibri" pitchFamily="34" charset="-122"/>
+                <a:cs typeface="Calibri" pitchFamily="34" charset="-120"/>
+              </a:rPr>
+              <a:t>HOMEWORK</a:t>
+            </a:r>
+            <a:endParaRPr lang="en-US" sz="1400" dirty="0"/>
+          </a:p>
+        </p:txBody>
+      </p:sp>
+      <p:pic>
+        <p:nvPicPr>
+          <p:cNvPr id="3" name="Image 0" descr="/home/claude/f4/img/minesec_sheet.png">    </p:cNvPr>
+          <p:cNvPicPr>
+            <a:picLocks noChangeAspect="1"/>
+          </p:cNvPicPr>
+          <p:nvPr/>
+        </p:nvPicPr>
+        <p:blipFill>
+          <a:blip r:embed="rId1"/>
+          <a:stretch>
+            <a:fillRect/>
+          </a:stretch>
+        </p:blipFill>
+        <p:spPr>
+          <a:xfrm>
+            <a:off x="0" y="658368"/>
+            <a:ext cx="5120640" cy="5833872"/>
+          </a:xfrm>
+          <a:prstGeom prst="rect">
+            <a:avLst/>
+          </a:prstGeom>
+        </p:spPr>
+      </p:pic>
+      <p:sp>
+        <p:nvSpPr>
+          <p:cNvPr id="4" name="Text 1"/>
+          <p:cNvSpPr/>
+          <p:nvPr/>
+        </p:nvSpPr>
+        <p:spPr>
+          <a:xfrm>
+            <a:off x="5349240" y="1005840"/>
+            <a:ext cx="6522415" cy="731520"/>
+          </a:xfrm>
+          <a:prstGeom prst="rect">
+            <a:avLst/>
+          </a:prstGeom>
+          <a:noFill/>
+          <a:ln/>
+        </p:spPr>
+        <p:txBody>
+          <a:bodyPr wrap="square" lIns="0" tIns="0" rIns="0" bIns="0" rtlCol="0" anchor="ctr">
+            <a:normAutofit/>
+          </a:bodyPr>
+          <a:lstStyle/>
+          <a:p>
+            <a:pPr algn="ctr" indent="0" marL="0">
+              <a:buNone/>
+            </a:pPr>
+            <a:r>
+              <a:rPr lang="en-US" sz="3600" b="1" dirty="0">
+                <a:solidFill>
+                  <a:srgbClr val="990011"/>
+                </a:solidFill>
+                <a:latin typeface="Times New Roman" pitchFamily="34" charset="0"/>
+                <a:ea typeface="Times New Roman" pitchFamily="34" charset="-122"/>
+                <a:cs typeface="Times New Roman" pitchFamily="34" charset="-120"/>
+              </a:rPr>
+              <a:t>Homework</a:t>
+            </a:r>
+            <a:endParaRPr lang="en-US" sz="3600" dirty="0"/>
+          </a:p>
+        </p:txBody>
+      </p:sp>
+      <p:sp>
+        <p:nvSpPr>
+          <p:cNvPr id="5" name="Text 2"/>
+          <p:cNvSpPr/>
+          <p:nvPr/>
+        </p:nvSpPr>
+        <p:spPr>
+          <a:xfrm>
+            <a:off x="5349240" y="1783080"/>
+            <a:ext cx="6522415" cy="4663440"/>
+          </a:xfrm>
+          <a:prstGeom prst="rect">
+            <a:avLst/>
+          </a:prstGeom>
+          <a:noFill/>
+          <a:ln/>
+        </p:spPr>
+        <p:txBody>
+          <a:bodyPr wrap="square" lIns="0" tIns="0" rIns="0" bIns="0" rtlCol="0" anchor="t"/>
+          <a:lstStyle/>
+          <a:p>
+            <a:pPr algn="l" indent="0" marL="0">
+              <a:spcAft>
+                <a:spcPts val="800"/>
+              </a:spcAft>
+              <a:buNone/>
+            </a:pPr>
+            <a:r>
+              <a:rPr lang="en-US" sz="4000" dirty="0">
+                <a:solidFill>
+                  <a:srgbClr val="111111"/>
+                </a:solidFill>
+                <a:latin typeface="Times New Roman" pitchFamily="34" charset="0"/>
+                <a:ea typeface="Times New Roman" pitchFamily="34" charset="-122"/>
+                <a:cs typeface="Times New Roman" pitchFamily="34" charset="-120"/>
+              </a:rPr>
+              <a:t>Identify one urban problem in your quarter and propose two solutions.</a:t>
+            </a:r>
+            <a:endParaRPr lang="en-US" sz="4000" dirty="0"/>
+          </a:p>
+        </p:txBody>
+      </p:sp>
+      <p:sp>
+        <p:nvSpPr>
+          <p:cNvPr id="25" name="Slide Number Placeholder 0"/>
+          <p:cNvSpPr>
+            <a:spLocks noGrp="1"/>
+          </p:cNvSpPr>
+          <p:nvPr>
+            <p:ph type="sldNum" sz="quarter" idx="4294967295"/>
+          </p:nvPr>
+        </p:nvSpPr>
+        <p:spPr>
+          <a:xfrm>
+            <a:off x="27432" y="91440"/>
+            <a:ext cx="585216" cy="475488"/>
+          </a:xfrm>
+          <a:prstGeom prst="rect">
+            <a:avLst/>
+          </a:prstGeom>
+          <a:extLst>
+            <a:ext uri="{C572A759-6A51-4108-AA02-DFA0A04FC94B}">
+              <ma14:wrappingTextBoxFlag xmlns:ma14="http://schemas.microsoft.com/office/mac/drawingml/2011/main" val="0"/>
+            </a:ext>
+          </a:extLst>
+        </p:spPr>
+        <p:txBody>
+          <a:bodyPr/>
+          <a:lstStyle>
+            <a:lvl1pPr>
+              <a:defRPr sz="2000">
+                <a:solidFill>
+                  <a:srgbClr val="FFFFFF"/>
+                </a:solidFill>
+                <a:latin typeface="Calibri"/>
+                <a:ea typeface="Calibri"/>
+                <a:cs typeface="Calibri"/>
+              </a:defRPr>
+            </a:lvl1pPr>
+          </a:lstStyle>
+          <a:p>
+            <a:pPr algn="ctr"/>
+            <a:fld id="{F7021451-1387-4CA6-816F-3879F97B5CBC}" type="slidenum">
+              <a:rPr b="1" lang="en-US"/>
+              <a:t>55</a:t>
+            </a:fld>
+            <a:endParaRPr lang="en-US"/>
+          </a:p>
+        </p:txBody>
+      </p:sp>
+    </p:spTree>
+  </p:cSld>
+  <p:clrMapOvr>
+    <a:masterClrMapping/>
+  </p:clrMapOvr>
+</p:sld>
+</file>
+
+<file path=ppt/slides/slide56.xml><?xml version="1.0" encoding="utf-8"?>
+<p:sld xmlns:a="http://schemas.openxmlformats.org/drawingml/2006/main" xmlns:r="http://schemas.openxmlformats.org/officeDocument/2006/relationships" xmlns:p="http://schemas.openxmlformats.org/presentationml/2006/main">
+  <p:cSld name="Slide 56">
+    <p:spTree>
+      <p:nvGrpSpPr>
+        <p:cNvPr id="1" name=""/>
+        <p:cNvGrpSpPr/>
+        <p:nvPr/>
+      </p:nvGrpSpPr>
+      <p:grpSpPr>
+        <a:xfrm>
+          <a:off x="0" y="0"/>
+          <a:ext cx="0" cy="0"/>
+          <a:chOff x="0" y="0"/>
+          <a:chExt cx="0" cy="0"/>
+        </a:xfrm>
+      </p:grpSpPr>
+      <p:sp>
+        <p:nvSpPr>
+          <p:cNvPr id="2" name="Text 0"/>
+          <p:cNvSpPr/>
+          <p:nvPr/>
+        </p:nvSpPr>
+        <p:spPr>
+          <a:xfrm>
+            <a:off x="457200" y="713232"/>
+            <a:ext cx="11368735" cy="274320"/>
+          </a:xfrm>
+          <a:prstGeom prst="rect">
+            <a:avLst/>
+          </a:prstGeom>
+          <a:noFill/>
+          <a:ln/>
+        </p:spPr>
+        <p:txBody>
+          <a:bodyPr wrap="square" lIns="0" tIns="0" rIns="0" bIns="0" rtlCol="0" anchor="ctr"/>
+          <a:lstStyle/>
+          <a:p>
+            <a:pPr algn="r" indent="0" marL="0">
+              <a:buNone/>
+            </a:pPr>
+            <a:r>
+              <a:rPr lang="en-US" sz="1400" b="1" dirty="0">
+                <a:solidFill>
+                  <a:srgbClr val="1C3F6E"/>
+                </a:solidFill>
+                <a:latin typeface="Calibri" pitchFamily="34" charset="0"/>
+                <a:ea typeface="Calibri" pitchFamily="34" charset="-122"/>
+                <a:cs typeface="Calibri" pitchFamily="34" charset="-120"/>
+              </a:rPr>
+              <a:t>NEXT LESSON</a:t>
+            </a:r>
+            <a:endParaRPr lang="en-US" sz="1400" dirty="0"/>
+          </a:p>
+        </p:txBody>
+      </p:sp>
+      <p:pic>
+        <p:nvPicPr>
+          <p:cNvPr id="3" name="Image 0" descr="/home/claude/f4/img/minesec_sheet.png">    </p:cNvPr>
+          <p:cNvPicPr>
+            <a:picLocks noChangeAspect="1"/>
+          </p:cNvPicPr>
+          <p:nvPr/>
+        </p:nvPicPr>
+        <p:blipFill>
+          <a:blip r:embed="rId1"/>
+          <a:stretch>
+            <a:fillRect/>
+          </a:stretch>
+        </p:blipFill>
+        <p:spPr>
+          <a:xfrm>
+            <a:off x="0" y="658368"/>
+            <a:ext cx="5120640" cy="5833872"/>
+          </a:xfrm>
+          <a:prstGeom prst="rect">
+            <a:avLst/>
+          </a:prstGeom>
+        </p:spPr>
+      </p:pic>
+      <p:sp>
+        <p:nvSpPr>
+          <p:cNvPr id="4" name="Text 1"/>
+          <p:cNvSpPr/>
+          <p:nvPr/>
+        </p:nvSpPr>
+        <p:spPr>
+          <a:xfrm>
+            <a:off x="5349240" y="1005840"/>
+            <a:ext cx="6522415" cy="731520"/>
+          </a:xfrm>
+          <a:prstGeom prst="rect">
+            <a:avLst/>
+          </a:prstGeom>
+          <a:noFill/>
+          <a:ln/>
+        </p:spPr>
+        <p:txBody>
+          <a:bodyPr wrap="square" lIns="0" tIns="0" rIns="0" bIns="0" rtlCol="0" anchor="ctr">
+            <a:normAutofit/>
+          </a:bodyPr>
+          <a:lstStyle/>
+          <a:p>
+            <a:pPr algn="ctr" indent="0" marL="0">
+              <a:buNone/>
+            </a:pPr>
+            <a:r>
+              <a:rPr lang="en-US" sz="3600" b="1" dirty="0">
+                <a:solidFill>
+                  <a:srgbClr val="990011"/>
+                </a:solidFill>
+                <a:latin typeface="Times New Roman" pitchFamily="34" charset="0"/>
+                <a:ea typeface="Times New Roman" pitchFamily="34" charset="-122"/>
+                <a:cs typeface="Times New Roman" pitchFamily="34" charset="-120"/>
+              </a:rPr>
+              <a:t>Next Lesson</a:t>
+            </a:r>
+            <a:endParaRPr lang="en-US" sz="3600" dirty="0"/>
+          </a:p>
+        </p:txBody>
+      </p:sp>
+      <p:sp>
+        <p:nvSpPr>
+          <p:cNvPr id="5" name="Text 2"/>
+          <p:cNvSpPr/>
+          <p:nvPr/>
+        </p:nvSpPr>
+        <p:spPr>
+          <a:xfrm>
+            <a:off x="5349240" y="1783080"/>
+            <a:ext cx="6522415" cy="4663440"/>
+          </a:xfrm>
+          <a:prstGeom prst="rect">
+            <a:avLst/>
+          </a:prstGeom>
+          <a:noFill/>
+          <a:ln/>
+        </p:spPr>
+        <p:txBody>
+          <a:bodyPr wrap="square" lIns="0" tIns="0" rIns="0" bIns="0" rtlCol="0" anchor="ctr"/>
+          <a:lstStyle/>
+          <a:p>
+            <a:pPr algn="ctr" indent="0" marL="0">
+              <a:spcAft>
+                <a:spcPts val="800"/>
+              </a:spcAft>
+              <a:buNone/>
+            </a:pPr>
+            <a:r>
+              <a:rPr lang="en-US" sz="4000" b="1" dirty="0">
+                <a:solidFill>
+                  <a:srgbClr val="111111"/>
+                </a:solidFill>
+                <a:latin typeface="Times New Roman" pitchFamily="34" charset="0"/>
+                <a:ea typeface="Times New Roman" pitchFamily="34" charset="-122"/>
+                <a:cs typeface="Times New Roman" pitchFamily="34" charset="-120"/>
+              </a:rPr>
+              <a:t>Our next lesson will be on:</a:t>
+            </a:r>
+            <a:endParaRPr lang="en-US" sz="4000" dirty="0"/>
+          </a:p>
+          <a:p>
+            <a:pPr algn="ctr" indent="0" marL="0">
+              <a:spcAft>
+                <a:spcPts val="800"/>
+              </a:spcAft>
+              <a:buNone/>
+            </a:pPr>
+            <a:r>
+              <a:rPr lang="en-US" sz="4000" b="1" dirty="0">
+                <a:solidFill>
+                  <a:srgbClr val="990011"/>
+                </a:solidFill>
+                <a:latin typeface="Times New Roman" pitchFamily="34" charset="0"/>
+                <a:ea typeface="Times New Roman" pitchFamily="34" charset="-122"/>
+                <a:cs typeface="Times New Roman" pitchFamily="34" charset="-120"/>
+              </a:rPr>
+              <a:t>Lesson 8: Relationships between Towns and Country Sides</a:t>
+            </a:r>
+            <a:endParaRPr lang="en-US" sz="4000" dirty="0"/>
+          </a:p>
+        </p:txBody>
+      </p:sp>
+      <p:sp>
+        <p:nvSpPr>
+          <p:cNvPr id="25" name="Slide Number Placeholder 0"/>
+          <p:cNvSpPr>
+            <a:spLocks noGrp="1"/>
+          </p:cNvSpPr>
+          <p:nvPr>
+            <p:ph type="sldNum" sz="quarter" idx="4294967295"/>
+          </p:nvPr>
+        </p:nvSpPr>
+        <p:spPr>
+          <a:xfrm>
+            <a:off x="27432" y="91440"/>
+            <a:ext cx="585216" cy="475488"/>
+          </a:xfrm>
+          <a:prstGeom prst="rect">
+            <a:avLst/>
+          </a:prstGeom>
+          <a:extLst>
+            <a:ext uri="{C572A759-6A51-4108-AA02-DFA0A04FC94B}">
+              <ma14:wrappingTextBoxFlag xmlns:ma14="http://schemas.microsoft.com/office/mac/drawingml/2011/main" val="0"/>
+            </a:ext>
+          </a:extLst>
+        </p:spPr>
+        <p:txBody>
+          <a:bodyPr/>
+          <a:lstStyle>
+            <a:lvl1pPr>
+              <a:defRPr sz="2000">
+                <a:solidFill>
+                  <a:srgbClr val="FFFFFF"/>
+                </a:solidFill>
+                <a:latin typeface="Calibri"/>
+                <a:ea typeface="Calibri"/>
+                <a:cs typeface="Calibri"/>
+              </a:defRPr>
+            </a:lvl1pPr>
+          </a:lstStyle>
+          <a:p>
+            <a:pPr algn="ctr"/>
+            <a:fld id="{F7021451-1387-4CA6-816F-3879F97B5CBC}" type="slidenum">
+              <a:rPr b="1" lang="en-US"/>
+              <a:t>56</a:t>
+            </a:fld>
+            <a:endParaRPr lang="en-US"/>
+          </a:p>
+        </p:txBody>
+      </p:sp>
+    </p:spTree>
+  </p:cSld>
+  <p:clrMapOvr>
+    <a:masterClrMapping/>
+  </p:clrMapOvr>
+</p:sld>
+</file>
+
+<file path=ppt/slides/slide57.xml><?xml version="1.0" encoding="utf-8"?>
+<p:sld xmlns:a="http://schemas.openxmlformats.org/drawingml/2006/main" xmlns:r="http://schemas.openxmlformats.org/officeDocument/2006/relationships" xmlns:p="http://schemas.openxmlformats.org/presentationml/2006/main">
+  <p:cSld name="Slide 57">
+    <p:spTree>
+      <p:nvGrpSpPr>
+        <p:cNvPr id="1" name=""/>
+        <p:cNvGrpSpPr/>
+        <p:nvPr/>
+      </p:nvGrpSpPr>
+      <p:grpSpPr>
+        <a:xfrm>
+          <a:off x="0" y="0"/>
+          <a:ext cx="0" cy="0"/>
+          <a:chOff x="0" y="0"/>
+          <a:chExt cx="0" cy="0"/>
+        </a:xfrm>
+      </p:grpSpPr>
+      <p:sp>
+        <p:nvSpPr>
+          <p:cNvPr id="2" name="Text 0"/>
+          <p:cNvSpPr/>
+          <p:nvPr/>
+        </p:nvSpPr>
+        <p:spPr>
+          <a:xfrm>
+            <a:off x="457200" y="713232"/>
+            <a:ext cx="11368735" cy="274320"/>
+          </a:xfrm>
+          <a:prstGeom prst="rect">
+            <a:avLst/>
+          </a:prstGeom>
+          <a:noFill/>
+          <a:ln/>
+        </p:spPr>
+        <p:txBody>
+          <a:bodyPr wrap="square" lIns="0" tIns="0" rIns="0" bIns="0" rtlCol="0" anchor="ctr"/>
+          <a:lstStyle/>
+          <a:p>
+            <a:pPr algn="r" indent="0" marL="0">
+              <a:buNone/>
+            </a:pPr>
+            <a:r>
+              <a:rPr lang="en-US" sz="1400" b="1" dirty="0">
+                <a:solidFill>
+                  <a:srgbClr val="1C3F6E"/>
+                </a:solidFill>
+                <a:latin typeface="Calibri" pitchFamily="34" charset="0"/>
+                <a:ea typeface="Calibri" pitchFamily="34" charset="-122"/>
+                <a:cs typeface="Calibri" pitchFamily="34" charset="-120"/>
+              </a:rPr>
+              <a:t>BILINGUAL GAME</a:t>
+            </a:r>
+            <a:endParaRPr lang="en-US" sz="1400" dirty="0"/>
+          </a:p>
+        </p:txBody>
+      </p:sp>
+      <p:sp>
+        <p:nvSpPr>
+          <p:cNvPr id="3" name="Text 1"/>
+          <p:cNvSpPr/>
+          <p:nvPr/>
+        </p:nvSpPr>
+        <p:spPr>
+          <a:xfrm>
+            <a:off x="457200" y="1005840"/>
+            <a:ext cx="11277295" cy="731520"/>
+          </a:xfrm>
+          <a:prstGeom prst="rect">
+            <a:avLst/>
+          </a:prstGeom>
+          <a:noFill/>
+          <a:ln/>
+        </p:spPr>
+        <p:txBody>
+          <a:bodyPr wrap="square" lIns="0" tIns="0" rIns="0" bIns="0" rtlCol="0" anchor="ctr"/>
+          <a:lstStyle/>
+          <a:p>
+            <a:pPr algn="ctr" indent="0" marL="0">
+              <a:buNone/>
+            </a:pPr>
+            <a:r>
+              <a:rPr lang="en-US" sz="3600" b="1" dirty="0">
+                <a:solidFill>
+                  <a:srgbClr val="990011"/>
+                </a:solidFill>
+                <a:latin typeface="Times New Roman" pitchFamily="34" charset="0"/>
+                <a:ea typeface="Times New Roman" pitchFamily="34" charset="-122"/>
+                <a:cs typeface="Times New Roman" pitchFamily="34" charset="-120"/>
+              </a:rPr>
               <a:t>Bilingual Game (Jeu Bilingue)</a:t>
             </a:r>
             <a:endParaRPr lang="en-US" sz="3600" dirty="0"/>
@@ -16982,7 +20550,7 @@
       </p:sp>
       <p:graphicFrame>
         <p:nvGraphicFramePr>
-          <p:cNvPr id="49" name="Table 0"/>
+          <p:cNvPr id="58" name="Table 0"/>
           <p:cNvGraphicFramePr>
             <a:graphicFrameLocks noGrp="1"/>
           </p:cNvGraphicFramePr>
@@ -18018,7 +21586,7 @@
             <a:pPr algn="ctr"/>
             <a:fld id="{F7021451-1387-4CA6-816F-3879F97B5CBC}" type="slidenum">
               <a:rPr b="1" lang="en-US"/>
-              <a:t>48</a:t>
+              <a:t>57</a:t>
             </a:fld>
             <a:endParaRPr lang="en-US"/>
           </a:p>
@@ -18032,9 +21600,9 @@
 </p:sld>
 </file>
 
-<file path=ppt/slides/slide49.xml><?xml version="1.0" encoding="utf-8"?>
+<file path=ppt/slides/slide58.xml><?xml version="1.0" encoding="utf-8"?>
 <p:sld xmlns:a="http://schemas.openxmlformats.org/drawingml/2006/main" xmlns:r="http://schemas.openxmlformats.org/officeDocument/2006/relationships" xmlns:p="http://schemas.openxmlformats.org/presentationml/2006/main">
-  <p:cSld name="Slide 49">
+  <p:cSld name="Slide 58">
     <p:spTree>
       <p:nvGrpSpPr>
         <p:cNvPr id="1" name=""/>
@@ -18129,7 +21697,7 @@
       </p:sp>
       <p:graphicFrame>
         <p:nvGraphicFramePr>
-          <p:cNvPr id="50" name="Table 0"/>
+          <p:cNvPr id="59" name="Table 0"/>
           <p:cNvGraphicFramePr>
             <a:graphicFrameLocks noGrp="1"/>
           </p:cNvGraphicFramePr>
@@ -18515,7 +22083,7 @@
                           <a:ea typeface="Calibri" pitchFamily="34" charset="-122"/>
                           <a:cs typeface="Calibri" pitchFamily="34" charset="-120"/>
                         </a:rPr>
-                        <a:t>Identify the types of urban problems in Cameroon. Explain their causes and consequences. Propose practical solutions and know the regulations.</a:t>
+                        <a:t>Identify the types of urban problems in Cameroon. Explain their causes and consequences. Propose practical solutions and know the regulations in force.</a:t>
                       </a:r>
                       <a:endParaRPr lang="en-US" sz="1600" dirty="0">
                         <a:latin typeface="Calibri" charset="0"/>
@@ -18751,7 +22319,7 @@
             <a:pPr algn="ctr"/>
             <a:fld id="{F7021451-1387-4CA6-816F-3879F97B5CBC}" type="slidenum">
               <a:rPr b="1" lang="en-US"/>
-              <a:t>49</a:t>
+              <a:t>58</a:t>
             </a:fld>
             <a:endParaRPr lang="en-US"/>
           </a:p>
@@ -18765,9 +22333,9 @@
 </p:sld>
 </file>
 
-<file path=ppt/slides/slide5.xml><?xml version="1.0" encoding="utf-8"?>
+<file path=ppt/slides/slide59.xml><?xml version="1.0" encoding="utf-8"?>
 <p:sld xmlns:a="http://schemas.openxmlformats.org/drawingml/2006/main" xmlns:r="http://schemas.openxmlformats.org/officeDocument/2006/relationships" xmlns:p="http://schemas.openxmlformats.org/presentationml/2006/main">
-  <p:cSld name="Slide 5">
+  <p:cSld name="Slide 59">
     <p:spTree>
       <p:nvGrpSpPr>
         <p:cNvPr id="1" name=""/>
@@ -18815,46 +22383,22 @@
                 <a:ea typeface="Calibri" pitchFamily="34" charset="-122"/>
                 <a:cs typeface="Calibri" pitchFamily="34" charset="-120"/>
               </a:rPr>
-              <a:t>HOMEWORK CORRECTION</a:t>
+              <a:t>LOGBOOK</a:t>
             </a:r>
             <a:endParaRPr lang="en-US" sz="1400" dirty="0"/>
           </a:p>
         </p:txBody>
       </p:sp>
-      <p:pic>
-        <p:nvPicPr>
-          <p:cNvPr id="3" name="Image 0" descr="/home/claude/f4/img/minesec_sheet.png">    </p:cNvPr>
-          <p:cNvPicPr>
-            <a:picLocks noChangeAspect="1"/>
-          </p:cNvPicPr>
-          <p:nvPr/>
-        </p:nvPicPr>
-        <p:blipFill>
-          <a:blip r:embed="rId1"/>
-          <a:stretch>
-            <a:fillRect/>
-          </a:stretch>
-        </p:blipFill>
-        <p:spPr>
-          <a:xfrm>
-            <a:off x="0" y="658368"/>
-            <a:ext cx="5120640" cy="5833872"/>
-          </a:xfrm>
-          <a:prstGeom prst="rect">
-            <a:avLst/>
-          </a:prstGeom>
-        </p:spPr>
-      </p:pic>
-      <p:sp>
-        <p:nvSpPr>
-          <p:cNvPr id="4" name="Text 1"/>
+      <p:sp>
+        <p:nvSpPr>
+          <p:cNvPr id="3" name="Text 1"/>
           <p:cNvSpPr/>
           <p:nvPr/>
         </p:nvSpPr>
         <p:spPr>
           <a:xfrm>
-            <a:off x="5349240" y="1005840"/>
-            <a:ext cx="6522415" cy="731520"/>
+            <a:off x="457200" y="1005840"/>
+            <a:ext cx="11277295" cy="731520"/>
           </a:xfrm>
           <a:prstGeom prst="rect">
             <a:avLst/>
@@ -18863,9 +22407,7 @@
           <a:ln/>
         </p:spPr>
         <p:txBody>
-          <a:bodyPr wrap="square" lIns="0" tIns="0" rIns="0" bIns="0" rtlCol="0" anchor="ctr">
-            <a:normAutofit/>
-          </a:bodyPr>
+          <a:bodyPr wrap="square" lIns="0" tIns="0" rIns="0" bIns="0" rtlCol="0" anchor="ctr"/>
           <a:lstStyle/>
           <a:p>
             <a:pPr algn="ctr" indent="0" marL="0">
@@ -18880,199 +22422,6 @@
                 <a:ea typeface="Times New Roman" pitchFamily="34" charset="-122"/>
                 <a:cs typeface="Times New Roman" pitchFamily="34" charset="-120"/>
               </a:rPr>
-              <a:t>Correction: Possible Answer</a:t>
-            </a:r>
-            <a:endParaRPr lang="en-US" sz="3600" dirty="0"/>
-          </a:p>
-        </p:txBody>
-      </p:sp>
-      <p:sp>
-        <p:nvSpPr>
-          <p:cNvPr id="5" name="Text 2"/>
-          <p:cNvSpPr/>
-          <p:nvPr/>
-        </p:nvSpPr>
-        <p:spPr>
-          <a:xfrm>
-            <a:off x="5349240" y="1783080"/>
-            <a:ext cx="6522415" cy="4663440"/>
-          </a:xfrm>
-          <a:prstGeom prst="rect">
-            <a:avLst/>
-          </a:prstGeom>
-          <a:noFill/>
-          <a:ln/>
-        </p:spPr>
-        <p:txBody>
-          <a:bodyPr wrap="square" lIns="0" tIns="0" rIns="0" bIns="0" rtlCol="0" anchor="t"/>
-          <a:lstStyle/>
-          <a:p>
-            <a:pPr algn="l" indent="0" marL="0">
-              <a:spcAft>
-                <a:spcPts val="800"/>
-              </a:spcAft>
-              <a:buNone/>
-            </a:pPr>
-            <a:r>
-              <a:rPr lang="en-US" sz="4000" dirty="0">
-                <a:solidFill>
-                  <a:srgbClr val="111111"/>
-                </a:solidFill>
-                <a:latin typeface="Times New Roman" pitchFamily="34" charset="0"/>
-                <a:ea typeface="Times New Roman" pitchFamily="34" charset="-122"/>
-                <a:cs typeface="Times New Roman" pitchFamily="34" charset="-120"/>
-              </a:rPr>
-              <a:t>The map shows Maroua, Garoua, Ngaoundéré, Bertoua, Yaoundé, Ebolowa, Douala, Buea, Bafoussam and Bamenda, with a title, a key and a north arrow.</a:t>
-            </a:r>
-            <a:endParaRPr lang="en-US" sz="4000" dirty="0"/>
-          </a:p>
-        </p:txBody>
-      </p:sp>
-      <p:sp>
-        <p:nvSpPr>
-          <p:cNvPr id="25" name="Slide Number Placeholder 0"/>
-          <p:cNvSpPr>
-            <a:spLocks noGrp="1"/>
-          </p:cNvSpPr>
-          <p:nvPr>
-            <p:ph type="sldNum" sz="quarter" idx="4294967295"/>
-          </p:nvPr>
-        </p:nvSpPr>
-        <p:spPr>
-          <a:xfrm>
-            <a:off x="27432" y="91440"/>
-            <a:ext cx="585216" cy="475488"/>
-          </a:xfrm>
-          <a:prstGeom prst="rect">
-            <a:avLst/>
-          </a:prstGeom>
-          <a:extLst>
-            <a:ext uri="{C572A759-6A51-4108-AA02-DFA0A04FC94B}">
-              <ma14:wrappingTextBoxFlag xmlns:ma14="http://schemas.microsoft.com/office/mac/drawingml/2011/main" val="0"/>
-            </a:ext>
-          </a:extLst>
-        </p:spPr>
-        <p:txBody>
-          <a:bodyPr/>
-          <a:lstStyle>
-            <a:lvl1pPr>
-              <a:defRPr sz="2000">
-                <a:solidFill>
-                  <a:srgbClr val="FFFFFF"/>
-                </a:solidFill>
-                <a:latin typeface="Calibri"/>
-                <a:ea typeface="Calibri"/>
-                <a:cs typeface="Calibri"/>
-              </a:defRPr>
-            </a:lvl1pPr>
-          </a:lstStyle>
-          <a:p>
-            <a:pPr algn="ctr"/>
-            <a:fld id="{F7021451-1387-4CA6-816F-3879F97B5CBC}" type="slidenum">
-              <a:rPr b="1" lang="en-US"/>
-              <a:t>5</a:t>
-            </a:fld>
-            <a:endParaRPr lang="en-US"/>
-          </a:p>
-        </p:txBody>
-      </p:sp>
-    </p:spTree>
-  </p:cSld>
-  <p:clrMapOvr>
-    <a:masterClrMapping/>
-  </p:clrMapOvr>
-</p:sld>
-</file>
-
-<file path=ppt/slides/slide50.xml><?xml version="1.0" encoding="utf-8"?>
-<p:sld xmlns:a="http://schemas.openxmlformats.org/drawingml/2006/main" xmlns:r="http://schemas.openxmlformats.org/officeDocument/2006/relationships" xmlns:p="http://schemas.openxmlformats.org/presentationml/2006/main">
-  <p:cSld name="Slide 50">
-    <p:spTree>
-      <p:nvGrpSpPr>
-        <p:cNvPr id="1" name=""/>
-        <p:cNvGrpSpPr/>
-        <p:nvPr/>
-      </p:nvGrpSpPr>
-      <p:grpSpPr>
-        <a:xfrm>
-          <a:off x="0" y="0"/>
-          <a:ext cx="0" cy="0"/>
-          <a:chOff x="0" y="0"/>
-          <a:chExt cx="0" cy="0"/>
-        </a:xfrm>
-      </p:grpSpPr>
-      <p:sp>
-        <p:nvSpPr>
-          <p:cNvPr id="2" name="Text 0"/>
-          <p:cNvSpPr/>
-          <p:nvPr/>
-        </p:nvSpPr>
-        <p:spPr>
-          <a:xfrm>
-            <a:off x="457200" y="713232"/>
-            <a:ext cx="11368735" cy="274320"/>
-          </a:xfrm>
-          <a:prstGeom prst="rect">
-            <a:avLst/>
-          </a:prstGeom>
-          <a:noFill/>
-          <a:ln/>
-        </p:spPr>
-        <p:txBody>
-          <a:bodyPr wrap="square" lIns="0" tIns="0" rIns="0" bIns="0" rtlCol="0" anchor="ctr"/>
-          <a:lstStyle/>
-          <a:p>
-            <a:pPr algn="r" indent="0" marL="0">
-              <a:buNone/>
-            </a:pPr>
-            <a:r>
-              <a:rPr lang="en-US" sz="1400" b="1" dirty="0">
-                <a:solidFill>
-                  <a:srgbClr val="1C3F6E"/>
-                </a:solidFill>
-                <a:latin typeface="Calibri" pitchFamily="34" charset="0"/>
-                <a:ea typeface="Calibri" pitchFamily="34" charset="-122"/>
-                <a:cs typeface="Calibri" pitchFamily="34" charset="-120"/>
-              </a:rPr>
-              <a:t>LOGBOOK</a:t>
-            </a:r>
-            <a:endParaRPr lang="en-US" sz="1400" dirty="0"/>
-          </a:p>
-        </p:txBody>
-      </p:sp>
-      <p:sp>
-        <p:nvSpPr>
-          <p:cNvPr id="3" name="Text 1"/>
-          <p:cNvSpPr/>
-          <p:nvPr/>
-        </p:nvSpPr>
-        <p:spPr>
-          <a:xfrm>
-            <a:off x="457200" y="1005840"/>
-            <a:ext cx="11277295" cy="731520"/>
-          </a:xfrm>
-          <a:prstGeom prst="rect">
-            <a:avLst/>
-          </a:prstGeom>
-          <a:noFill/>
-          <a:ln/>
-        </p:spPr>
-        <p:txBody>
-          <a:bodyPr wrap="square" lIns="0" tIns="0" rIns="0" bIns="0" rtlCol="0" anchor="ctr"/>
-          <a:lstStyle/>
-          <a:p>
-            <a:pPr algn="ctr" indent="0" marL="0">
-              <a:buNone/>
-            </a:pPr>
-            <a:r>
-              <a:rPr lang="en-US" sz="3600" b="1" dirty="0">
-                <a:solidFill>
-                  <a:srgbClr val="990011"/>
-                </a:solidFill>
-                <a:latin typeface="Times New Roman" pitchFamily="34" charset="0"/>
-                <a:ea typeface="Times New Roman" pitchFamily="34" charset="-122"/>
-                <a:cs typeface="Times New Roman" pitchFamily="34" charset="-120"/>
-              </a:rPr>
               <a:t>Official Logbook (2/2)</a:t>
             </a:r>
             <a:endParaRPr lang="en-US" sz="3600" dirty="0"/>
@@ -19081,7 +22430,7 @@
       </p:sp>
       <p:graphicFrame>
         <p:nvGraphicFramePr>
-          <p:cNvPr id="51" name="Table 0"/>
+          <p:cNvPr id="60" name="Table 0"/>
           <p:cNvGraphicFramePr>
             <a:graphicFrameLocks noGrp="1"/>
           </p:cNvGraphicFramePr>
@@ -19191,7 +22540,7 @@
                           <a:ea typeface="Calibri" pitchFamily="34" charset="-122"/>
                           <a:cs typeface="Calibri" pitchFamily="34" charset="-120"/>
                         </a:rPr>
-                        <a:t>DEFINITIONS; Types and Causes; Consequences; Solutions and Regulations.</a:t>
+                        <a:t>DEFINITIONS; Types of Urban Problems; Causes of Urban Problems; Consequences of Urban Problems; Solutions and Regulations in Force.</a:t>
                       </a:r>
                       <a:endParaRPr lang="en-US" sz="1600" dirty="0">
                         <a:latin typeface="Calibri" charset="0"/>
@@ -19841,678 +23190,7 @@
             <a:pPr algn="ctr"/>
             <a:fld id="{F7021451-1387-4CA6-816F-3879F97B5CBC}" type="slidenum">
               <a:rPr b="1" lang="en-US"/>
-              <a:t>50</a:t>
-            </a:fld>
-            <a:endParaRPr lang="en-US"/>
-          </a:p>
-        </p:txBody>
-      </p:sp>
-    </p:spTree>
-  </p:cSld>
-  <p:clrMapOvr>
-    <a:masterClrMapping/>
-  </p:clrMapOvr>
-</p:sld>
-</file>
-
-<file path=ppt/slides/slide51.xml><?xml version="1.0" encoding="utf-8"?>
-<p:sld xmlns:a="http://schemas.openxmlformats.org/drawingml/2006/main" xmlns:r="http://schemas.openxmlformats.org/officeDocument/2006/relationships" xmlns:p="http://schemas.openxmlformats.org/presentationml/2006/main">
-  <p:cSld name="Slide 51">
-    <p:spTree>
-      <p:nvGrpSpPr>
-        <p:cNvPr id="1" name=""/>
-        <p:cNvGrpSpPr/>
-        <p:nvPr/>
-      </p:nvGrpSpPr>
-      <p:grpSpPr>
-        <a:xfrm>
-          <a:off x="0" y="0"/>
-          <a:ext cx="0" cy="0"/>
-          <a:chOff x="0" y="0"/>
-          <a:chExt cx="0" cy="0"/>
-        </a:xfrm>
-      </p:grpSpPr>
-      <p:sp>
-        <p:nvSpPr>
-          <p:cNvPr id="2" name="Text 0"/>
-          <p:cNvSpPr/>
-          <p:nvPr/>
-        </p:nvSpPr>
-        <p:spPr>
-          <a:xfrm>
-            <a:off x="457200" y="713232"/>
-            <a:ext cx="11368735" cy="274320"/>
-          </a:xfrm>
-          <a:prstGeom prst="rect">
-            <a:avLst/>
-          </a:prstGeom>
-          <a:noFill/>
-          <a:ln/>
-        </p:spPr>
-        <p:txBody>
-          <a:bodyPr wrap="square" lIns="0" tIns="0" rIns="0" bIns="0" rtlCol="0" anchor="ctr"/>
-          <a:lstStyle/>
-          <a:p>
-            <a:pPr algn="r" indent="0" marL="0">
-              <a:buNone/>
-            </a:pPr>
-            <a:r>
-              <a:rPr lang="en-US" sz="1400" b="1" dirty="0">
-                <a:solidFill>
-                  <a:srgbClr val="1C3F6E"/>
-                </a:solidFill>
-                <a:latin typeface="Calibri" pitchFamily="34" charset="0"/>
-                <a:ea typeface="Calibri" pitchFamily="34" charset="-122"/>
-                <a:cs typeface="Calibri" pitchFamily="34" charset="-120"/>
-              </a:rPr>
-              <a:t>TEACHER'S NOTE</a:t>
-            </a:r>
-            <a:endParaRPr lang="en-US" sz="1400" dirty="0"/>
-          </a:p>
-        </p:txBody>
-      </p:sp>
-      <p:pic>
-        <p:nvPicPr>
-          <p:cNvPr id="3" name="Image 0" descr="/home/claude/f4/img/minesec_sheet.png">    </p:cNvPr>
-          <p:cNvPicPr>
-            <a:picLocks noChangeAspect="1"/>
-          </p:cNvPicPr>
-          <p:nvPr/>
-        </p:nvPicPr>
-        <p:blipFill>
-          <a:blip r:embed="rId1"/>
-          <a:stretch>
-            <a:fillRect/>
-          </a:stretch>
-        </p:blipFill>
-        <p:spPr>
-          <a:xfrm>
-            <a:off x="0" y="658368"/>
-            <a:ext cx="3840480" cy="5833872"/>
-          </a:xfrm>
-          <a:prstGeom prst="rect">
-            <a:avLst/>
-          </a:prstGeom>
-        </p:spPr>
-      </p:pic>
-      <p:sp>
-        <p:nvSpPr>
-          <p:cNvPr id="4" name="Text 1"/>
-          <p:cNvSpPr/>
-          <p:nvPr/>
-        </p:nvSpPr>
-        <p:spPr>
-          <a:xfrm>
-            <a:off x="4069080" y="1005840"/>
-            <a:ext cx="7802575" cy="731520"/>
-          </a:xfrm>
-          <a:prstGeom prst="rect">
-            <a:avLst/>
-          </a:prstGeom>
-          <a:noFill/>
-          <a:ln/>
-        </p:spPr>
-        <p:txBody>
-          <a:bodyPr wrap="square" lIns="0" tIns="0" rIns="0" bIns="0" rtlCol="0" anchor="ctr">
-            <a:normAutofit/>
-          </a:bodyPr>
-          <a:lstStyle/>
-          <a:p>
-            <a:pPr algn="ctr" indent="0" marL="0">
-              <a:buNone/>
-            </a:pPr>
-            <a:r>
-              <a:rPr lang="en-US" sz="3600" b="1" dirty="0">
-                <a:solidFill>
-                  <a:srgbClr val="990011"/>
-                </a:solidFill>
-                <a:latin typeface="Times New Roman" pitchFamily="34" charset="0"/>
-                <a:ea typeface="Times New Roman" pitchFamily="34" charset="-122"/>
-                <a:cs typeface="Times New Roman" pitchFamily="34" charset="-120"/>
-              </a:rPr>
-              <a:t>Teacher's Note</a:t>
-            </a:r>
-            <a:endParaRPr lang="en-US" sz="3600" dirty="0"/>
-          </a:p>
-        </p:txBody>
-      </p:sp>
-      <p:sp>
-        <p:nvSpPr>
-          <p:cNvPr id="5" name="Text 2"/>
-          <p:cNvSpPr/>
-          <p:nvPr/>
-        </p:nvSpPr>
-        <p:spPr>
-          <a:xfrm>
-            <a:off x="4069080" y="1783080"/>
-            <a:ext cx="7802575" cy="4663440"/>
-          </a:xfrm>
-          <a:prstGeom prst="rect">
-            <a:avLst/>
-          </a:prstGeom>
-          <a:noFill/>
-          <a:ln/>
-        </p:spPr>
-        <p:txBody>
-          <a:bodyPr wrap="square" lIns="0" tIns="0" rIns="0" bIns="0" rtlCol="0" anchor="t"/>
-          <a:lstStyle/>
-          <a:p>
-            <a:pPr algn="l" marL="342900" indent="-342900">
-              <a:spcAft>
-                <a:spcPts val="800"/>
-              </a:spcAft>
-              <a:buSzPct val="100000"/>
-              <a:buChar char="•"/>
-            </a:pPr>
-            <a:r>
-              <a:rPr lang="en-US" sz="2000" dirty="0">
-                <a:solidFill>
-                  <a:srgbClr val="111111"/>
-                </a:solidFill>
-                <a:latin typeface="Calibri" pitchFamily="34" charset="0"/>
-                <a:ea typeface="Calibri" pitchFamily="34" charset="-122"/>
-                <a:cs typeface="Calibri" pitchFamily="34" charset="-120"/>
-              </a:rPr>
-              <a:t>Timing: Homework correction, plan, objectives 8 min | Recall, situation, action 10 min | 5 activities 30 min | Board summary (copying) 30 min | Evaluation, remediation 10 min | Homework, next lesson 5 min | Logbook 7 min</a:t>
-            </a:r>
-            <a:endParaRPr lang="en-US" sz="2000" dirty="0"/>
-          </a:p>
-          <a:p>
-            <a:pPr algn="l" marL="342900" indent="-342900">
-              <a:spcAft>
-                <a:spcPts val="800"/>
-              </a:spcAft>
-              <a:buSzPct val="100000"/>
-              <a:buChar char="•"/>
-            </a:pPr>
-            <a:r>
-              <a:rPr lang="en-US" sz="2000" dirty="0">
-                <a:solidFill>
-                  <a:srgbClr val="111111"/>
-                </a:solidFill>
-                <a:latin typeface="Calibri" pitchFamily="34" charset="0"/>
-                <a:ea typeface="Calibri" pitchFamily="34" charset="-122"/>
-                <a:cs typeface="Calibri" pitchFamily="34" charset="-120"/>
-              </a:rPr>
-              <a:t>Without the projector (Activity 1): list problems of Garoua.</a:t>
-            </a:r>
-            <a:endParaRPr lang="en-US" sz="2000" dirty="0"/>
-          </a:p>
-          <a:p>
-            <a:pPr algn="l" marL="342900" indent="-342900">
-              <a:spcAft>
-                <a:spcPts val="800"/>
-              </a:spcAft>
-              <a:buSzPct val="100000"/>
-              <a:buChar char="•"/>
-            </a:pPr>
-            <a:r>
-              <a:rPr lang="en-US" sz="2000" dirty="0">
-                <a:solidFill>
-                  <a:srgbClr val="111111"/>
-                </a:solidFill>
-                <a:latin typeface="Calibri" pitchFamily="34" charset="0"/>
-                <a:ea typeface="Calibri" pitchFamily="34" charset="-122"/>
-                <a:cs typeface="Calibri" pitchFamily="34" charset="-120"/>
-              </a:rPr>
-              <a:t>Without the projector (Activity 2): discuss why towns grow.</a:t>
-            </a:r>
-            <a:endParaRPr lang="en-US" sz="2000" dirty="0"/>
-          </a:p>
-          <a:p>
-            <a:pPr algn="l" marL="342900" indent="-342900">
-              <a:spcAft>
-                <a:spcPts val="800"/>
-              </a:spcAft>
-              <a:buSzPct val="100000"/>
-              <a:buChar char="•"/>
-            </a:pPr>
-            <a:r>
-              <a:rPr lang="en-US" sz="2000" dirty="0">
-                <a:solidFill>
-                  <a:srgbClr val="111111"/>
-                </a:solidFill>
-                <a:latin typeface="Calibri" pitchFamily="34" charset="0"/>
-                <a:ea typeface="Calibri" pitchFamily="34" charset="-122"/>
-                <a:cs typeface="Calibri" pitchFamily="34" charset="-120"/>
-              </a:rPr>
-              <a:t>Without the projector (Activity 3): describe gutters of the quarter.</a:t>
-            </a:r>
-            <a:endParaRPr lang="en-US" sz="2000" dirty="0"/>
-          </a:p>
-          <a:p>
-            <a:pPr algn="l" marL="342900" indent="-342900">
-              <a:spcAft>
-                <a:spcPts val="800"/>
-              </a:spcAft>
-              <a:buSzPct val="100000"/>
-              <a:buChar char="•"/>
-            </a:pPr>
-            <a:r>
-              <a:rPr lang="en-US" sz="2000" dirty="0">
-                <a:solidFill>
-                  <a:srgbClr val="111111"/>
-                </a:solidFill>
-                <a:latin typeface="Calibri" pitchFamily="34" charset="0"/>
-                <a:ea typeface="Calibri" pitchFamily="34" charset="-122"/>
-                <a:cs typeface="Calibri" pitchFamily="34" charset="-120"/>
-              </a:rPr>
-              <a:t>Without the projector (Activity 4): describe rush hour in town.</a:t>
-            </a:r>
-            <a:endParaRPr lang="en-US" sz="2000" dirty="0"/>
-          </a:p>
-          <a:p>
-            <a:pPr algn="l" marL="342900" indent="-342900">
-              <a:spcAft>
-                <a:spcPts val="800"/>
-              </a:spcAft>
-              <a:buSzPct val="100000"/>
-              <a:buChar char="•"/>
-            </a:pPr>
-            <a:r>
-              <a:rPr lang="en-US" sz="2000" dirty="0">
-                <a:solidFill>
-                  <a:srgbClr val="111111"/>
-                </a:solidFill>
-                <a:latin typeface="Calibri" pitchFamily="34" charset="0"/>
-                <a:ea typeface="Calibri" pitchFamily="34" charset="-122"/>
-                <a:cs typeface="Calibri" pitchFamily="34" charset="-120"/>
-              </a:rPr>
-              <a:t>Without the projector (Activity 5): propose solutions for the quarter.</a:t>
-            </a:r>
-            <a:endParaRPr lang="en-US" sz="2000" dirty="0"/>
-          </a:p>
-        </p:txBody>
-      </p:sp>
-      <p:sp>
-        <p:nvSpPr>
-          <p:cNvPr id="25" name="Slide Number Placeholder 0"/>
-          <p:cNvSpPr>
-            <a:spLocks noGrp="1"/>
-          </p:cNvSpPr>
-          <p:nvPr>
-            <p:ph type="sldNum" sz="quarter" idx="4294967295"/>
-          </p:nvPr>
-        </p:nvSpPr>
-        <p:spPr>
-          <a:xfrm>
-            <a:off x="27432" y="91440"/>
-            <a:ext cx="585216" cy="475488"/>
-          </a:xfrm>
-          <a:prstGeom prst="rect">
-            <a:avLst/>
-          </a:prstGeom>
-          <a:extLst>
-            <a:ext uri="{C572A759-6A51-4108-AA02-DFA0A04FC94B}">
-              <ma14:wrappingTextBoxFlag xmlns:ma14="http://schemas.microsoft.com/office/mac/drawingml/2011/main" val="0"/>
-            </a:ext>
-          </a:extLst>
-        </p:spPr>
-        <p:txBody>
-          <a:bodyPr/>
-          <a:lstStyle>
-            <a:lvl1pPr>
-              <a:defRPr sz="2000">
-                <a:solidFill>
-                  <a:srgbClr val="FFFFFF"/>
-                </a:solidFill>
-                <a:latin typeface="Calibri"/>
-                <a:ea typeface="Calibri"/>
-                <a:cs typeface="Calibri"/>
-              </a:defRPr>
-            </a:lvl1pPr>
-          </a:lstStyle>
-          <a:p>
-            <a:pPr algn="ctr"/>
-            <a:fld id="{F7021451-1387-4CA6-816F-3879F97B5CBC}" type="slidenum">
-              <a:rPr b="1" lang="en-US"/>
-              <a:t>51</a:t>
-            </a:fld>
-            <a:endParaRPr lang="en-US"/>
-          </a:p>
-        </p:txBody>
-      </p:sp>
-    </p:spTree>
-  </p:cSld>
-  <p:clrMapOvr>
-    <a:masterClrMapping/>
-  </p:clrMapOvr>
-</p:sld>
-</file>
-
-<file path=ppt/slides/slide52.xml><?xml version="1.0" encoding="utf-8"?>
-<p:sld xmlns:a="http://schemas.openxmlformats.org/drawingml/2006/main" xmlns:r="http://schemas.openxmlformats.org/officeDocument/2006/relationships" xmlns:p="http://schemas.openxmlformats.org/presentationml/2006/main">
-  <p:cSld name="Slide 52">
-    <p:spTree>
-      <p:nvGrpSpPr>
-        <p:cNvPr id="1" name=""/>
-        <p:cNvGrpSpPr/>
-        <p:nvPr/>
-      </p:nvGrpSpPr>
-      <p:grpSpPr>
-        <a:xfrm>
-          <a:off x="0" y="0"/>
-          <a:ext cx="0" cy="0"/>
-          <a:chOff x="0" y="0"/>
-          <a:chExt cx="0" cy="0"/>
-        </a:xfrm>
-      </p:grpSpPr>
-      <p:sp>
-        <p:nvSpPr>
-          <p:cNvPr id="2" name="Text 0"/>
-          <p:cNvSpPr/>
-          <p:nvPr/>
-        </p:nvSpPr>
-        <p:spPr>
-          <a:xfrm>
-            <a:off x="457200" y="713232"/>
-            <a:ext cx="11368735" cy="274320"/>
-          </a:xfrm>
-          <a:prstGeom prst="rect">
-            <a:avLst/>
-          </a:prstGeom>
-          <a:noFill/>
-          <a:ln/>
-        </p:spPr>
-        <p:txBody>
-          <a:bodyPr wrap="square" lIns="0" tIns="0" rIns="0" bIns="0" rtlCol="0" anchor="ctr"/>
-          <a:lstStyle/>
-          <a:p>
-            <a:pPr algn="r" indent="0" marL="0">
-              <a:buNone/>
-            </a:pPr>
-            <a:r>
-              <a:rPr lang="en-US" sz="1400" b="1" dirty="0">
-                <a:solidFill>
-                  <a:srgbClr val="1C3F6E"/>
-                </a:solidFill>
-                <a:latin typeface="Calibri" pitchFamily="34" charset="0"/>
-                <a:ea typeface="Calibri" pitchFamily="34" charset="-122"/>
-                <a:cs typeface="Calibri" pitchFamily="34" charset="-120"/>
-              </a:rPr>
-              <a:t>REFERENCES</a:t>
-            </a:r>
-            <a:endParaRPr lang="en-US" sz="1400" dirty="0"/>
-          </a:p>
-        </p:txBody>
-      </p:sp>
-      <p:pic>
-        <p:nvPicPr>
-          <p:cNvPr id="3" name="Image 0" descr="/home/claude/f4/img/minesec_sheet.png">    </p:cNvPr>
-          <p:cNvPicPr>
-            <a:picLocks noChangeAspect="1"/>
-          </p:cNvPicPr>
-          <p:nvPr/>
-        </p:nvPicPr>
-        <p:blipFill>
-          <a:blip r:embed="rId1"/>
-          <a:stretch>
-            <a:fillRect/>
-          </a:stretch>
-        </p:blipFill>
-        <p:spPr>
-          <a:xfrm>
-            <a:off x="0" y="658368"/>
-            <a:ext cx="2468880" cy="5833872"/>
-          </a:xfrm>
-          <a:prstGeom prst="rect">
-            <a:avLst/>
-          </a:prstGeom>
-        </p:spPr>
-      </p:pic>
-      <p:sp>
-        <p:nvSpPr>
-          <p:cNvPr id="4" name="Text 1"/>
-          <p:cNvSpPr/>
-          <p:nvPr/>
-        </p:nvSpPr>
-        <p:spPr>
-          <a:xfrm>
-            <a:off x="2697480" y="1005840"/>
-            <a:ext cx="9174175" cy="731520"/>
-          </a:xfrm>
-          <a:prstGeom prst="rect">
-            <a:avLst/>
-          </a:prstGeom>
-          <a:noFill/>
-          <a:ln/>
-        </p:spPr>
-        <p:txBody>
-          <a:bodyPr wrap="square" lIns="0" tIns="0" rIns="0" bIns="0" rtlCol="0" anchor="ctr">
-            <a:normAutofit/>
-          </a:bodyPr>
-          <a:lstStyle/>
-          <a:p>
-            <a:pPr algn="ctr" indent="0" marL="0">
-              <a:buNone/>
-            </a:pPr>
-            <a:r>
-              <a:rPr lang="en-US" sz="3600" b="1" dirty="0">
-                <a:solidFill>
-                  <a:srgbClr val="990011"/>
-                </a:solidFill>
-                <a:latin typeface="Times New Roman" pitchFamily="34" charset="0"/>
-                <a:ea typeface="Times New Roman" pitchFamily="34" charset="-122"/>
-                <a:cs typeface="Times New Roman" pitchFamily="34" charset="-120"/>
-              </a:rPr>
-              <a:t>References</a:t>
-            </a:r>
-            <a:endParaRPr lang="en-US" sz="3600" dirty="0"/>
-          </a:p>
-        </p:txBody>
-      </p:sp>
-      <p:sp>
-        <p:nvSpPr>
-          <p:cNvPr id="5" name="Text 2"/>
-          <p:cNvSpPr/>
-          <p:nvPr/>
-        </p:nvSpPr>
-        <p:spPr>
-          <a:xfrm>
-            <a:off x="2697480" y="1783080"/>
-            <a:ext cx="9174175" cy="4663440"/>
-          </a:xfrm>
-          <a:prstGeom prst="rect">
-            <a:avLst/>
-          </a:prstGeom>
-          <a:noFill/>
-          <a:ln/>
-        </p:spPr>
-        <p:txBody>
-          <a:bodyPr wrap="square" lIns="0" tIns="0" rIns="0" bIns="0" rtlCol="0" anchor="t"/>
-          <a:lstStyle/>
-          <a:p>
-            <a:pPr algn="l" marL="342900" indent="-342900">
-              <a:spcAft>
-                <a:spcPts val="800"/>
-              </a:spcAft>
-              <a:buSzPct val="100000"/>
-              <a:buChar char="•"/>
-            </a:pPr>
-            <a:r>
-              <a:rPr lang="en-US" sz="1800" dirty="0">
-                <a:solidFill>
-                  <a:srgbClr val="111111"/>
-                </a:solidFill>
-                <a:latin typeface="Calibri" pitchFamily="34" charset="0"/>
-                <a:ea typeface="Calibri" pitchFamily="34" charset="-122"/>
-                <a:cs typeface="Calibri" pitchFamily="34" charset="-120"/>
-              </a:rPr>
-              <a:t>Geography Syllabus, Forms I–V, MINESEC (2023) — Form 2, Module 2: Space Occupation.</a:t>
-            </a:r>
-            <a:endParaRPr lang="en-US" sz="1800" dirty="0"/>
-          </a:p>
-          <a:p>
-            <a:pPr algn="l" marL="342900" indent="-342900">
-              <a:spcAft>
-                <a:spcPts val="800"/>
-              </a:spcAft>
-              <a:buSzPct val="100000"/>
-              <a:buChar char="•"/>
-            </a:pPr>
-            <a:r>
-              <a:rPr lang="en-US" sz="1800" dirty="0">
-                <a:solidFill>
-                  <a:srgbClr val="111111"/>
-                </a:solidFill>
-                <a:latin typeface="Calibri" pitchFamily="34" charset="0"/>
-                <a:ea typeface="Calibri" pitchFamily="34" charset="-122"/>
-                <a:cs typeface="Calibri" pitchFamily="34" charset="-120"/>
-              </a:rPr>
-              <a:t>Photo, Activity 1: “Mathare” by Book Aid International, CC BY-NC-ND 2.0, via Flickr (https://www.flickr.com/photos/45024905@N07/4135561707)</a:t>
-            </a:r>
-            <a:endParaRPr lang="en-US" sz="1800" dirty="0"/>
-          </a:p>
-          <a:p>
-            <a:pPr algn="l" marL="342900" indent="-342900">
-              <a:spcAft>
-                <a:spcPts val="800"/>
-              </a:spcAft>
-              <a:buSzPct val="100000"/>
-              <a:buChar char="•"/>
-            </a:pPr>
-            <a:r>
-              <a:rPr lang="en-US" sz="1800" dirty="0">
-                <a:solidFill>
-                  <a:srgbClr val="111111"/>
-                </a:solidFill>
-                <a:latin typeface="Calibri" pitchFamily="34" charset="0"/>
-                <a:ea typeface="Calibri" pitchFamily="34" charset="-122"/>
-                <a:cs typeface="Calibri" pitchFamily="34" charset="-120"/>
-              </a:rPr>
-              <a:t>Photo, Activity 2: “Wax market” by zouzouwizman, CC BY 2.0, via Flickr (https://www.flickr.com/photos/61111202@N00/12129001)</a:t>
-            </a:r>
-            <a:endParaRPr lang="en-US" sz="1800" dirty="0"/>
-          </a:p>
-          <a:p>
-            <a:pPr algn="l" marL="342900" indent="-342900">
-              <a:spcAft>
-                <a:spcPts val="800"/>
-              </a:spcAft>
-              <a:buSzPct val="100000"/>
-              <a:buChar char="•"/>
-            </a:pPr>
-            <a:r>
-              <a:rPr lang="en-US" sz="1800" dirty="0">
-                <a:solidFill>
-                  <a:srgbClr val="111111"/>
-                </a:solidFill>
-                <a:latin typeface="Calibri" pitchFamily="34" charset="0"/>
-                <a:ea typeface="Calibri" pitchFamily="34" charset="-122"/>
-                <a:cs typeface="Calibri" pitchFamily="34" charset="-120"/>
-              </a:rPr>
-              <a:t>Photo, Activity 3: “Vicenza flooding Nov.1, 2010” by US Army Africa, CC BY 2.0, via Flickr (https://www.flickr.com/photos/36281822@N08/5157191333)</a:t>
-            </a:r>
-            <a:endParaRPr lang="en-US" sz="1800" dirty="0"/>
-          </a:p>
-          <a:p>
-            <a:pPr algn="l" marL="342900" indent="-342900">
-              <a:spcAft>
-                <a:spcPts val="800"/>
-              </a:spcAft>
-              <a:buSzPct val="100000"/>
-              <a:buChar char="•"/>
-            </a:pPr>
-            <a:r>
-              <a:rPr lang="en-US" sz="1800" dirty="0">
-                <a:solidFill>
-                  <a:srgbClr val="111111"/>
-                </a:solidFill>
-                <a:latin typeface="Calibri" pitchFamily="34" charset="0"/>
-                <a:ea typeface="Calibri" pitchFamily="34" charset="-122"/>
-                <a:cs typeface="Calibri" pitchFamily="34" charset="-120"/>
-              </a:rPr>
-              <a:t>Photo, Activity 4: “Nairobi Traffic Jam” by rogiro, CC BY-NC 2.0, via Flickr (https://www.flickr.com/photos/43132185@N00/48712135)</a:t>
-            </a:r>
-            <a:endParaRPr lang="en-US" sz="1800" dirty="0"/>
-          </a:p>
-          <a:p>
-            <a:pPr algn="l" marL="342900" indent="-342900">
-              <a:spcAft>
-                <a:spcPts val="800"/>
-              </a:spcAft>
-              <a:buSzPct val="100000"/>
-              <a:buChar char="•"/>
-            </a:pPr>
-            <a:r>
-              <a:rPr lang="en-US" sz="1800" dirty="0">
-                <a:solidFill>
-                  <a:srgbClr val="111111"/>
-                </a:solidFill>
-                <a:latin typeface="Calibri" pitchFamily="34" charset="0"/>
-                <a:ea typeface="Calibri" pitchFamily="34" charset="-122"/>
-                <a:cs typeface="Calibri" pitchFamily="34" charset="-120"/>
-              </a:rPr>
-              <a:t>Photo, Activity 5: “New Town Housing, Fullers Slade, Milton Keynes” by The JR James Archive, University of Sheffield, CC BY-NC 2.0, via Flickr (https://www.flickr.com/photos/98068999@N05/9253665547)</a:t>
-            </a:r>
-            <a:endParaRPr lang="en-US" sz="1800" dirty="0"/>
-          </a:p>
-          <a:p>
-            <a:pPr algn="l" marL="342900" indent="-342900">
-              <a:spcAft>
-                <a:spcPts val="800"/>
-              </a:spcAft>
-              <a:buSzPct val="100000"/>
-              <a:buChar char="•"/>
-            </a:pPr>
-            <a:r>
-              <a:rPr lang="en-US" sz="1800" dirty="0">
-                <a:solidFill>
-                  <a:srgbClr val="111111"/>
-                </a:solidFill>
-                <a:latin typeface="Calibri" pitchFamily="34" charset="0"/>
-                <a:ea typeface="Calibri" pitchFamily="34" charset="-122"/>
-                <a:cs typeface="Calibri" pitchFamily="34" charset="-120"/>
-              </a:rPr>
-              <a:t>Diagrams and animations: drawn for this lesson (Geography Department).</a:t>
-            </a:r>
-            <a:endParaRPr lang="en-US" sz="1800" dirty="0"/>
-          </a:p>
-        </p:txBody>
-      </p:sp>
-      <p:sp>
-        <p:nvSpPr>
-          <p:cNvPr id="25" name="Slide Number Placeholder 0"/>
-          <p:cNvSpPr>
-            <a:spLocks noGrp="1"/>
-          </p:cNvSpPr>
-          <p:nvPr>
-            <p:ph type="sldNum" sz="quarter" idx="4294967295"/>
-          </p:nvPr>
-        </p:nvSpPr>
-        <p:spPr>
-          <a:xfrm>
-            <a:off x="27432" y="91440"/>
-            <a:ext cx="585216" cy="475488"/>
-          </a:xfrm>
-          <a:prstGeom prst="rect">
-            <a:avLst/>
-          </a:prstGeom>
-          <a:extLst>
-            <a:ext uri="{C572A759-6A51-4108-AA02-DFA0A04FC94B}">
-              <ma14:wrappingTextBoxFlag xmlns:ma14="http://schemas.microsoft.com/office/mac/drawingml/2011/main" val="0"/>
-            </a:ext>
-          </a:extLst>
-        </p:spPr>
-        <p:txBody>
-          <a:bodyPr/>
-          <a:lstStyle>
-            <a:lvl1pPr>
-              <a:defRPr sz="2000">
-                <a:solidFill>
-                  <a:srgbClr val="FFFFFF"/>
-                </a:solidFill>
-                <a:latin typeface="Calibri"/>
-                <a:ea typeface="Calibri"/>
-                <a:cs typeface="Calibri"/>
-              </a:defRPr>
-            </a:lvl1pPr>
-          </a:lstStyle>
-          <a:p>
-            <a:pPr algn="ctr"/>
-            <a:fld id="{F7021451-1387-4CA6-816F-3879F97B5CBC}" type="slidenum">
-              <a:rPr b="1" lang="en-US"/>
-              <a:t>52</a:t>
+              <a:t>59</a:t>
             </a:fld>
             <a:endParaRPr lang="en-US"/>
           </a:p>
@@ -20857,6 +23535,677 @@
 </p:sld>
 </file>
 
+<file path=ppt/slides/slide60.xml><?xml version="1.0" encoding="utf-8"?>
+<p:sld xmlns:a="http://schemas.openxmlformats.org/drawingml/2006/main" xmlns:r="http://schemas.openxmlformats.org/officeDocument/2006/relationships" xmlns:p="http://schemas.openxmlformats.org/presentationml/2006/main">
+  <p:cSld name="Slide 60">
+    <p:spTree>
+      <p:nvGrpSpPr>
+        <p:cNvPr id="1" name=""/>
+        <p:cNvGrpSpPr/>
+        <p:nvPr/>
+      </p:nvGrpSpPr>
+      <p:grpSpPr>
+        <a:xfrm>
+          <a:off x="0" y="0"/>
+          <a:ext cx="0" cy="0"/>
+          <a:chOff x="0" y="0"/>
+          <a:chExt cx="0" cy="0"/>
+        </a:xfrm>
+      </p:grpSpPr>
+      <p:sp>
+        <p:nvSpPr>
+          <p:cNvPr id="2" name="Text 0"/>
+          <p:cNvSpPr/>
+          <p:nvPr/>
+        </p:nvSpPr>
+        <p:spPr>
+          <a:xfrm>
+            <a:off x="457200" y="713232"/>
+            <a:ext cx="11368735" cy="274320"/>
+          </a:xfrm>
+          <a:prstGeom prst="rect">
+            <a:avLst/>
+          </a:prstGeom>
+          <a:noFill/>
+          <a:ln/>
+        </p:spPr>
+        <p:txBody>
+          <a:bodyPr wrap="square" lIns="0" tIns="0" rIns="0" bIns="0" rtlCol="0" anchor="ctr"/>
+          <a:lstStyle/>
+          <a:p>
+            <a:pPr algn="r" indent="0" marL="0">
+              <a:buNone/>
+            </a:pPr>
+            <a:r>
+              <a:rPr lang="en-US" sz="1400" b="1" dirty="0">
+                <a:solidFill>
+                  <a:srgbClr val="1C3F6E"/>
+                </a:solidFill>
+                <a:latin typeface="Calibri" pitchFamily="34" charset="0"/>
+                <a:ea typeface="Calibri" pitchFamily="34" charset="-122"/>
+                <a:cs typeface="Calibri" pitchFamily="34" charset="-120"/>
+              </a:rPr>
+              <a:t>TEACHER'S NOTE</a:t>
+            </a:r>
+            <a:endParaRPr lang="en-US" sz="1400" dirty="0"/>
+          </a:p>
+        </p:txBody>
+      </p:sp>
+      <p:pic>
+        <p:nvPicPr>
+          <p:cNvPr id="3" name="Image 0" descr="/home/claude/f4/img/minesec_sheet.png">    </p:cNvPr>
+          <p:cNvPicPr>
+            <a:picLocks noChangeAspect="1"/>
+          </p:cNvPicPr>
+          <p:nvPr/>
+        </p:nvPicPr>
+        <p:blipFill>
+          <a:blip r:embed="rId1"/>
+          <a:stretch>
+            <a:fillRect/>
+          </a:stretch>
+        </p:blipFill>
+        <p:spPr>
+          <a:xfrm>
+            <a:off x="0" y="658368"/>
+            <a:ext cx="3840480" cy="5833872"/>
+          </a:xfrm>
+          <a:prstGeom prst="rect">
+            <a:avLst/>
+          </a:prstGeom>
+        </p:spPr>
+      </p:pic>
+      <p:sp>
+        <p:nvSpPr>
+          <p:cNvPr id="4" name="Text 1"/>
+          <p:cNvSpPr/>
+          <p:nvPr/>
+        </p:nvSpPr>
+        <p:spPr>
+          <a:xfrm>
+            <a:off x="4069080" y="1005840"/>
+            <a:ext cx="7802575" cy="731520"/>
+          </a:xfrm>
+          <a:prstGeom prst="rect">
+            <a:avLst/>
+          </a:prstGeom>
+          <a:noFill/>
+          <a:ln/>
+        </p:spPr>
+        <p:txBody>
+          <a:bodyPr wrap="square" lIns="0" tIns="0" rIns="0" bIns="0" rtlCol="0" anchor="ctr">
+            <a:normAutofit/>
+          </a:bodyPr>
+          <a:lstStyle/>
+          <a:p>
+            <a:pPr algn="ctr" indent="0" marL="0">
+              <a:buNone/>
+            </a:pPr>
+            <a:r>
+              <a:rPr lang="en-US" sz="3600" b="1" dirty="0">
+                <a:solidFill>
+                  <a:srgbClr val="990011"/>
+                </a:solidFill>
+                <a:latin typeface="Times New Roman" pitchFamily="34" charset="0"/>
+                <a:ea typeface="Times New Roman" pitchFamily="34" charset="-122"/>
+                <a:cs typeface="Times New Roman" pitchFamily="34" charset="-120"/>
+              </a:rPr>
+              <a:t>Teacher's Note</a:t>
+            </a:r>
+            <a:endParaRPr lang="en-US" sz="3600" dirty="0"/>
+          </a:p>
+        </p:txBody>
+      </p:sp>
+      <p:sp>
+        <p:nvSpPr>
+          <p:cNvPr id="5" name="Text 2"/>
+          <p:cNvSpPr/>
+          <p:nvPr/>
+        </p:nvSpPr>
+        <p:spPr>
+          <a:xfrm>
+            <a:off x="4069080" y="1783080"/>
+            <a:ext cx="7802575" cy="4663440"/>
+          </a:xfrm>
+          <a:prstGeom prst="rect">
+            <a:avLst/>
+          </a:prstGeom>
+          <a:noFill/>
+          <a:ln/>
+        </p:spPr>
+        <p:txBody>
+          <a:bodyPr wrap="square" lIns="0" tIns="0" rIns="0" bIns="0" rtlCol="0" anchor="t"/>
+          <a:lstStyle/>
+          <a:p>
+            <a:pPr algn="l" marL="342900" indent="-342900">
+              <a:spcAft>
+                <a:spcPts val="800"/>
+              </a:spcAft>
+              <a:buSzPct val="100000"/>
+              <a:buChar char="•"/>
+            </a:pPr>
+            <a:r>
+              <a:rPr lang="en-US" sz="2000" dirty="0">
+                <a:solidFill>
+                  <a:srgbClr val="111111"/>
+                </a:solidFill>
+                <a:latin typeface="Calibri" pitchFamily="34" charset="0"/>
+                <a:ea typeface="Calibri" pitchFamily="34" charset="-122"/>
+                <a:cs typeface="Calibri" pitchFamily="34" charset="-120"/>
+              </a:rPr>
+              <a:t>Timing: Homework correction, plan, objectives 8 min | Recall, situation, action 10 min | 5 activities 30 min | Board summary (copying) 30 min | Evaluation, remediation 10 min | Homework, next lesson 5 min | Logbook 7 min</a:t>
+            </a:r>
+            <a:endParaRPr lang="en-US" sz="2000" dirty="0"/>
+          </a:p>
+          <a:p>
+            <a:pPr algn="l" marL="342900" indent="-342900">
+              <a:spcAft>
+                <a:spcPts val="800"/>
+              </a:spcAft>
+              <a:buSzPct val="100000"/>
+              <a:buChar char="•"/>
+            </a:pPr>
+            <a:r>
+              <a:rPr lang="en-US" sz="2000" dirty="0">
+                <a:solidFill>
+                  <a:srgbClr val="111111"/>
+                </a:solidFill>
+                <a:latin typeface="Calibri" pitchFamily="34" charset="0"/>
+                <a:ea typeface="Calibri" pitchFamily="34" charset="-122"/>
+                <a:cs typeface="Calibri" pitchFamily="34" charset="-120"/>
+              </a:rPr>
+              <a:t>Without the projector (Activity 1): list problems of Garoua.</a:t>
+            </a:r>
+            <a:endParaRPr lang="en-US" sz="2000" dirty="0"/>
+          </a:p>
+          <a:p>
+            <a:pPr algn="l" marL="342900" indent="-342900">
+              <a:spcAft>
+                <a:spcPts val="800"/>
+              </a:spcAft>
+              <a:buSzPct val="100000"/>
+              <a:buChar char="•"/>
+            </a:pPr>
+            <a:r>
+              <a:rPr lang="en-US" sz="2000" dirty="0">
+                <a:solidFill>
+                  <a:srgbClr val="111111"/>
+                </a:solidFill>
+                <a:latin typeface="Calibri" pitchFamily="34" charset="0"/>
+                <a:ea typeface="Calibri" pitchFamily="34" charset="-122"/>
+                <a:cs typeface="Calibri" pitchFamily="34" charset="-120"/>
+              </a:rPr>
+              <a:t>Without the projector (Activity 2): discuss why towns grow.</a:t>
+            </a:r>
+            <a:endParaRPr lang="en-US" sz="2000" dirty="0"/>
+          </a:p>
+          <a:p>
+            <a:pPr algn="l" marL="342900" indent="-342900">
+              <a:spcAft>
+                <a:spcPts val="800"/>
+              </a:spcAft>
+              <a:buSzPct val="100000"/>
+              <a:buChar char="•"/>
+            </a:pPr>
+            <a:r>
+              <a:rPr lang="en-US" sz="2000" dirty="0">
+                <a:solidFill>
+                  <a:srgbClr val="111111"/>
+                </a:solidFill>
+                <a:latin typeface="Calibri" pitchFamily="34" charset="0"/>
+                <a:ea typeface="Calibri" pitchFamily="34" charset="-122"/>
+                <a:cs typeface="Calibri" pitchFamily="34" charset="-120"/>
+              </a:rPr>
+              <a:t>Without the projector (Activity 3): describe the gutters of the quarter.</a:t>
+            </a:r>
+            <a:endParaRPr lang="en-US" sz="2000" dirty="0"/>
+          </a:p>
+          <a:p>
+            <a:pPr algn="l" marL="342900" indent="-342900">
+              <a:spcAft>
+                <a:spcPts val="800"/>
+              </a:spcAft>
+              <a:buSzPct val="100000"/>
+              <a:buChar char="•"/>
+            </a:pPr>
+            <a:r>
+              <a:rPr lang="en-US" sz="2000" dirty="0">
+                <a:solidFill>
+                  <a:srgbClr val="111111"/>
+                </a:solidFill>
+                <a:latin typeface="Calibri" pitchFamily="34" charset="0"/>
+                <a:ea typeface="Calibri" pitchFamily="34" charset="-122"/>
+                <a:cs typeface="Calibri" pitchFamily="34" charset="-120"/>
+              </a:rPr>
+              <a:t>Without the projector (Activity 4): describe rush hour in town.</a:t>
+            </a:r>
+            <a:endParaRPr lang="en-US" sz="2000" dirty="0"/>
+          </a:p>
+          <a:p>
+            <a:pPr algn="l" marL="342900" indent="-342900">
+              <a:spcAft>
+                <a:spcPts val="800"/>
+              </a:spcAft>
+              <a:buSzPct val="100000"/>
+              <a:buChar char="•"/>
+            </a:pPr>
+            <a:r>
+              <a:rPr lang="en-US" sz="2000" dirty="0">
+                <a:solidFill>
+                  <a:srgbClr val="111111"/>
+                </a:solidFill>
+                <a:latin typeface="Calibri" pitchFamily="34" charset="0"/>
+                <a:ea typeface="Calibri" pitchFamily="34" charset="-122"/>
+                <a:cs typeface="Calibri" pitchFamily="34" charset="-120"/>
+              </a:rPr>
+              <a:t>Without the projector (Activity 5): propose solutions for the quarter.</a:t>
+            </a:r>
+            <a:endParaRPr lang="en-US" sz="2000" dirty="0"/>
+          </a:p>
+        </p:txBody>
+      </p:sp>
+      <p:sp>
+        <p:nvSpPr>
+          <p:cNvPr id="25" name="Slide Number Placeholder 0"/>
+          <p:cNvSpPr>
+            <a:spLocks noGrp="1"/>
+          </p:cNvSpPr>
+          <p:nvPr>
+            <p:ph type="sldNum" sz="quarter" idx="4294967295"/>
+          </p:nvPr>
+        </p:nvSpPr>
+        <p:spPr>
+          <a:xfrm>
+            <a:off x="27432" y="91440"/>
+            <a:ext cx="585216" cy="475488"/>
+          </a:xfrm>
+          <a:prstGeom prst="rect">
+            <a:avLst/>
+          </a:prstGeom>
+          <a:extLst>
+            <a:ext uri="{C572A759-6A51-4108-AA02-DFA0A04FC94B}">
+              <ma14:wrappingTextBoxFlag xmlns:ma14="http://schemas.microsoft.com/office/mac/drawingml/2011/main" val="0"/>
+            </a:ext>
+          </a:extLst>
+        </p:spPr>
+        <p:txBody>
+          <a:bodyPr/>
+          <a:lstStyle>
+            <a:lvl1pPr>
+              <a:defRPr sz="2000">
+                <a:solidFill>
+                  <a:srgbClr val="FFFFFF"/>
+                </a:solidFill>
+                <a:latin typeface="Calibri"/>
+                <a:ea typeface="Calibri"/>
+                <a:cs typeface="Calibri"/>
+              </a:defRPr>
+            </a:lvl1pPr>
+          </a:lstStyle>
+          <a:p>
+            <a:pPr algn="ctr"/>
+            <a:fld id="{F7021451-1387-4CA6-816F-3879F97B5CBC}" type="slidenum">
+              <a:rPr b="1" lang="en-US"/>
+              <a:t>60</a:t>
+            </a:fld>
+            <a:endParaRPr lang="en-US"/>
+          </a:p>
+        </p:txBody>
+      </p:sp>
+    </p:spTree>
+  </p:cSld>
+  <p:clrMapOvr>
+    <a:masterClrMapping/>
+  </p:clrMapOvr>
+</p:sld>
+</file>
+
+<file path=ppt/slides/slide61.xml><?xml version="1.0" encoding="utf-8"?>
+<p:sld xmlns:a="http://schemas.openxmlformats.org/drawingml/2006/main" xmlns:r="http://schemas.openxmlformats.org/officeDocument/2006/relationships" xmlns:p="http://schemas.openxmlformats.org/presentationml/2006/main">
+  <p:cSld name="Slide 61">
+    <p:spTree>
+      <p:nvGrpSpPr>
+        <p:cNvPr id="1" name=""/>
+        <p:cNvGrpSpPr/>
+        <p:nvPr/>
+      </p:nvGrpSpPr>
+      <p:grpSpPr>
+        <a:xfrm>
+          <a:off x="0" y="0"/>
+          <a:ext cx="0" cy="0"/>
+          <a:chOff x="0" y="0"/>
+          <a:chExt cx="0" cy="0"/>
+        </a:xfrm>
+      </p:grpSpPr>
+      <p:sp>
+        <p:nvSpPr>
+          <p:cNvPr id="2" name="Text 0"/>
+          <p:cNvSpPr/>
+          <p:nvPr/>
+        </p:nvSpPr>
+        <p:spPr>
+          <a:xfrm>
+            <a:off x="457200" y="713232"/>
+            <a:ext cx="11368735" cy="274320"/>
+          </a:xfrm>
+          <a:prstGeom prst="rect">
+            <a:avLst/>
+          </a:prstGeom>
+          <a:noFill/>
+          <a:ln/>
+        </p:spPr>
+        <p:txBody>
+          <a:bodyPr wrap="square" lIns="0" tIns="0" rIns="0" bIns="0" rtlCol="0" anchor="ctr"/>
+          <a:lstStyle/>
+          <a:p>
+            <a:pPr algn="r" indent="0" marL="0">
+              <a:buNone/>
+            </a:pPr>
+            <a:r>
+              <a:rPr lang="en-US" sz="1400" b="1" dirty="0">
+                <a:solidFill>
+                  <a:srgbClr val="1C3F6E"/>
+                </a:solidFill>
+                <a:latin typeface="Calibri" pitchFamily="34" charset="0"/>
+                <a:ea typeface="Calibri" pitchFamily="34" charset="-122"/>
+                <a:cs typeface="Calibri" pitchFamily="34" charset="-120"/>
+              </a:rPr>
+              <a:t>REFERENCES</a:t>
+            </a:r>
+            <a:endParaRPr lang="en-US" sz="1400" dirty="0"/>
+          </a:p>
+        </p:txBody>
+      </p:sp>
+      <p:pic>
+        <p:nvPicPr>
+          <p:cNvPr id="3" name="Image 0" descr="/home/claude/f4/img/minesec_sheet.png">    </p:cNvPr>
+          <p:cNvPicPr>
+            <a:picLocks noChangeAspect="1"/>
+          </p:cNvPicPr>
+          <p:nvPr/>
+        </p:nvPicPr>
+        <p:blipFill>
+          <a:blip r:embed="rId1"/>
+          <a:stretch>
+            <a:fillRect/>
+          </a:stretch>
+        </p:blipFill>
+        <p:spPr>
+          <a:xfrm>
+            <a:off x="0" y="658368"/>
+            <a:ext cx="2468880" cy="5833872"/>
+          </a:xfrm>
+          <a:prstGeom prst="rect">
+            <a:avLst/>
+          </a:prstGeom>
+        </p:spPr>
+      </p:pic>
+      <p:sp>
+        <p:nvSpPr>
+          <p:cNvPr id="4" name="Text 1"/>
+          <p:cNvSpPr/>
+          <p:nvPr/>
+        </p:nvSpPr>
+        <p:spPr>
+          <a:xfrm>
+            <a:off x="2697480" y="1005840"/>
+            <a:ext cx="9174175" cy="731520"/>
+          </a:xfrm>
+          <a:prstGeom prst="rect">
+            <a:avLst/>
+          </a:prstGeom>
+          <a:noFill/>
+          <a:ln/>
+        </p:spPr>
+        <p:txBody>
+          <a:bodyPr wrap="square" lIns="0" tIns="0" rIns="0" bIns="0" rtlCol="0" anchor="ctr">
+            <a:normAutofit/>
+          </a:bodyPr>
+          <a:lstStyle/>
+          <a:p>
+            <a:pPr algn="ctr" indent="0" marL="0">
+              <a:buNone/>
+            </a:pPr>
+            <a:r>
+              <a:rPr lang="en-US" sz="3600" b="1" dirty="0">
+                <a:solidFill>
+                  <a:srgbClr val="990011"/>
+                </a:solidFill>
+                <a:latin typeface="Times New Roman" pitchFamily="34" charset="0"/>
+                <a:ea typeface="Times New Roman" pitchFamily="34" charset="-122"/>
+                <a:cs typeface="Times New Roman" pitchFamily="34" charset="-120"/>
+              </a:rPr>
+              <a:t>References</a:t>
+            </a:r>
+            <a:endParaRPr lang="en-US" sz="3600" dirty="0"/>
+          </a:p>
+        </p:txBody>
+      </p:sp>
+      <p:sp>
+        <p:nvSpPr>
+          <p:cNvPr id="5" name="Text 2"/>
+          <p:cNvSpPr/>
+          <p:nvPr/>
+        </p:nvSpPr>
+        <p:spPr>
+          <a:xfrm>
+            <a:off x="2697480" y="1783080"/>
+            <a:ext cx="9174175" cy="4663440"/>
+          </a:xfrm>
+          <a:prstGeom prst="rect">
+            <a:avLst/>
+          </a:prstGeom>
+          <a:noFill/>
+          <a:ln/>
+        </p:spPr>
+        <p:txBody>
+          <a:bodyPr wrap="square" lIns="0" tIns="0" rIns="0" bIns="0" rtlCol="0" anchor="t"/>
+          <a:lstStyle/>
+          <a:p>
+            <a:pPr algn="l" marL="342900" indent="-342900">
+              <a:spcAft>
+                <a:spcPts val="800"/>
+              </a:spcAft>
+              <a:buSzPct val="100000"/>
+              <a:buChar char="•"/>
+            </a:pPr>
+            <a:r>
+              <a:rPr lang="en-US" sz="1800" dirty="0">
+                <a:solidFill>
+                  <a:srgbClr val="111111"/>
+                </a:solidFill>
+                <a:latin typeface="Calibri" pitchFamily="34" charset="0"/>
+                <a:ea typeface="Calibri" pitchFamily="34" charset="-122"/>
+                <a:cs typeface="Calibri" pitchFamily="34" charset="-120"/>
+              </a:rPr>
+              <a:t>Geography Syllabus, Forms I–V, MINESEC (2023) — Form 2, Module 2: Space Occupation.</a:t>
+            </a:r>
+            <a:endParaRPr lang="en-US" sz="1800" dirty="0"/>
+          </a:p>
+          <a:p>
+            <a:pPr algn="l" marL="342900" indent="-342900">
+              <a:spcAft>
+                <a:spcPts val="800"/>
+              </a:spcAft>
+              <a:buSzPct val="100000"/>
+              <a:buChar char="•"/>
+            </a:pPr>
+            <a:r>
+              <a:rPr lang="en-US" sz="1800" dirty="0">
+                <a:solidFill>
+                  <a:srgbClr val="111111"/>
+                </a:solidFill>
+                <a:latin typeface="Calibri" pitchFamily="34" charset="0"/>
+                <a:ea typeface="Calibri" pitchFamily="34" charset="-122"/>
+                <a:cs typeface="Calibri" pitchFamily="34" charset="-120"/>
+              </a:rPr>
+              <a:t>Photo, Activity 1: “Mathare” by Book Aid International, CC BY-NC-ND 2.0, via Flickr (https://www.flickr.com/photos/45024905@N07/4135561707)</a:t>
+            </a:r>
+            <a:endParaRPr lang="en-US" sz="1800" dirty="0"/>
+          </a:p>
+          <a:p>
+            <a:pPr algn="l" marL="342900" indent="-342900">
+              <a:spcAft>
+                <a:spcPts val="800"/>
+              </a:spcAft>
+              <a:buSzPct val="100000"/>
+              <a:buChar char="•"/>
+            </a:pPr>
+            <a:r>
+              <a:rPr lang="en-US" sz="1800" dirty="0">
+                <a:solidFill>
+                  <a:srgbClr val="111111"/>
+                </a:solidFill>
+                <a:latin typeface="Calibri" pitchFamily="34" charset="0"/>
+                <a:ea typeface="Calibri" pitchFamily="34" charset="-122"/>
+                <a:cs typeface="Calibri" pitchFamily="34" charset="-120"/>
+              </a:rPr>
+              <a:t>Photo, Activity 2: “Wax market” by zouzouwizman, CC BY 2.0, via Flickr (https://www.flickr.com/photos/61111202@N00/12129001)</a:t>
+            </a:r>
+            <a:endParaRPr lang="en-US" sz="1800" dirty="0"/>
+          </a:p>
+          <a:p>
+            <a:pPr algn="l" marL="342900" indent="-342900">
+              <a:spcAft>
+                <a:spcPts val="800"/>
+              </a:spcAft>
+              <a:buSzPct val="100000"/>
+              <a:buChar char="•"/>
+            </a:pPr>
+            <a:r>
+              <a:rPr lang="en-US" sz="1800" dirty="0">
+                <a:solidFill>
+                  <a:srgbClr val="111111"/>
+                </a:solidFill>
+                <a:latin typeface="Calibri" pitchFamily="34" charset="0"/>
+                <a:ea typeface="Calibri" pitchFamily="34" charset="-122"/>
+                <a:cs typeface="Calibri" pitchFamily="34" charset="-120"/>
+              </a:rPr>
+              <a:t>Photo, Activity 3: “Vicenza flooding Nov.1, 2010” by US Army Africa, CC BY 2.0, via Flickr (https://www.flickr.com/photos/36281822@N08/5157191333)</a:t>
+            </a:r>
+            <a:endParaRPr lang="en-US" sz="1800" dirty="0"/>
+          </a:p>
+          <a:p>
+            <a:pPr algn="l" marL="342900" indent="-342900">
+              <a:spcAft>
+                <a:spcPts val="800"/>
+              </a:spcAft>
+              <a:buSzPct val="100000"/>
+              <a:buChar char="•"/>
+            </a:pPr>
+            <a:r>
+              <a:rPr lang="en-US" sz="1800" dirty="0">
+                <a:solidFill>
+                  <a:srgbClr val="111111"/>
+                </a:solidFill>
+                <a:latin typeface="Calibri" pitchFamily="34" charset="0"/>
+                <a:ea typeface="Calibri" pitchFamily="34" charset="-122"/>
+                <a:cs typeface="Calibri" pitchFamily="34" charset="-120"/>
+              </a:rPr>
+              <a:t>Photo, Activity 4: “Nairobi Traffic Jam” by rogiro, CC BY-NC 2.0, via Flickr (https://www.flickr.com/photos/43132185@N00/48712135)</a:t>
+            </a:r>
+            <a:endParaRPr lang="en-US" sz="1800" dirty="0"/>
+          </a:p>
+          <a:p>
+            <a:pPr algn="l" marL="342900" indent="-342900">
+              <a:spcAft>
+                <a:spcPts val="800"/>
+              </a:spcAft>
+              <a:buSzPct val="100000"/>
+              <a:buChar char="•"/>
+            </a:pPr>
+            <a:r>
+              <a:rPr lang="en-US" sz="1800" dirty="0">
+                <a:solidFill>
+                  <a:srgbClr val="111111"/>
+                </a:solidFill>
+                <a:latin typeface="Calibri" pitchFamily="34" charset="0"/>
+                <a:ea typeface="Calibri" pitchFamily="34" charset="-122"/>
+                <a:cs typeface="Calibri" pitchFamily="34" charset="-120"/>
+              </a:rPr>
+              <a:t>Photo, Activity 5: “New Town Housing, Fullers Slade, Milton Keynes” by The JR James Archive, University of Sheffield, CC BY-NC 2.0, via Flickr (https://www.flickr.com/photos/98068999@N05/9253665547)</a:t>
+            </a:r>
+            <a:endParaRPr lang="en-US" sz="1800" dirty="0"/>
+          </a:p>
+          <a:p>
+            <a:pPr algn="l" marL="342900" indent="-342900">
+              <a:spcAft>
+                <a:spcPts val="800"/>
+              </a:spcAft>
+              <a:buSzPct val="100000"/>
+              <a:buChar char="•"/>
+            </a:pPr>
+            <a:r>
+              <a:rPr lang="en-US" sz="1800" dirty="0">
+                <a:solidFill>
+                  <a:srgbClr val="111111"/>
+                </a:solidFill>
+                <a:latin typeface="Calibri" pitchFamily="34" charset="0"/>
+                <a:ea typeface="Calibri" pitchFamily="34" charset="-122"/>
+                <a:cs typeface="Calibri" pitchFamily="34" charset="-120"/>
+              </a:rPr>
+              <a:t>Diagrams and animations: drawn for this lesson (Geography Department).</a:t>
+            </a:r>
+            <a:endParaRPr lang="en-US" sz="1800" dirty="0"/>
+          </a:p>
+        </p:txBody>
+      </p:sp>
+      <p:sp>
+        <p:nvSpPr>
+          <p:cNvPr id="25" name="Slide Number Placeholder 0"/>
+          <p:cNvSpPr>
+            <a:spLocks noGrp="1"/>
+          </p:cNvSpPr>
+          <p:nvPr>
+            <p:ph type="sldNum" sz="quarter" idx="4294967295"/>
+          </p:nvPr>
+        </p:nvSpPr>
+        <p:spPr>
+          <a:xfrm>
+            <a:off x="27432" y="91440"/>
+            <a:ext cx="585216" cy="475488"/>
+          </a:xfrm>
+          <a:prstGeom prst="rect">
+            <a:avLst/>
+          </a:prstGeom>
+          <a:extLst>
+            <a:ext uri="{C572A759-6A51-4108-AA02-DFA0A04FC94B}">
+              <ma14:wrappingTextBoxFlag xmlns:ma14="http://schemas.microsoft.com/office/mac/drawingml/2011/main" val="0"/>
+            </a:ext>
+          </a:extLst>
+        </p:spPr>
+        <p:txBody>
+          <a:bodyPr/>
+          <a:lstStyle>
+            <a:lvl1pPr>
+              <a:defRPr sz="2000">
+                <a:solidFill>
+                  <a:srgbClr val="FFFFFF"/>
+                </a:solidFill>
+                <a:latin typeface="Calibri"/>
+                <a:ea typeface="Calibri"/>
+                <a:cs typeface="Calibri"/>
+              </a:defRPr>
+            </a:lvl1pPr>
+          </a:lstStyle>
+          <a:p>
+            <a:pPr algn="ctr"/>
+            <a:fld id="{F7021451-1387-4CA6-816F-3879F97B5CBC}" type="slidenum">
+              <a:rPr b="1" lang="en-US"/>
+              <a:t>61</a:t>
+            </a:fld>
+            <a:endParaRPr lang="en-US"/>
+          </a:p>
+        </p:txBody>
+      </p:sp>
+    </p:spTree>
+  </p:cSld>
+  <p:clrMapOvr>
+    <a:masterClrMapping/>
+  </p:clrMapOvr>
+</p:sld>
+</file>
+
 <file path=ppt/slides/slide7.xml><?xml version="1.0" encoding="utf-8"?>
 <p:sld xmlns:a="http://schemas.openxmlformats.org/drawingml/2006/main" xmlns:r="http://schemas.openxmlformats.org/officeDocument/2006/relationships" xmlns:p="http://schemas.openxmlformats.org/presentationml/2006/main">
   <p:cSld name="Slide 7">
@@ -21279,7 +24628,7 @@
                 <a:ea typeface="Times New Roman" pitchFamily="34" charset="-122"/>
                 <a:cs typeface="Times New Roman" pitchFamily="34" charset="-120"/>
               </a:rPr>
-              <a:t>Propose practical solutions and know the regulations.</a:t>
+              <a:t>Propose practical solutions and know the regulations in force.</a:t>
             </a:r>
             <a:endParaRPr lang="en-US" sz="4000" dirty="0"/>
           </a:p>

--- a/lecons/F2/17_F2_M2_FS06_Urban_Problems_in_Cameroon.pptx
+++ b/lecons/F2/17_F2_M2_FS06_Urban_Problems_in_Cameroon.pptx
@@ -3466,7 +3466,7 @@
           <a:p>
             <a:r>
               <a:rPr lang="en-US" dirty="0"/>
-              <a:t>Before we start the new lesson, let us correct the homework I gave you at the end of Practical Work 4: Location of the Regional and Divisional Headquarters of Cameroon. The question was: On a base map of Cameroon, locate and name the ten regional headquarters. Take out your exercise books.</a:t>
+              <a:t>Before we start the new lesson, let us correct the homework I gave you at the end of Practical Work 4: Location of the Regional and Divisional Headquarters of Cameroon. The question was: Give three urban problems of Cameroonian towns. Take out your exercise books.</a:t>
             </a:r>
             <a:endParaRPr lang="en-US" dirty="0"/>
           </a:p>
@@ -4434,7 +4434,7 @@
           <a:p>
             <a:r>
               <a:rPr lang="en-US" dirty="0"/>
-              <a:t>Here is a good answer. The map shows Maroua, Garoua, Ngaoundéré, Bertoua, Yaoundé, Ebolowa, Douala, Buea, Bafoussam and Bamenda, each in its region, with a title and a key. Compare it with your own answer and correct your work in red.</a:t>
+              <a:t>Here is a good answer. Slums, floods and unemployment (also traffic jams and waste). Compare it with your own answer and correct your work in red.</a:t>
             </a:r>
             <a:endParaRPr lang="en-US" dirty="0"/>
           </a:p>
@@ -4962,7 +4962,7 @@
           <a:p>
             <a:r>
               <a:rPr lang="en-US" dirty="0"/>
-              <a:t>For your homework: Identify one urban problem in your quarter and propose two solutions. We shall correct it at the beginning of our next lesson.</a:t>
+              <a:t>For your homework: Give two products that villages send to towns. We shall correct it at the beginning of our next lesson.</a:t>
             </a:r>
             <a:endParaRPr lang="en-US" dirty="0"/>
           </a:p>
@@ -15794,7 +15794,7 @@
                 <a:ea typeface="Times New Roman" pitchFamily="34" charset="-122"/>
                 <a:cs typeface="Times New Roman" pitchFamily="34" charset="-120"/>
               </a:rPr>
-              <a:t>On a base map of Cameroon, locate and name the ten regional headquarters.</a:t>
+              <a:t>Give three urban problems of Cameroonian towns.</a:t>
             </a:r>
             <a:endParaRPr lang="en-US" sz="4000" dirty="0"/>
           </a:p>
@@ -18772,7 +18772,7 @@
                 <a:ea typeface="Times New Roman" pitchFamily="34" charset="-122"/>
                 <a:cs typeface="Times New Roman" pitchFamily="34" charset="-120"/>
               </a:rPr>
-              <a:t>The map shows Maroua, Garoua, Ngaoundéré, Bertoua, Yaoundé, Ebolowa, Douala, Buea, Bafoussam and Bamenda, each in its region, with a title and a key.</a:t>
+              <a:t>Slums, floods and unemployment (also traffic jams and waste).</a:t>
             </a:r>
             <a:endParaRPr lang="en-US" sz="4000" dirty="0"/>
           </a:p>
@@ -20152,7 +20152,7 @@
                 <a:ea typeface="Times New Roman" pitchFamily="34" charset="-122"/>
                 <a:cs typeface="Times New Roman" pitchFamily="34" charset="-120"/>
               </a:rPr>
-              <a:t>Identify one urban problem in your quarter and propose two solutions.</a:t>
+              <a:t>Give two products that villages send to towns.</a:t>
             </a:r>
             <a:endParaRPr lang="en-US" sz="4000" dirty="0"/>
           </a:p>
@@ -22816,7 +22816,7 @@
                           <a:ea typeface="Calibri" pitchFamily="34" charset="-122"/>
                           <a:cs typeface="Calibri" pitchFamily="34" charset="-120"/>
                         </a:rPr>
-                        <a:t>Identify one urban problem in your quarter and propose two solutions.</a:t>
+                        <a:t>Give two products that villages send to towns.</a:t>
                       </a:r>
                       <a:endParaRPr lang="en-US" sz="1600" dirty="0">
                         <a:latin typeface="Calibri" charset="0"/>
